--- a/docs/Pitch_Deck_Sante_Aproximite_2025.pptx
+++ b/docs/Pitch_Deck_Sante_Aproximite_2025.pptx
@@ -14,11 +14,10 @@
     <p:sldId id="262" r:id="rId8"/>
     <p:sldId id="263" r:id="rId9"/>
     <p:sldId id="264" r:id="rId10"/>
-    <p:sldId id="265" r:id="rId11"/>
-    <p:sldId id="266" r:id="rId12"/>
-    <p:sldId id="267" r:id="rId13"/>
-    <p:sldId id="268" r:id="rId14"/>
-    <p:sldId id="269" r:id="rId15"/>
+    <p:sldId id="266" r:id="rId11"/>
+    <p:sldId id="267" r:id="rId12"/>
+    <p:sldId id="268" r:id="rId13"/>
+    <p:sldId id="269" r:id="rId14"/>
   </p:sldIdLst>
   <p:sldSz cx="12188825" cy="6858000"/>
   <p:notesSz cx="6858000" cy="9144000"/>
@@ -315,7 +314,7 @@
           <a:p>
             <a:fld id="{5BCAD085-E8A6-8845-BD4E-CB4CCA059FC4}" type="datetimeFigureOut">
               <a:rPr lang="en-US" smtClean="0"/>
-              <a:t>4/24/2026</a:t>
+              <a:t>5/2/2026</a:t>
             </a:fld>
             <a:endParaRPr lang="en-US"/>
           </a:p>
@@ -483,7 +482,7 @@
           <a:p>
             <a:fld id="{5BCAD085-E8A6-8845-BD4E-CB4CCA059FC4}" type="datetimeFigureOut">
               <a:rPr lang="en-US" smtClean="0"/>
-              <a:t>4/24/2026</a:t>
+              <a:t>5/2/2026</a:t>
             </a:fld>
             <a:endParaRPr lang="en-US"/>
           </a:p>
@@ -661,7 +660,7 @@
           <a:p>
             <a:fld id="{5BCAD085-E8A6-8845-BD4E-CB4CCA059FC4}" type="datetimeFigureOut">
               <a:rPr lang="en-US" smtClean="0"/>
-              <a:t>4/24/2026</a:t>
+              <a:t>5/2/2026</a:t>
             </a:fld>
             <a:endParaRPr lang="en-US"/>
           </a:p>
@@ -829,7 +828,7 @@
           <a:p>
             <a:fld id="{5BCAD085-E8A6-8845-BD4E-CB4CCA059FC4}" type="datetimeFigureOut">
               <a:rPr lang="en-US" smtClean="0"/>
-              <a:t>4/24/2026</a:t>
+              <a:t>5/2/2026</a:t>
             </a:fld>
             <a:endParaRPr lang="en-US"/>
           </a:p>
@@ -1074,7 +1073,7 @@
           <a:p>
             <a:fld id="{5BCAD085-E8A6-8845-BD4E-CB4CCA059FC4}" type="datetimeFigureOut">
               <a:rPr lang="en-US" smtClean="0"/>
-              <a:t>4/24/2026</a:t>
+              <a:t>5/2/2026</a:t>
             </a:fld>
             <a:endParaRPr lang="en-US"/>
           </a:p>
@@ -1359,7 +1358,7 @@
           <a:p>
             <a:fld id="{5BCAD085-E8A6-8845-BD4E-CB4CCA059FC4}" type="datetimeFigureOut">
               <a:rPr lang="en-US" smtClean="0"/>
-              <a:t>4/24/2026</a:t>
+              <a:t>5/2/2026</a:t>
             </a:fld>
             <a:endParaRPr lang="en-US"/>
           </a:p>
@@ -1778,7 +1777,7 @@
           <a:p>
             <a:fld id="{5BCAD085-E8A6-8845-BD4E-CB4CCA059FC4}" type="datetimeFigureOut">
               <a:rPr lang="en-US" smtClean="0"/>
-              <a:t>4/24/2026</a:t>
+              <a:t>5/2/2026</a:t>
             </a:fld>
             <a:endParaRPr lang="en-US"/>
           </a:p>
@@ -1895,7 +1894,7 @@
           <a:p>
             <a:fld id="{5BCAD085-E8A6-8845-BD4E-CB4CCA059FC4}" type="datetimeFigureOut">
               <a:rPr lang="en-US" smtClean="0"/>
-              <a:t>4/24/2026</a:t>
+              <a:t>5/2/2026</a:t>
             </a:fld>
             <a:endParaRPr lang="en-US"/>
           </a:p>
@@ -1990,7 +1989,7 @@
           <a:p>
             <a:fld id="{5BCAD085-E8A6-8845-BD4E-CB4CCA059FC4}" type="datetimeFigureOut">
               <a:rPr lang="en-US" smtClean="0"/>
-              <a:t>4/24/2026</a:t>
+              <a:t>5/2/2026</a:t>
             </a:fld>
             <a:endParaRPr lang="en-US"/>
           </a:p>
@@ -2265,7 +2264,7 @@
           <a:p>
             <a:fld id="{5BCAD085-E8A6-8845-BD4E-CB4CCA059FC4}" type="datetimeFigureOut">
               <a:rPr lang="en-US" smtClean="0"/>
-              <a:t>4/24/2026</a:t>
+              <a:t>5/2/2026</a:t>
             </a:fld>
             <a:endParaRPr lang="en-US"/>
           </a:p>
@@ -2517,7 +2516,7 @@
           <a:p>
             <a:fld id="{5BCAD085-E8A6-8845-BD4E-CB4CCA059FC4}" type="datetimeFigureOut">
               <a:rPr lang="en-US" smtClean="0"/>
-              <a:t>4/24/2026</a:t>
+              <a:t>5/2/2026</a:t>
             </a:fld>
             <a:endParaRPr lang="en-US"/>
           </a:p>
@@ -2728,7 +2727,7 @@
           <a:p>
             <a:fld id="{5BCAD085-E8A6-8845-BD4E-CB4CCA059FC4}" type="datetimeFigureOut">
               <a:rPr lang="en-US" smtClean="0"/>
-              <a:t>4/24/2026</a:t>
+              <a:t>5/2/2026</a:t>
             </a:fld>
             <a:endParaRPr lang="en-US"/>
           </a:p>
@@ -4239,6 +4238,50 @@
             <a:avLst/>
           </a:prstGeom>
           <a:solidFill>
+            <a:srgbClr val="F5F6FA"/>
+          </a:solidFill>
+          <a:ln>
+            <a:noFill/>
+          </a:ln>
+        </p:spPr>
+        <p:style>
+          <a:lnRef idx="1">
+            <a:schemeClr val="accent1"/>
+          </a:lnRef>
+          <a:fillRef idx="3">
+            <a:schemeClr val="accent1"/>
+          </a:fillRef>
+          <a:effectRef idx="2">
+            <a:schemeClr val="accent1"/>
+          </a:effectRef>
+          <a:fontRef idx="minor">
+            <a:schemeClr val="lt1"/>
+          </a:fontRef>
+        </p:style>
+        <p:txBody>
+          <a:bodyPr rtlCol="0" anchor="ctr"/>
+          <a:lstStyle/>
+          <a:p>
+            <a:pPr algn="ctr"/>
+            <a:endParaRPr/>
+          </a:p>
+        </p:txBody>
+      </p:sp>
+      <p:sp>
+        <p:nvSpPr>
+          <p:cNvPr id="3" name="Rectangle 2"/>
+          <p:cNvSpPr/>
+          <p:nvPr/>
+        </p:nvSpPr>
+        <p:spPr>
+          <a:xfrm>
+            <a:off x="0" y="0"/>
+            <a:ext cx="12188952" cy="1371600"/>
+          </a:xfrm>
+          <a:prstGeom prst="rect">
+            <a:avLst/>
+          </a:prstGeom>
+          <a:solidFill>
             <a:srgbClr val="1C2340"/>
           </a:solidFill>
           <a:ln>
@@ -4270,7 +4313,7 @@
       </p:sp>
       <p:sp>
         <p:nvSpPr>
-          <p:cNvPr id="3" name="Rectangle 2"/>
+          <p:cNvPr id="4" name="Rectangle 3"/>
           <p:cNvSpPr/>
           <p:nvPr/>
         </p:nvSpPr>
@@ -4314,14 +4357,14 @@
       </p:sp>
       <p:sp>
         <p:nvSpPr>
-          <p:cNvPr id="4" name="TextBox 3"/>
-          <p:cNvSpPr txBox="1"/>
-          <p:nvPr/>
-        </p:nvSpPr>
-        <p:spPr>
-          <a:xfrm>
-            <a:off x="274320" y="274320"/>
-            <a:ext cx="7315200" cy="365760"/>
+          <p:cNvPr id="5" name="TextBox 4"/>
+          <p:cNvSpPr txBox="1"/>
+          <p:nvPr/>
+        </p:nvSpPr>
+        <p:spPr>
+          <a:xfrm>
+            <a:off x="274320" y="201168"/>
+            <a:ext cx="7315200" cy="320040"/>
           </a:xfrm>
           <a:prstGeom prst="rect">
             <a:avLst/>
@@ -4336,27 +4379,27 @@
           <a:p>
             <a:pPr algn="l"/>
             <a:r>
-              <a:rPr sz="1100" b="1" i="0">
+              <a:rPr sz="1000" b="1" i="0">
                 <a:solidFill>
                   <a:srgbClr val="009688"/>
                 </a:solidFill>
                 <a:latin typeface="Segoe UI"/>
               </a:rPr>
-              <a:t>STACK TECHNOLOGIQUE</a:t>
-            </a:r>
-          </a:p>
-        </p:txBody>
-      </p:sp>
-      <p:sp>
-        <p:nvSpPr>
-          <p:cNvPr id="5" name="TextBox 4"/>
-          <p:cNvSpPr txBox="1"/>
-          <p:nvPr/>
-        </p:nvSpPr>
-        <p:spPr>
-          <a:xfrm>
-            <a:off x="274320" y="640080"/>
-            <a:ext cx="8229600" cy="594360"/>
+              <a:t>OPPORTUNITÉ DE MARCHÉ</a:t>
+            </a:r>
+          </a:p>
+        </p:txBody>
+      </p:sp>
+      <p:sp>
+        <p:nvSpPr>
+          <p:cNvPr id="6" name="TextBox 5"/>
+          <p:cNvSpPr txBox="1"/>
+          <p:nvPr/>
+        </p:nvSpPr>
+        <p:spPr>
+          <a:xfrm>
+            <a:off x="274320" y="502920"/>
+            <a:ext cx="8229600" cy="685800"/>
           </a:xfrm>
           <a:prstGeom prst="rect">
             <a:avLst/>
@@ -4377,27 +4420,27 @@
                 </a:solidFill>
                 <a:latin typeface="Segoe UI"/>
               </a:rPr>
-              <a:t>Production-ready · Scalable · Sécurisé</a:t>
-            </a:r>
-          </a:p>
-        </p:txBody>
-      </p:sp>
-      <p:sp>
-        <p:nvSpPr>
-          <p:cNvPr id="6" name="Rectangle 5"/>
+              <a:t>Un marché massif et sous-digitalisé</a:t>
+            </a:r>
+          </a:p>
+        </p:txBody>
+      </p:sp>
+      <p:sp>
+        <p:nvSpPr>
+          <p:cNvPr id="7" name="Rectangle 6"/>
           <p:cNvSpPr/>
           <p:nvPr/>
         </p:nvSpPr>
         <p:spPr>
           <a:xfrm>
-            <a:off x="274320" y="1417320"/>
-            <a:ext cx="2743200" cy="5120640"/>
+            <a:off x="274320" y="1554480"/>
+            <a:ext cx="2743200" cy="2103120"/>
           </a:xfrm>
           <a:prstGeom prst="rect">
             <a:avLst/>
           </a:prstGeom>
           <a:solidFill>
-            <a:srgbClr val="1E2848"/>
+            <a:srgbClr val="FFFFFF"/>
           </a:solidFill>
           <a:ln>
             <a:noFill/>
@@ -4428,13 +4471,199 @@
       </p:sp>
       <p:sp>
         <p:nvSpPr>
-          <p:cNvPr id="7" name="Rectangle 6"/>
+          <p:cNvPr id="8" name="Rectangle 7"/>
           <p:cNvSpPr/>
           <p:nvPr/>
         </p:nvSpPr>
         <p:spPr>
           <a:xfrm>
-            <a:off x="274320" y="1417320"/>
+            <a:off x="274320" y="1554480"/>
+            <a:ext cx="2743200" cy="109728"/>
+          </a:xfrm>
+          <a:prstGeom prst="rect">
+            <a:avLst/>
+          </a:prstGeom>
+          <a:solidFill>
+            <a:srgbClr val="009688"/>
+          </a:solidFill>
+          <a:ln>
+            <a:noFill/>
+          </a:ln>
+        </p:spPr>
+        <p:style>
+          <a:lnRef idx="1">
+            <a:schemeClr val="accent1"/>
+          </a:lnRef>
+          <a:fillRef idx="3">
+            <a:schemeClr val="accent1"/>
+          </a:fillRef>
+          <a:effectRef idx="2">
+            <a:schemeClr val="accent1"/>
+          </a:effectRef>
+          <a:fontRef idx="minor">
+            <a:schemeClr val="lt1"/>
+          </a:fontRef>
+        </p:style>
+        <p:txBody>
+          <a:bodyPr rtlCol="0" anchor="ctr"/>
+          <a:lstStyle/>
+          <a:p>
+            <a:pPr algn="ctr"/>
+            <a:endParaRPr/>
+          </a:p>
+        </p:txBody>
+      </p:sp>
+      <p:sp>
+        <p:nvSpPr>
+          <p:cNvPr id="9" name="TextBox 8"/>
+          <p:cNvSpPr txBox="1"/>
+          <p:nvPr/>
+        </p:nvSpPr>
+        <p:spPr>
+          <a:xfrm>
+            <a:off x="274320" y="1874519"/>
+            <a:ext cx="2743200" cy="677108"/>
+          </a:xfrm>
+          <a:prstGeom prst="rect">
+            <a:avLst/>
+          </a:prstGeom>
+          <a:noFill/>
+        </p:spPr>
+        <p:txBody>
+          <a:bodyPr wrap="square">
+            <a:spAutoFit/>
+          </a:bodyPr>
+          <a:lstStyle/>
+          <a:p>
+            <a:pPr algn="ctr"/>
+            <a:r>
+              <a:rPr lang="fr-CI" sz="3800" b="1" i="0" dirty="0">
+                <a:solidFill>
+                  <a:srgbClr val="009688"/>
+                </a:solidFill>
+                <a:latin typeface="Segoe UI"/>
+              </a:rPr>
+              <a:t>29</a:t>
+            </a:r>
+            <a:r>
+              <a:rPr sz="3800" b="1" i="0" dirty="0">
+                <a:solidFill>
+                  <a:srgbClr val="009688"/>
+                </a:solidFill>
+                <a:latin typeface="Segoe UI"/>
+              </a:rPr>
+              <a:t> Md</a:t>
+            </a:r>
+          </a:p>
+        </p:txBody>
+      </p:sp>
+      <p:sp>
+        <p:nvSpPr>
+          <p:cNvPr id="10" name="TextBox 9"/>
+          <p:cNvSpPr txBox="1"/>
+          <p:nvPr/>
+        </p:nvSpPr>
+        <p:spPr>
+          <a:xfrm>
+            <a:off x="274320" y="2651760"/>
+            <a:ext cx="2743200" cy="430887"/>
+          </a:xfrm>
+          <a:prstGeom prst="rect">
+            <a:avLst/>
+          </a:prstGeom>
+          <a:noFill/>
+        </p:spPr>
+        <p:txBody>
+          <a:bodyPr wrap="square">
+            <a:spAutoFit/>
+          </a:bodyPr>
+          <a:lstStyle/>
+          <a:p>
+            <a:pPr algn="ctr"/>
+            <a:r>
+              <a:rPr sz="1100" b="0" i="0" dirty="0">
+                <a:solidFill>
+                  <a:srgbClr val="8E99B0"/>
+                </a:solidFill>
+                <a:latin typeface="Segoe UI"/>
+              </a:rPr>
+              <a:t>Population </a:t>
+            </a:r>
+            <a:r>
+              <a:rPr sz="1100" b="0" i="0" dirty="0" err="1">
+                <a:solidFill>
+                  <a:srgbClr val="8E99B0"/>
+                </a:solidFill>
+                <a:latin typeface="Segoe UI"/>
+              </a:rPr>
+              <a:t>ciblée</a:t>
+            </a:r>
+            <a:r>
+              <a:rPr sz="1100" b="0" i="0" dirty="0">
+                <a:solidFill>
+                  <a:srgbClr val="8E99B0"/>
+                </a:solidFill>
+                <a:latin typeface="Segoe UI"/>
+              </a:rPr>
+              <a:t>
+</a:t>
+            </a:r>
+          </a:p>
+        </p:txBody>
+      </p:sp>
+      <p:sp>
+        <p:nvSpPr>
+          <p:cNvPr id="11" name="Rectangle 10"/>
+          <p:cNvSpPr/>
+          <p:nvPr/>
+        </p:nvSpPr>
+        <p:spPr>
+          <a:xfrm>
+            <a:off x="3218688" y="1554480"/>
+            <a:ext cx="2743200" cy="2103120"/>
+          </a:xfrm>
+          <a:prstGeom prst="rect">
+            <a:avLst/>
+          </a:prstGeom>
+          <a:solidFill>
+            <a:srgbClr val="FFFFFF"/>
+          </a:solidFill>
+          <a:ln>
+            <a:noFill/>
+          </a:ln>
+        </p:spPr>
+        <p:style>
+          <a:lnRef idx="1">
+            <a:schemeClr val="accent1"/>
+          </a:lnRef>
+          <a:fillRef idx="3">
+            <a:schemeClr val="accent1"/>
+          </a:fillRef>
+          <a:effectRef idx="2">
+            <a:schemeClr val="accent1"/>
+          </a:effectRef>
+          <a:fontRef idx="minor">
+            <a:schemeClr val="lt1"/>
+          </a:fontRef>
+        </p:style>
+        <p:txBody>
+          <a:bodyPr rtlCol="0" anchor="ctr"/>
+          <a:lstStyle/>
+          <a:p>
+            <a:pPr algn="ctr"/>
+            <a:endParaRPr/>
+          </a:p>
+        </p:txBody>
+      </p:sp>
+      <p:sp>
+        <p:nvSpPr>
+          <p:cNvPr id="12" name="Rectangle 11"/>
+          <p:cNvSpPr/>
+          <p:nvPr/>
+        </p:nvSpPr>
+        <p:spPr>
+          <a:xfrm>
+            <a:off x="3218688" y="1554480"/>
             <a:ext cx="2743200" cy="109728"/>
           </a:xfrm>
           <a:prstGeom prst="rect">
@@ -4472,55 +4701,100 @@
       </p:sp>
       <p:sp>
         <p:nvSpPr>
-          <p:cNvPr id="8" name="TextBox 7"/>
-          <p:cNvSpPr txBox="1"/>
-          <p:nvPr/>
-        </p:nvSpPr>
-        <p:spPr>
-          <a:xfrm>
-            <a:off x="411480" y="1600200"/>
-            <a:ext cx="2560320" cy="457200"/>
-          </a:xfrm>
-          <a:prstGeom prst="rect">
-            <a:avLst/>
-          </a:prstGeom>
-          <a:noFill/>
-        </p:spPr>
-        <p:txBody>
-          <a:bodyPr wrap="square">
-            <a:spAutoFit/>
-          </a:bodyPr>
-          <a:lstStyle/>
-          <a:p>
-            <a:pPr algn="l"/>
-            <a:r>
-              <a:rPr sz="1400" b="1" i="0">
-                <a:solidFill>
-                  <a:srgbClr val="FFFFFF"/>
-                </a:solidFill>
-                <a:latin typeface="Segoe UI"/>
-              </a:rPr>
-              <a:t>📱 Mobile</a:t>
-            </a:r>
-          </a:p>
-        </p:txBody>
-      </p:sp>
-      <p:sp>
-        <p:nvSpPr>
-          <p:cNvPr id="14" name="Rectangle 13"/>
+          <p:cNvPr id="13" name="TextBox 12"/>
+          <p:cNvSpPr txBox="1"/>
+          <p:nvPr/>
+        </p:nvSpPr>
+        <p:spPr>
+          <a:xfrm>
+            <a:off x="3218688" y="1874519"/>
+            <a:ext cx="2743200" cy="677108"/>
+          </a:xfrm>
+          <a:prstGeom prst="rect">
+            <a:avLst/>
+          </a:prstGeom>
+          <a:noFill/>
+        </p:spPr>
+        <p:txBody>
+          <a:bodyPr wrap="square">
+            <a:spAutoFit/>
+          </a:bodyPr>
+          <a:lstStyle/>
+          <a:p>
+            <a:pPr algn="ctr"/>
+            <a:r>
+              <a:rPr lang="fr-CI" sz="3800" b="1" dirty="0">
+                <a:solidFill>
+                  <a:srgbClr val="E8620A"/>
+                </a:solidFill>
+                <a:latin typeface="Segoe UI"/>
+              </a:rPr>
+              <a:t>130</a:t>
+            </a:r>
+            <a:r>
+              <a:rPr sz="3800" b="1" i="0" dirty="0">
+                <a:solidFill>
+                  <a:srgbClr val="E8620A"/>
+                </a:solidFill>
+                <a:latin typeface="Segoe UI"/>
+              </a:rPr>
+              <a:t>%</a:t>
+            </a:r>
+          </a:p>
+        </p:txBody>
+      </p:sp>
+      <p:sp>
+        <p:nvSpPr>
+          <p:cNvPr id="14" name="TextBox 13"/>
+          <p:cNvSpPr txBox="1"/>
+          <p:nvPr/>
+        </p:nvSpPr>
+        <p:spPr>
+          <a:xfrm>
+            <a:off x="3218688" y="2651760"/>
+            <a:ext cx="2743200" cy="594360"/>
+          </a:xfrm>
+          <a:prstGeom prst="rect">
+            <a:avLst/>
+          </a:prstGeom>
+          <a:noFill/>
+        </p:spPr>
+        <p:txBody>
+          <a:bodyPr wrap="square">
+            <a:spAutoFit/>
+          </a:bodyPr>
+          <a:lstStyle/>
+          <a:p>
+            <a:pPr algn="ctr"/>
+            <a:r>
+              <a:rPr sz="1100" b="0" i="0">
+                <a:solidFill>
+                  <a:srgbClr val="8E99B0"/>
+                </a:solidFill>
+                <a:latin typeface="Segoe UI"/>
+              </a:rPr>
+              <a:t>Pénétration smartphone
+en 2025 (GSMA)</a:t>
+            </a:r>
+          </a:p>
+        </p:txBody>
+      </p:sp>
+      <p:sp>
+        <p:nvSpPr>
+          <p:cNvPr id="15" name="Rectangle 14"/>
           <p:cNvSpPr/>
           <p:nvPr/>
         </p:nvSpPr>
         <p:spPr>
           <a:xfrm>
-            <a:off x="3218688" y="1417320"/>
-            <a:ext cx="2743200" cy="5120640"/>
+            <a:off x="6163056" y="1554480"/>
+            <a:ext cx="2743200" cy="2103120"/>
           </a:xfrm>
           <a:prstGeom prst="rect">
             <a:avLst/>
           </a:prstGeom>
           <a:solidFill>
-            <a:srgbClr val="1E2848"/>
+            <a:srgbClr val="FFFFFF"/>
           </a:solidFill>
           <a:ln>
             <a:noFill/>
@@ -4551,364 +4825,13 @@
       </p:sp>
       <p:sp>
         <p:nvSpPr>
-          <p:cNvPr id="15" name="Rectangle 14"/>
+          <p:cNvPr id="16" name="Rectangle 15"/>
           <p:cNvSpPr/>
           <p:nvPr/>
         </p:nvSpPr>
         <p:spPr>
           <a:xfrm>
-            <a:off x="3218688" y="1417320"/>
-            <a:ext cx="2743200" cy="109728"/>
-          </a:xfrm>
-          <a:prstGeom prst="rect">
-            <a:avLst/>
-          </a:prstGeom>
-          <a:solidFill>
-            <a:srgbClr val="009688"/>
-          </a:solidFill>
-          <a:ln>
-            <a:noFill/>
-          </a:ln>
-        </p:spPr>
-        <p:style>
-          <a:lnRef idx="1">
-            <a:schemeClr val="accent1"/>
-          </a:lnRef>
-          <a:fillRef idx="3">
-            <a:schemeClr val="accent1"/>
-          </a:fillRef>
-          <a:effectRef idx="2">
-            <a:schemeClr val="accent1"/>
-          </a:effectRef>
-          <a:fontRef idx="minor">
-            <a:schemeClr val="lt1"/>
-          </a:fontRef>
-        </p:style>
-        <p:txBody>
-          <a:bodyPr rtlCol="0" anchor="ctr"/>
-          <a:lstStyle/>
-          <a:p>
-            <a:pPr algn="ctr"/>
-            <a:endParaRPr/>
-          </a:p>
-        </p:txBody>
-      </p:sp>
-      <p:sp>
-        <p:nvSpPr>
-          <p:cNvPr id="16" name="TextBox 15"/>
-          <p:cNvSpPr txBox="1"/>
-          <p:nvPr/>
-        </p:nvSpPr>
-        <p:spPr>
-          <a:xfrm>
-            <a:off x="3355848" y="1600200"/>
-            <a:ext cx="2560320" cy="457200"/>
-          </a:xfrm>
-          <a:prstGeom prst="rect">
-            <a:avLst/>
-          </a:prstGeom>
-          <a:noFill/>
-        </p:spPr>
-        <p:txBody>
-          <a:bodyPr wrap="square">
-            <a:spAutoFit/>
-          </a:bodyPr>
-          <a:lstStyle/>
-          <a:p>
-            <a:pPr algn="l"/>
-            <a:r>
-              <a:rPr sz="1400" b="1" i="0">
-                <a:solidFill>
-                  <a:srgbClr val="FFFFFF"/>
-                </a:solidFill>
-                <a:latin typeface="Segoe UI"/>
-              </a:rPr>
-              <a:t>🖥️ Web Admin</a:t>
-            </a:r>
-          </a:p>
-        </p:txBody>
-      </p:sp>
-      <p:sp>
-        <p:nvSpPr>
-          <p:cNvPr id="18" name="TextBox 17"/>
-          <p:cNvSpPr txBox="1"/>
-          <p:nvPr/>
-        </p:nvSpPr>
-        <p:spPr>
-          <a:xfrm>
-            <a:off x="3355848" y="2606040"/>
-            <a:ext cx="2468880" cy="384048"/>
-          </a:xfrm>
-          <a:prstGeom prst="rect">
-            <a:avLst/>
-          </a:prstGeom>
-          <a:noFill/>
-        </p:spPr>
-        <p:txBody>
-          <a:bodyPr wrap="square">
-            <a:spAutoFit/>
-          </a:bodyPr>
-          <a:lstStyle/>
-          <a:p>
-            <a:pPr algn="l"/>
-            <a:r>
-              <a:rPr sz="1050" b="0" i="0">
-                <a:solidFill>
-                  <a:srgbClr val="BBCCDD"/>
-                </a:solidFill>
-                <a:latin typeface="Segoe UI"/>
-              </a:rPr>
-              <a:t>▸  Dashboard temps réel</a:t>
-            </a:r>
-          </a:p>
-        </p:txBody>
-      </p:sp>
-      <p:sp>
-        <p:nvSpPr>
-          <p:cNvPr id="19" name="TextBox 18"/>
-          <p:cNvSpPr txBox="1"/>
-          <p:nvPr/>
-        </p:nvSpPr>
-        <p:spPr>
-          <a:xfrm>
-            <a:off x="3355848" y="3063240"/>
-            <a:ext cx="2468880" cy="384048"/>
-          </a:xfrm>
-          <a:prstGeom prst="rect">
-            <a:avLst/>
-          </a:prstGeom>
-          <a:noFill/>
-        </p:spPr>
-        <p:txBody>
-          <a:bodyPr wrap="square">
-            <a:spAutoFit/>
-          </a:bodyPr>
-          <a:lstStyle/>
-          <a:p>
-            <a:pPr algn="l"/>
-            <a:r>
-              <a:rPr sz="1050" b="0" i="0">
-                <a:solidFill>
-                  <a:srgbClr val="BBCCDD"/>
-                </a:solidFill>
-                <a:latin typeface="Segoe UI"/>
-              </a:rPr>
-              <a:t>▸  Gestion des centres</a:t>
-            </a:r>
-          </a:p>
-        </p:txBody>
-      </p:sp>
-      <p:sp>
-        <p:nvSpPr>
-          <p:cNvPr id="20" name="TextBox 19"/>
-          <p:cNvSpPr txBox="1"/>
-          <p:nvPr/>
-        </p:nvSpPr>
-        <p:spPr>
-          <a:xfrm>
-            <a:off x="3355848" y="3520440"/>
-            <a:ext cx="2468880" cy="384048"/>
-          </a:xfrm>
-          <a:prstGeom prst="rect">
-            <a:avLst/>
-          </a:prstGeom>
-          <a:noFill/>
-        </p:spPr>
-        <p:txBody>
-          <a:bodyPr wrap="square">
-            <a:spAutoFit/>
-          </a:bodyPr>
-          <a:lstStyle/>
-          <a:p>
-            <a:pPr algn="l"/>
-            <a:r>
-              <a:rPr sz="1050" b="0" i="0">
-                <a:solidFill>
-                  <a:srgbClr val="BBCCDD"/>
-                </a:solidFill>
-                <a:latin typeface="Segoe UI"/>
-              </a:rPr>
-              <a:t>▸  Approbation &amp; modération</a:t>
-            </a:r>
-          </a:p>
-        </p:txBody>
-      </p:sp>
-      <p:sp>
-        <p:nvSpPr>
-          <p:cNvPr id="21" name="Rectangle 20"/>
-          <p:cNvSpPr/>
-          <p:nvPr/>
-        </p:nvSpPr>
-        <p:spPr>
-          <a:xfrm>
-            <a:off x="6163056" y="1417320"/>
-            <a:ext cx="2743200" cy="5120640"/>
-          </a:xfrm>
-          <a:prstGeom prst="rect">
-            <a:avLst/>
-          </a:prstGeom>
-          <a:solidFill>
-            <a:srgbClr val="1E2848"/>
-          </a:solidFill>
-          <a:ln>
-            <a:noFill/>
-          </a:ln>
-        </p:spPr>
-        <p:style>
-          <a:lnRef idx="1">
-            <a:schemeClr val="accent1"/>
-          </a:lnRef>
-          <a:fillRef idx="3">
-            <a:schemeClr val="accent1"/>
-          </a:fillRef>
-          <a:effectRef idx="2">
-            <a:schemeClr val="accent1"/>
-          </a:effectRef>
-          <a:fontRef idx="minor">
-            <a:schemeClr val="lt1"/>
-          </a:fontRef>
-        </p:style>
-        <p:txBody>
-          <a:bodyPr rtlCol="0" anchor="ctr"/>
-          <a:lstStyle/>
-          <a:p>
-            <a:pPr algn="ctr"/>
-            <a:endParaRPr/>
-          </a:p>
-        </p:txBody>
-      </p:sp>
-      <p:sp>
-        <p:nvSpPr>
-          <p:cNvPr id="22" name="Rectangle 21"/>
-          <p:cNvSpPr/>
-          <p:nvPr/>
-        </p:nvSpPr>
-        <p:spPr>
-          <a:xfrm>
-            <a:off x="6163056" y="1417320"/>
-            <a:ext cx="2743200" cy="109728"/>
-          </a:xfrm>
-          <a:prstGeom prst="rect">
-            <a:avLst/>
-          </a:prstGeom>
-          <a:solidFill>
-            <a:srgbClr val="7B5EA7"/>
-          </a:solidFill>
-          <a:ln>
-            <a:noFill/>
-          </a:ln>
-        </p:spPr>
-        <p:style>
-          <a:lnRef idx="1">
-            <a:schemeClr val="accent1"/>
-          </a:lnRef>
-          <a:fillRef idx="3">
-            <a:schemeClr val="accent1"/>
-          </a:fillRef>
-          <a:effectRef idx="2">
-            <a:schemeClr val="accent1"/>
-          </a:effectRef>
-          <a:fontRef idx="minor">
-            <a:schemeClr val="lt1"/>
-          </a:fontRef>
-        </p:style>
-        <p:txBody>
-          <a:bodyPr rtlCol="0" anchor="ctr"/>
-          <a:lstStyle/>
-          <a:p>
-            <a:pPr algn="ctr"/>
-            <a:endParaRPr/>
-          </a:p>
-        </p:txBody>
-      </p:sp>
-      <p:sp>
-        <p:nvSpPr>
-          <p:cNvPr id="23" name="TextBox 22"/>
-          <p:cNvSpPr txBox="1"/>
-          <p:nvPr/>
-        </p:nvSpPr>
-        <p:spPr>
-          <a:xfrm>
-            <a:off x="6300216" y="1600200"/>
-            <a:ext cx="2560320" cy="457200"/>
-          </a:xfrm>
-          <a:prstGeom prst="rect">
-            <a:avLst/>
-          </a:prstGeom>
-          <a:noFill/>
-        </p:spPr>
-        <p:txBody>
-          <a:bodyPr wrap="square">
-            <a:spAutoFit/>
-          </a:bodyPr>
-          <a:lstStyle/>
-          <a:p>
-            <a:pPr algn="l"/>
-            <a:r>
-              <a:rPr sz="1400" b="1" i="0" dirty="0">
-                <a:solidFill>
-                  <a:srgbClr val="FFFFFF"/>
-                </a:solidFill>
-                <a:latin typeface="Segoe UI"/>
-              </a:rPr>
-              <a:t>⚙️ Backend API</a:t>
-            </a:r>
-          </a:p>
-        </p:txBody>
-      </p:sp>
-      <p:sp>
-        <p:nvSpPr>
-          <p:cNvPr id="29" name="Rectangle 28"/>
-          <p:cNvSpPr/>
-          <p:nvPr/>
-        </p:nvSpPr>
-        <p:spPr>
-          <a:xfrm>
-            <a:off x="9107424" y="1417320"/>
-            <a:ext cx="2743200" cy="5120640"/>
-          </a:xfrm>
-          <a:prstGeom prst="rect">
-            <a:avLst/>
-          </a:prstGeom>
-          <a:solidFill>
-            <a:srgbClr val="1E2848"/>
-          </a:solidFill>
-          <a:ln>
-            <a:noFill/>
-          </a:ln>
-        </p:spPr>
-        <p:style>
-          <a:lnRef idx="1">
-            <a:schemeClr val="accent1"/>
-          </a:lnRef>
-          <a:fillRef idx="3">
-            <a:schemeClr val="accent1"/>
-          </a:fillRef>
-          <a:effectRef idx="2">
-            <a:schemeClr val="accent1"/>
-          </a:effectRef>
-          <a:fontRef idx="minor">
-            <a:schemeClr val="lt1"/>
-          </a:fontRef>
-        </p:style>
-        <p:txBody>
-          <a:bodyPr rtlCol="0" anchor="ctr"/>
-          <a:lstStyle/>
-          <a:p>
-            <a:pPr algn="ctr"/>
-            <a:endParaRPr/>
-          </a:p>
-        </p:txBody>
-      </p:sp>
-      <p:sp>
-        <p:nvSpPr>
-          <p:cNvPr id="30" name="Rectangle 29"/>
-          <p:cNvSpPr/>
-          <p:nvPr/>
-        </p:nvSpPr>
-        <p:spPr>
-          <a:xfrm>
-            <a:off x="9107424" y="1417320"/>
+            <a:off x="6163056" y="1554480"/>
             <a:ext cx="2743200" cy="109728"/>
           </a:xfrm>
           <a:prstGeom prst="rect">
@@ -4946,14 +4869,383 @@
       </p:sp>
       <p:sp>
         <p:nvSpPr>
+          <p:cNvPr id="17" name="TextBox 16"/>
+          <p:cNvSpPr txBox="1"/>
+          <p:nvPr/>
+        </p:nvSpPr>
+        <p:spPr>
+          <a:xfrm>
+            <a:off x="6163056" y="1874519"/>
+            <a:ext cx="2743200" cy="777240"/>
+          </a:xfrm>
+          <a:prstGeom prst="rect">
+            <a:avLst/>
+          </a:prstGeom>
+          <a:noFill/>
+        </p:spPr>
+        <p:txBody>
+          <a:bodyPr wrap="square">
+            <a:spAutoFit/>
+          </a:bodyPr>
+          <a:lstStyle/>
+          <a:p>
+            <a:pPr algn="ctr"/>
+            <a:r>
+              <a:rPr sz="3800" b="1" i="0">
+                <a:solidFill>
+                  <a:srgbClr val="2ECC71"/>
+                </a:solidFill>
+                <a:latin typeface="Segoe UI"/>
+              </a:rPr>
+              <a:t>3 124</a:t>
+            </a:r>
+          </a:p>
+        </p:txBody>
+      </p:sp>
+      <p:sp>
+        <p:nvSpPr>
+          <p:cNvPr id="18" name="TextBox 17"/>
+          <p:cNvSpPr txBox="1"/>
+          <p:nvPr/>
+        </p:nvSpPr>
+        <p:spPr>
+          <a:xfrm>
+            <a:off x="6163056" y="2651760"/>
+            <a:ext cx="2743200" cy="594360"/>
+          </a:xfrm>
+          <a:prstGeom prst="rect">
+            <a:avLst/>
+          </a:prstGeom>
+          <a:noFill/>
+        </p:spPr>
+        <p:txBody>
+          <a:bodyPr wrap="square">
+            <a:spAutoFit/>
+          </a:bodyPr>
+          <a:lstStyle/>
+          <a:p>
+            <a:pPr algn="ctr"/>
+            <a:r>
+              <a:rPr sz="1100" b="0" i="0">
+                <a:solidFill>
+                  <a:srgbClr val="8E99B0"/>
+                </a:solidFill>
+                <a:latin typeface="Segoe UI"/>
+              </a:rPr>
+              <a:t>Centres déjà
+répertoriés</a:t>
+            </a:r>
+          </a:p>
+        </p:txBody>
+      </p:sp>
+      <p:sp>
+        <p:nvSpPr>
+          <p:cNvPr id="23" name="TextBox 22"/>
+          <p:cNvSpPr txBox="1"/>
+          <p:nvPr/>
+        </p:nvSpPr>
+        <p:spPr>
+          <a:xfrm>
+            <a:off x="274320" y="3840480"/>
+            <a:ext cx="7315200" cy="411480"/>
+          </a:xfrm>
+          <a:prstGeom prst="rect">
+            <a:avLst/>
+          </a:prstGeom>
+          <a:noFill/>
+        </p:spPr>
+        <p:txBody>
+          <a:bodyPr wrap="square">
+            <a:spAutoFit/>
+          </a:bodyPr>
+          <a:lstStyle/>
+          <a:p>
+            <a:pPr algn="l"/>
+            <a:r>
+              <a:rPr sz="1400" b="1" i="0">
+                <a:solidFill>
+                  <a:srgbClr val="1C2340"/>
+                </a:solidFill>
+                <a:latin typeface="Segoe UI"/>
+              </a:rPr>
+              <a:t>Cibles prioritaires de déploiement</a:t>
+            </a:r>
+          </a:p>
+        </p:txBody>
+      </p:sp>
+      <p:sp>
+        <p:nvSpPr>
+          <p:cNvPr id="24" name="Rectangle 23"/>
+          <p:cNvSpPr/>
+          <p:nvPr/>
+        </p:nvSpPr>
+        <p:spPr>
+          <a:xfrm>
+            <a:off x="274320" y="4389120"/>
+            <a:ext cx="5577840" cy="749808"/>
+          </a:xfrm>
+          <a:prstGeom prst="rect">
+            <a:avLst/>
+          </a:prstGeom>
+          <a:solidFill>
+            <a:srgbClr val="FFFFFF"/>
+          </a:solidFill>
+          <a:ln>
+            <a:noFill/>
+          </a:ln>
+        </p:spPr>
+        <p:style>
+          <a:lnRef idx="1">
+            <a:schemeClr val="accent1"/>
+          </a:lnRef>
+          <a:fillRef idx="3">
+            <a:schemeClr val="accent1"/>
+          </a:fillRef>
+          <a:effectRef idx="2">
+            <a:schemeClr val="accent1"/>
+          </a:effectRef>
+          <a:fontRef idx="minor">
+            <a:schemeClr val="lt1"/>
+          </a:fontRef>
+        </p:style>
+        <p:txBody>
+          <a:bodyPr rtlCol="0" anchor="ctr"/>
+          <a:lstStyle/>
+          <a:p>
+            <a:pPr algn="ctr"/>
+            <a:endParaRPr/>
+          </a:p>
+        </p:txBody>
+      </p:sp>
+      <p:sp>
+        <p:nvSpPr>
+          <p:cNvPr id="25" name="TextBox 24"/>
+          <p:cNvSpPr txBox="1"/>
+          <p:nvPr/>
+        </p:nvSpPr>
+        <p:spPr>
+          <a:xfrm>
+            <a:off x="365760" y="4480560"/>
+            <a:ext cx="457200" cy="457200"/>
+          </a:xfrm>
+          <a:prstGeom prst="rect">
+            <a:avLst/>
+          </a:prstGeom>
+          <a:noFill/>
+        </p:spPr>
+        <p:txBody>
+          <a:bodyPr wrap="square">
+            <a:spAutoFit/>
+          </a:bodyPr>
+          <a:lstStyle/>
+          <a:p>
+            <a:pPr algn="l"/>
+            <a:r>
+              <a:rPr sz="2000" b="0" i="0">
+                <a:solidFill>
+                  <a:srgbClr val="1C2340"/>
+                </a:solidFill>
+                <a:latin typeface="Segoe UI"/>
+              </a:rPr>
+              <a:t>🏛️</a:t>
+            </a:r>
+          </a:p>
+        </p:txBody>
+      </p:sp>
+      <p:sp>
+        <p:nvSpPr>
+          <p:cNvPr id="26" name="TextBox 25"/>
+          <p:cNvSpPr txBox="1"/>
+          <p:nvPr/>
+        </p:nvSpPr>
+        <p:spPr>
+          <a:xfrm>
+            <a:off x="960120" y="4443984"/>
+            <a:ext cx="4754880" cy="320040"/>
+          </a:xfrm>
+          <a:prstGeom prst="rect">
+            <a:avLst/>
+          </a:prstGeom>
+          <a:noFill/>
+        </p:spPr>
+        <p:txBody>
+          <a:bodyPr wrap="square">
+            <a:spAutoFit/>
+          </a:bodyPr>
+          <a:lstStyle/>
+          <a:p>
+            <a:pPr algn="l"/>
+            <a:r>
+              <a:rPr sz="1200" b="1" i="0">
+                <a:solidFill>
+                  <a:srgbClr val="1C2340"/>
+                </a:solidFill>
+                <a:latin typeface="Segoe UI"/>
+              </a:rPr>
+              <a:t>Gouvernements &amp; Ministères de la Santé</a:t>
+            </a:r>
+          </a:p>
+        </p:txBody>
+      </p:sp>
+      <p:sp>
+        <p:nvSpPr>
+          <p:cNvPr id="27" name="TextBox 26"/>
+          <p:cNvSpPr txBox="1"/>
+          <p:nvPr/>
+        </p:nvSpPr>
+        <p:spPr>
+          <a:xfrm>
+            <a:off x="960120" y="4773168"/>
+            <a:ext cx="4754880" cy="292608"/>
+          </a:xfrm>
+          <a:prstGeom prst="rect">
+            <a:avLst/>
+          </a:prstGeom>
+          <a:noFill/>
+        </p:spPr>
+        <p:txBody>
+          <a:bodyPr wrap="square">
+            <a:spAutoFit/>
+          </a:bodyPr>
+          <a:lstStyle/>
+          <a:p>
+            <a:pPr algn="l"/>
+            <a:r>
+              <a:rPr sz="1000" b="0" i="0">
+                <a:solidFill>
+                  <a:srgbClr val="8E99B0"/>
+                </a:solidFill>
+                <a:latin typeface="Segoe UI"/>
+              </a:rPr>
+              <a:t>Digitaliser le répertoire national des établissements</a:t>
+            </a:r>
+          </a:p>
+        </p:txBody>
+      </p:sp>
+      <p:sp>
+        <p:nvSpPr>
+          <p:cNvPr id="28" name="Rectangle 27"/>
+          <p:cNvSpPr/>
+          <p:nvPr/>
+        </p:nvSpPr>
+        <p:spPr>
+          <a:xfrm>
+            <a:off x="274320" y="5239512"/>
+            <a:ext cx="5577840" cy="749808"/>
+          </a:xfrm>
+          <a:prstGeom prst="rect">
+            <a:avLst/>
+          </a:prstGeom>
+          <a:solidFill>
+            <a:srgbClr val="FFFFFF"/>
+          </a:solidFill>
+          <a:ln>
+            <a:noFill/>
+          </a:ln>
+        </p:spPr>
+        <p:style>
+          <a:lnRef idx="1">
+            <a:schemeClr val="accent1"/>
+          </a:lnRef>
+          <a:fillRef idx="3">
+            <a:schemeClr val="accent1"/>
+          </a:fillRef>
+          <a:effectRef idx="2">
+            <a:schemeClr val="accent1"/>
+          </a:effectRef>
+          <a:fontRef idx="minor">
+            <a:schemeClr val="lt1"/>
+          </a:fontRef>
+        </p:style>
+        <p:txBody>
+          <a:bodyPr rtlCol="0" anchor="ctr"/>
+          <a:lstStyle/>
+          <a:p>
+            <a:pPr algn="ctr"/>
+            <a:endParaRPr/>
+          </a:p>
+        </p:txBody>
+      </p:sp>
+      <p:sp>
+        <p:nvSpPr>
+          <p:cNvPr id="29" name="TextBox 28"/>
+          <p:cNvSpPr txBox="1"/>
+          <p:nvPr/>
+        </p:nvSpPr>
+        <p:spPr>
+          <a:xfrm>
+            <a:off x="365760" y="5330952"/>
+            <a:ext cx="457200" cy="457200"/>
+          </a:xfrm>
+          <a:prstGeom prst="rect">
+            <a:avLst/>
+          </a:prstGeom>
+          <a:noFill/>
+        </p:spPr>
+        <p:txBody>
+          <a:bodyPr wrap="square">
+            <a:spAutoFit/>
+          </a:bodyPr>
+          <a:lstStyle/>
+          <a:p>
+            <a:pPr algn="l"/>
+            <a:r>
+              <a:rPr sz="2000" b="0" i="0">
+                <a:solidFill>
+                  <a:srgbClr val="1C2340"/>
+                </a:solidFill>
+                <a:latin typeface="Segoe UI"/>
+              </a:rPr>
+              <a:t>🏥</a:t>
+            </a:r>
+          </a:p>
+        </p:txBody>
+      </p:sp>
+      <p:sp>
+        <p:nvSpPr>
+          <p:cNvPr id="30" name="TextBox 29"/>
+          <p:cNvSpPr txBox="1"/>
+          <p:nvPr/>
+        </p:nvSpPr>
+        <p:spPr>
+          <a:xfrm>
+            <a:off x="960120" y="5294376"/>
+            <a:ext cx="4754880" cy="320040"/>
+          </a:xfrm>
+          <a:prstGeom prst="rect">
+            <a:avLst/>
+          </a:prstGeom>
+          <a:noFill/>
+        </p:spPr>
+        <p:txBody>
+          <a:bodyPr wrap="square">
+            <a:spAutoFit/>
+          </a:bodyPr>
+          <a:lstStyle/>
+          <a:p>
+            <a:pPr algn="l"/>
+            <a:r>
+              <a:rPr sz="1200" b="1" i="0">
+                <a:solidFill>
+                  <a:srgbClr val="1C2340"/>
+                </a:solidFill>
+                <a:latin typeface="Segoe UI"/>
+              </a:rPr>
+              <a:t>Établissements Privés</a:t>
+            </a:r>
+          </a:p>
+        </p:txBody>
+      </p:sp>
+      <p:sp>
+        <p:nvSpPr>
           <p:cNvPr id="31" name="TextBox 30"/>
           <p:cNvSpPr txBox="1"/>
           <p:nvPr/>
         </p:nvSpPr>
         <p:spPr>
           <a:xfrm>
-            <a:off x="9244584" y="1600200"/>
-            <a:ext cx="2560320" cy="457200"/>
+            <a:off x="960120" y="5623560"/>
+            <a:ext cx="4754880" cy="292608"/>
           </a:xfrm>
           <a:prstGeom prst="rect">
             <a:avLst/>
@@ -4968,13 +5260,92 @@
           <a:p>
             <a:pPr algn="l"/>
             <a:r>
-              <a:rPr sz="1400" b="1" i="0">
-                <a:solidFill>
-                  <a:srgbClr val="FFFFFF"/>
-                </a:solidFill>
-                <a:latin typeface="Segoe UI"/>
-              </a:rPr>
-              <a:t>🌐 Infrastructure</a:t>
+              <a:rPr sz="1000" b="0" i="0">
+                <a:solidFill>
+                  <a:srgbClr val="8E99B0"/>
+                </a:solidFill>
+                <a:latin typeface="Segoe UI"/>
+              </a:rPr>
+              <a:t>Visibilité, réputation et gestion des retours patients</a:t>
+            </a:r>
+          </a:p>
+        </p:txBody>
+      </p:sp>
+      <p:sp>
+        <p:nvSpPr>
+          <p:cNvPr id="32" name="Rectangle 31"/>
+          <p:cNvSpPr/>
+          <p:nvPr/>
+        </p:nvSpPr>
+        <p:spPr>
+          <a:xfrm>
+            <a:off x="274320" y="6089904"/>
+            <a:ext cx="5577840" cy="749808"/>
+          </a:xfrm>
+          <a:prstGeom prst="rect">
+            <a:avLst/>
+          </a:prstGeom>
+          <a:solidFill>
+            <a:srgbClr val="FFFFFF"/>
+          </a:solidFill>
+          <a:ln>
+            <a:noFill/>
+          </a:ln>
+        </p:spPr>
+        <p:style>
+          <a:lnRef idx="1">
+            <a:schemeClr val="accent1"/>
+          </a:lnRef>
+          <a:fillRef idx="3">
+            <a:schemeClr val="accent1"/>
+          </a:fillRef>
+          <a:effectRef idx="2">
+            <a:schemeClr val="accent1"/>
+          </a:effectRef>
+          <a:fontRef idx="minor">
+            <a:schemeClr val="lt1"/>
+          </a:fontRef>
+        </p:style>
+        <p:txBody>
+          <a:bodyPr rtlCol="0" anchor="ctr"/>
+          <a:lstStyle/>
+          <a:p>
+            <a:pPr algn="ctr"/>
+            <a:endParaRPr/>
+          </a:p>
+        </p:txBody>
+      </p:sp>
+      <p:sp>
+        <p:nvSpPr>
+          <p:cNvPr id="33" name="TextBox 32"/>
+          <p:cNvSpPr txBox="1"/>
+          <p:nvPr/>
+        </p:nvSpPr>
+        <p:spPr>
+          <a:xfrm>
+            <a:off x="365760" y="6181344"/>
+            <a:ext cx="457200" cy="457200"/>
+          </a:xfrm>
+          <a:prstGeom prst="rect">
+            <a:avLst/>
+          </a:prstGeom>
+          <a:noFill/>
+        </p:spPr>
+        <p:txBody>
+          <a:bodyPr wrap="square">
+            <a:spAutoFit/>
+          </a:bodyPr>
+          <a:lstStyle/>
+          <a:p>
+            <a:pPr algn="l"/>
+            <a:r>
+              <a:rPr sz="2000" b="0" i="0">
+                <a:solidFill>
+                  <a:srgbClr val="1C2340"/>
+                </a:solidFill>
+                <a:latin typeface="Segoe UI"/>
+              </a:rPr>
+              <a:t>🚑</a:t>
             </a:r>
           </a:p>
         </p:txBody>
@@ -4987,8 +5358,8 @@
         </p:nvSpPr>
         <p:spPr>
           <a:xfrm>
-            <a:off x="9244584" y="3063240"/>
-            <a:ext cx="2468880" cy="253916"/>
+            <a:off x="960120" y="6144768"/>
+            <a:ext cx="4754880" cy="320040"/>
           </a:xfrm>
           <a:prstGeom prst="rect">
             <a:avLst/>
@@ -5003,13 +5374,13 @@
           <a:p>
             <a:pPr algn="l"/>
             <a:r>
-              <a:rPr sz="1050" b="0" i="0" dirty="0">
-                <a:solidFill>
-                  <a:srgbClr val="BBCCDD"/>
-                </a:solidFill>
-                <a:latin typeface="Segoe UI"/>
-              </a:rPr>
-              <a:t>▸  API </a:t>
+              <a:rPr sz="1200" b="1" i="0">
+                <a:solidFill>
+                  <a:srgbClr val="1C2340"/>
+                </a:solidFill>
+                <a:latin typeface="Segoe UI"/>
+              </a:rPr>
+              <a:t>Services de Secours</a:t>
             </a:r>
           </a:p>
         </p:txBody>
@@ -5022,8 +5393,8 @@
         </p:nvSpPr>
         <p:spPr>
           <a:xfrm>
-            <a:off x="9244584" y="3520440"/>
-            <a:ext cx="2468880" cy="384048"/>
+            <a:off x="960120" y="6473952"/>
+            <a:ext cx="4754880" cy="292608"/>
           </a:xfrm>
           <a:prstGeom prst="rect">
             <a:avLst/>
@@ -5038,27 +5409,71 @@
           <a:p>
             <a:pPr algn="l"/>
             <a:r>
-              <a:rPr sz="1050" b="0" i="0">
-                <a:solidFill>
-                  <a:srgbClr val="BBCCDD"/>
-                </a:solidFill>
-                <a:latin typeface="Segoe UI"/>
-              </a:rPr>
-              <a:t>▸  Déploiement continu prêt</a:t>
-            </a:r>
-          </a:p>
-        </p:txBody>
-      </p:sp>
-      <p:sp>
-        <p:nvSpPr>
-          <p:cNvPr id="36" name="TextBox 35"/>
-          <p:cNvSpPr txBox="1"/>
-          <p:nvPr/>
-        </p:nvSpPr>
-        <p:spPr>
-          <a:xfrm>
-            <a:off x="274320" y="6400800"/>
-            <a:ext cx="11887200" cy="320040"/>
+              <a:rPr sz="1000" b="0" i="0">
+                <a:solidFill>
+                  <a:srgbClr val="8E99B0"/>
+                </a:solidFill>
+                <a:latin typeface="Segoe UI"/>
+              </a:rPr>
+              <a:t>Coordination des interventions d'urgence</a:t>
+            </a:r>
+          </a:p>
+        </p:txBody>
+      </p:sp>
+      <p:sp>
+        <p:nvSpPr>
+          <p:cNvPr id="36" name="Rectangle 35"/>
+          <p:cNvSpPr/>
+          <p:nvPr/>
+        </p:nvSpPr>
+        <p:spPr>
+          <a:xfrm>
+            <a:off x="274320" y="6940296"/>
+            <a:ext cx="5577840" cy="749808"/>
+          </a:xfrm>
+          <a:prstGeom prst="rect">
+            <a:avLst/>
+          </a:prstGeom>
+          <a:solidFill>
+            <a:srgbClr val="FFFFFF"/>
+          </a:solidFill>
+          <a:ln>
+            <a:noFill/>
+          </a:ln>
+        </p:spPr>
+        <p:style>
+          <a:lnRef idx="1">
+            <a:schemeClr val="accent1"/>
+          </a:lnRef>
+          <a:fillRef idx="3">
+            <a:schemeClr val="accent1"/>
+          </a:fillRef>
+          <a:effectRef idx="2">
+            <a:schemeClr val="accent1"/>
+          </a:effectRef>
+          <a:fontRef idx="minor">
+            <a:schemeClr val="lt1"/>
+          </a:fontRef>
+        </p:style>
+        <p:txBody>
+          <a:bodyPr rtlCol="0" anchor="ctr"/>
+          <a:lstStyle/>
+          <a:p>
+            <a:pPr algn="ctr"/>
+            <a:endParaRPr/>
+          </a:p>
+        </p:txBody>
+      </p:sp>
+      <p:sp>
+        <p:nvSpPr>
+          <p:cNvPr id="37" name="TextBox 36"/>
+          <p:cNvSpPr txBox="1"/>
+          <p:nvPr/>
+        </p:nvSpPr>
+        <p:spPr>
+          <a:xfrm>
+            <a:off x="365760" y="7031736"/>
+            <a:ext cx="457200" cy="457200"/>
           </a:xfrm>
           <a:prstGeom prst="rect">
             <a:avLst/>
@@ -5073,14 +5488,235 @@
           <a:p>
             <a:pPr algn="l"/>
             <a:r>
+              <a:rPr sz="2000" b="0" i="0">
+                <a:solidFill>
+                  <a:srgbClr val="1C2340"/>
+                </a:solidFill>
+                <a:latin typeface="Segoe UI"/>
+              </a:rPr>
+              <a:t>📱</a:t>
+            </a:r>
+          </a:p>
+        </p:txBody>
+      </p:sp>
+      <p:sp>
+        <p:nvSpPr>
+          <p:cNvPr id="38" name="TextBox 37"/>
+          <p:cNvSpPr txBox="1"/>
+          <p:nvPr/>
+        </p:nvSpPr>
+        <p:spPr>
+          <a:xfrm>
+            <a:off x="960120" y="6995160"/>
+            <a:ext cx="4754880" cy="320040"/>
+          </a:xfrm>
+          <a:prstGeom prst="rect">
+            <a:avLst/>
+          </a:prstGeom>
+          <a:noFill/>
+        </p:spPr>
+        <p:txBody>
+          <a:bodyPr wrap="square">
+            <a:spAutoFit/>
+          </a:bodyPr>
+          <a:lstStyle/>
+          <a:p>
+            <a:pPr algn="l"/>
+            <a:r>
               <a:rPr sz="1200" b="1" i="0">
                 <a:solidFill>
-                  <a:srgbClr val="009688"/>
-                </a:solidFill>
-                <a:latin typeface="Segoe UI"/>
-              </a:rPr>
-              <a:t>🔑  Points différenciants</a:t>
-            </a:r>
+                  <a:srgbClr val="1C2340"/>
+                </a:solidFill>
+                <a:latin typeface="Segoe UI"/>
+              </a:rPr>
+              <a:t>Grand Public</a:t>
+            </a:r>
+          </a:p>
+        </p:txBody>
+      </p:sp>
+      <p:sp>
+        <p:nvSpPr>
+          <p:cNvPr id="39" name="TextBox 38"/>
+          <p:cNvSpPr txBox="1"/>
+          <p:nvPr/>
+        </p:nvSpPr>
+        <p:spPr>
+          <a:xfrm>
+            <a:off x="960120" y="7324344"/>
+            <a:ext cx="4754880" cy="292608"/>
+          </a:xfrm>
+          <a:prstGeom prst="rect">
+            <a:avLst/>
+          </a:prstGeom>
+          <a:noFill/>
+        </p:spPr>
+        <p:txBody>
+          <a:bodyPr wrap="square">
+            <a:spAutoFit/>
+          </a:bodyPr>
+          <a:lstStyle/>
+          <a:p>
+            <a:pPr algn="l"/>
+            <a:r>
+              <a:rPr sz="1000" b="0" i="0">
+                <a:solidFill>
+                  <a:srgbClr val="8E99B0"/>
+                </a:solidFill>
+                <a:latin typeface="Segoe UI"/>
+              </a:rPr>
+              <a:t>Application gratuite, accès sans compte pour l'essentiel</a:t>
+            </a:r>
+          </a:p>
+        </p:txBody>
+      </p:sp>
+      <p:sp>
+        <p:nvSpPr>
+          <p:cNvPr id="40" name="Rectangle 39"/>
+          <p:cNvSpPr/>
+          <p:nvPr/>
+        </p:nvSpPr>
+        <p:spPr>
+          <a:xfrm>
+            <a:off x="6035040" y="3840480"/>
+            <a:ext cx="5943600" cy="2834640"/>
+          </a:xfrm>
+          <a:prstGeom prst="rect">
+            <a:avLst/>
+          </a:prstGeom>
+          <a:solidFill>
+            <a:srgbClr val="EEF5FF"/>
+          </a:solidFill>
+          <a:ln>
+            <a:noFill/>
+          </a:ln>
+        </p:spPr>
+        <p:style>
+          <a:lnRef idx="1">
+            <a:schemeClr val="accent1"/>
+          </a:lnRef>
+          <a:fillRef idx="3">
+            <a:schemeClr val="accent1"/>
+          </a:fillRef>
+          <a:effectRef idx="2">
+            <a:schemeClr val="accent1"/>
+          </a:effectRef>
+          <a:fontRef idx="minor">
+            <a:schemeClr val="lt1"/>
+          </a:fontRef>
+        </p:style>
+        <p:txBody>
+          <a:bodyPr rtlCol="0" anchor="ctr"/>
+          <a:lstStyle/>
+          <a:p>
+            <a:pPr algn="ctr"/>
+            <a:endParaRPr/>
+          </a:p>
+        </p:txBody>
+      </p:sp>
+      <p:sp>
+        <p:nvSpPr>
+          <p:cNvPr id="41" name="TextBox 40"/>
+          <p:cNvSpPr txBox="1"/>
+          <p:nvPr/>
+        </p:nvSpPr>
+        <p:spPr>
+          <a:xfrm>
+            <a:off x="6035040" y="3840480"/>
+            <a:ext cx="5943600" cy="2834640"/>
+          </a:xfrm>
+          <a:prstGeom prst="rect">
+            <a:avLst/>
+          </a:prstGeom>
+          <a:noFill/>
+        </p:spPr>
+        <p:txBody>
+          <a:bodyPr wrap="square">
+            <a:spAutoFit/>
+          </a:bodyPr>
+          <a:lstStyle/>
+          <a:p>
+            <a:pPr algn="ctr"/>
+            <a:r>
+              <a:rPr sz="1300" b="0" i="0" dirty="0">
+                <a:solidFill>
+                  <a:srgbClr val="1C2340"/>
+                </a:solidFill>
+                <a:latin typeface="Segoe UI"/>
+              </a:rPr>
+              <a:t>🌍
+Côte d'Ivoire · </a:t>
+            </a:r>
+            <a:r>
+              <a:rPr sz="1300" b="0" i="0" dirty="0" err="1">
+                <a:solidFill>
+                  <a:srgbClr val="1C2340"/>
+                </a:solidFill>
+                <a:latin typeface="Segoe UI"/>
+              </a:rPr>
+              <a:t>Sénégal</a:t>
+            </a:r>
+            <a:r>
+              <a:rPr sz="1300" b="0" i="0" dirty="0">
+                <a:solidFill>
+                  <a:srgbClr val="1C2340"/>
+                </a:solidFill>
+                <a:latin typeface="Segoe UI"/>
+              </a:rPr>
+              <a:t> · Mali
+Burkina Faso · Cameroun · </a:t>
+            </a:r>
+            <a:r>
+              <a:rPr sz="1300" b="0" i="0" dirty="0" err="1">
+                <a:solidFill>
+                  <a:srgbClr val="1C2340"/>
+                </a:solidFill>
+                <a:latin typeface="Segoe UI"/>
+              </a:rPr>
+              <a:t>Bénin</a:t>
+            </a:r>
+            <a:r>
+              <a:rPr sz="1300" b="0" i="0" dirty="0">
+                <a:solidFill>
+                  <a:srgbClr val="1C2340"/>
+                </a:solidFill>
+                <a:latin typeface="Segoe UI"/>
+              </a:rPr>
+              <a:t>
+→ Extension </a:t>
+            </a:r>
+            <a:r>
+              <a:rPr sz="1300" b="0" i="0" dirty="0" err="1">
+                <a:solidFill>
+                  <a:srgbClr val="1C2340"/>
+                </a:solidFill>
+                <a:latin typeface="Segoe UI"/>
+              </a:rPr>
+              <a:t>régionale</a:t>
+            </a:r>
+            <a:r>
+              <a:rPr sz="1300" b="0" i="0" dirty="0">
+                <a:solidFill>
+                  <a:srgbClr val="1C2340"/>
+                </a:solidFill>
+                <a:latin typeface="Segoe UI"/>
+              </a:rPr>
+              <a:t> </a:t>
+            </a:r>
+            <a:r>
+              <a:rPr sz="1300" b="0" i="0" dirty="0" err="1">
+                <a:solidFill>
+                  <a:srgbClr val="1C2340"/>
+                </a:solidFill>
+                <a:latin typeface="Segoe UI"/>
+              </a:rPr>
+              <a:t>planifiée</a:t>
+            </a:r>
+            <a:endParaRPr sz="1300" b="0" i="0" dirty="0">
+              <a:solidFill>
+                <a:srgbClr val="1C2340"/>
+              </a:solidFill>
+              <a:latin typeface="Segoe UI"/>
+            </a:endParaRPr>
           </a:p>
         </p:txBody>
       </p:sp>
@@ -5124,7 +5760,7 @@
             <a:avLst/>
           </a:prstGeom>
           <a:solidFill>
-            <a:srgbClr val="F5F6FA"/>
+            <a:srgbClr val="1C2340"/>
           </a:solidFill>
           <a:ln>
             <a:noFill/>
@@ -5162,13 +5798,13 @@
         <p:spPr>
           <a:xfrm>
             <a:off x="0" y="0"/>
-            <a:ext cx="12188952" cy="1371600"/>
+            <a:ext cx="109728" cy="6858000"/>
           </a:xfrm>
           <a:prstGeom prst="rect">
             <a:avLst/>
           </a:prstGeom>
           <a:solidFill>
-            <a:srgbClr val="1C2340"/>
+            <a:srgbClr val="E8620A"/>
           </a:solidFill>
           <a:ln>
             <a:noFill/>
@@ -5199,14 +5835,128 @@
       </p:sp>
       <p:sp>
         <p:nvSpPr>
-          <p:cNvPr id="4" name="Rectangle 3"/>
+          <p:cNvPr id="4" name="TextBox 3"/>
+          <p:cNvSpPr txBox="1"/>
+          <p:nvPr/>
+        </p:nvSpPr>
+        <p:spPr>
+          <a:xfrm>
+            <a:off x="274320" y="274320"/>
+            <a:ext cx="7315200" cy="365760"/>
+          </a:xfrm>
+          <a:prstGeom prst="rect">
+            <a:avLst/>
+          </a:prstGeom>
+          <a:noFill/>
+        </p:spPr>
+        <p:txBody>
+          <a:bodyPr wrap="square">
+            <a:spAutoFit/>
+          </a:bodyPr>
+          <a:lstStyle/>
+          <a:p>
+            <a:pPr algn="l"/>
+            <a:r>
+              <a:rPr sz="1100" b="1" i="0">
+                <a:solidFill>
+                  <a:srgbClr val="E8620A"/>
+                </a:solidFill>
+                <a:latin typeface="Segoe UI"/>
+              </a:rPr>
+              <a:t>MODÈLE ÉCONOMIQUE</a:t>
+            </a:r>
+          </a:p>
+        </p:txBody>
+      </p:sp>
+      <p:sp>
+        <p:nvSpPr>
+          <p:cNvPr id="5" name="TextBox 4"/>
+          <p:cNvSpPr txBox="1"/>
+          <p:nvPr/>
+        </p:nvSpPr>
+        <p:spPr>
+          <a:xfrm>
+            <a:off x="274320" y="640080"/>
+            <a:ext cx="8229600" cy="594360"/>
+          </a:xfrm>
+          <a:prstGeom prst="rect">
+            <a:avLst/>
+          </a:prstGeom>
+          <a:noFill/>
+        </p:spPr>
+        <p:txBody>
+          <a:bodyPr wrap="square">
+            <a:spAutoFit/>
+          </a:bodyPr>
+          <a:lstStyle/>
+          <a:p>
+            <a:pPr algn="l"/>
+            <a:r>
+              <a:rPr sz="2600" b="1" i="0">
+                <a:solidFill>
+                  <a:srgbClr val="FFFFFF"/>
+                </a:solidFill>
+                <a:latin typeface="Segoe UI"/>
+              </a:rPr>
+              <a:t>Plusieurs leviers de monétisation</a:t>
+            </a:r>
+          </a:p>
+        </p:txBody>
+      </p:sp>
+      <p:sp>
+        <p:nvSpPr>
+          <p:cNvPr id="6" name="Rectangle 5"/>
           <p:cNvSpPr/>
           <p:nvPr/>
         </p:nvSpPr>
         <p:spPr>
           <a:xfrm>
-            <a:off x="0" y="0"/>
-            <a:ext cx="109728" cy="6858000"/>
+            <a:off x="274320" y="1417320"/>
+            <a:ext cx="2743200" cy="3657600"/>
+          </a:xfrm>
+          <a:prstGeom prst="rect">
+            <a:avLst/>
+          </a:prstGeom>
+          <a:solidFill>
+            <a:srgbClr val="1E2848"/>
+          </a:solidFill>
+          <a:ln>
+            <a:noFill/>
+          </a:ln>
+        </p:spPr>
+        <p:style>
+          <a:lnRef idx="1">
+            <a:schemeClr val="accent1"/>
+          </a:lnRef>
+          <a:fillRef idx="3">
+            <a:schemeClr val="accent1"/>
+          </a:fillRef>
+          <a:effectRef idx="2">
+            <a:schemeClr val="accent1"/>
+          </a:effectRef>
+          <a:fontRef idx="minor">
+            <a:schemeClr val="lt1"/>
+          </a:fontRef>
+        </p:style>
+        <p:txBody>
+          <a:bodyPr rtlCol="0" anchor="ctr"/>
+          <a:lstStyle/>
+          <a:p>
+            <a:pPr algn="ctr"/>
+            <a:endParaRPr/>
+          </a:p>
+        </p:txBody>
+      </p:sp>
+      <p:sp>
+        <p:nvSpPr>
+          <p:cNvPr id="7" name="Rectangle 6"/>
+          <p:cNvSpPr/>
+          <p:nvPr/>
+        </p:nvSpPr>
+        <p:spPr>
+          <a:xfrm>
+            <a:off x="274320" y="1417320"/>
+            <a:ext cx="2743200" cy="109728"/>
           </a:xfrm>
           <a:prstGeom prst="rect">
             <a:avLst/>
@@ -5243,14 +5993,14 @@
       </p:sp>
       <p:sp>
         <p:nvSpPr>
-          <p:cNvPr id="5" name="TextBox 4"/>
-          <p:cNvSpPr txBox="1"/>
-          <p:nvPr/>
-        </p:nvSpPr>
-        <p:spPr>
-          <a:xfrm>
-            <a:off x="274320" y="201168"/>
-            <a:ext cx="7315200" cy="320040"/>
+          <p:cNvPr id="8" name="TextBox 7"/>
+          <p:cNvSpPr txBox="1"/>
+          <p:nvPr/>
+        </p:nvSpPr>
+        <p:spPr>
+          <a:xfrm>
+            <a:off x="411480" y="1691640"/>
+            <a:ext cx="640080" cy="594360"/>
           </a:xfrm>
           <a:prstGeom prst="rect">
             <a:avLst/>
@@ -5265,27 +6015,27 @@
           <a:p>
             <a:pPr algn="l"/>
             <a:r>
-              <a:rPr sz="1000" b="1" i="0">
-                <a:solidFill>
-                  <a:srgbClr val="009688"/>
-                </a:solidFill>
-                <a:latin typeface="Segoe UI"/>
-              </a:rPr>
-              <a:t>OPPORTUNITÉ DE MARCHÉ</a:t>
-            </a:r>
-          </a:p>
-        </p:txBody>
-      </p:sp>
-      <p:sp>
-        <p:nvSpPr>
-          <p:cNvPr id="6" name="TextBox 5"/>
-          <p:cNvSpPr txBox="1"/>
-          <p:nvPr/>
-        </p:nvSpPr>
-        <p:spPr>
-          <a:xfrm>
-            <a:off x="274320" y="502920"/>
-            <a:ext cx="8229600" cy="685800"/>
+              <a:rPr sz="2800" b="0" i="0">
+                <a:solidFill>
+                  <a:srgbClr val="FFFFFF"/>
+                </a:solidFill>
+                <a:latin typeface="Segoe UI"/>
+              </a:rPr>
+              <a:t>🆓</a:t>
+            </a:r>
+          </a:p>
+        </p:txBody>
+      </p:sp>
+      <p:sp>
+        <p:nvSpPr>
+          <p:cNvPr id="9" name="TextBox 8"/>
+          <p:cNvSpPr txBox="1"/>
+          <p:nvPr/>
+        </p:nvSpPr>
+        <p:spPr>
+          <a:xfrm>
+            <a:off x="411480" y="2377440"/>
+            <a:ext cx="2468880" cy="457200"/>
           </a:xfrm>
           <a:prstGeom prst="rect">
             <a:avLst/>
@@ -5300,33 +6050,69 @@
           <a:p>
             <a:pPr algn="l"/>
             <a:r>
-              <a:rPr sz="2600" b="1" i="0">
+              <a:rPr sz="1300" b="1" i="0">
                 <a:solidFill>
                   <a:srgbClr val="FFFFFF"/>
                 </a:solidFill>
                 <a:latin typeface="Segoe UI"/>
               </a:rPr>
-              <a:t>Un marché massif et sous-digitalisé</a:t>
-            </a:r>
-          </a:p>
-        </p:txBody>
-      </p:sp>
-      <p:sp>
-        <p:nvSpPr>
-          <p:cNvPr id="7" name="Rectangle 6"/>
+              <a:t>Freemium Citoyen</a:t>
+            </a:r>
+          </a:p>
+        </p:txBody>
+      </p:sp>
+      <p:sp>
+        <p:nvSpPr>
+          <p:cNvPr id="10" name="TextBox 9"/>
+          <p:cNvSpPr txBox="1"/>
+          <p:nvPr/>
+        </p:nvSpPr>
+        <p:spPr>
+          <a:xfrm>
+            <a:off x="411480" y="2880360"/>
+            <a:ext cx="2468880" cy="1371600"/>
+          </a:xfrm>
+          <a:prstGeom prst="rect">
+            <a:avLst/>
+          </a:prstGeom>
+          <a:noFill/>
+        </p:spPr>
+        <p:txBody>
+          <a:bodyPr wrap="square">
+            <a:spAutoFit/>
+          </a:bodyPr>
+          <a:lstStyle/>
+          <a:p>
+            <a:pPr algn="l"/>
+            <a:r>
+              <a:rPr sz="1000" b="0" i="0">
+                <a:solidFill>
+                  <a:srgbClr val="BBCCDD"/>
+                </a:solidFill>
+                <a:latin typeface="Segoe UI"/>
+              </a:rPr>
+              <a:t>Application gratuite pour les utilisateurs finaux.
+Prime pour fonctionnalités avancées (historique étendu, alertes push premium).</a:t>
+            </a:r>
+          </a:p>
+        </p:txBody>
+      </p:sp>
+      <p:sp>
+        <p:nvSpPr>
+          <p:cNvPr id="11" name="Rectangle 10"/>
           <p:cNvSpPr/>
           <p:nvPr/>
         </p:nvSpPr>
         <p:spPr>
           <a:xfrm>
-            <a:off x="274320" y="1554480"/>
-            <a:ext cx="2743200" cy="2103120"/>
+            <a:off x="3218688" y="1417320"/>
+            <a:ext cx="2743200" cy="3657600"/>
           </a:xfrm>
           <a:prstGeom prst="rect">
             <a:avLst/>
           </a:prstGeom>
           <a:solidFill>
-            <a:srgbClr val="FFFFFF"/>
+            <a:srgbClr val="1E2848"/>
           </a:solidFill>
           <a:ln>
             <a:noFill/>
@@ -5357,199 +6143,13 @@
       </p:sp>
       <p:sp>
         <p:nvSpPr>
-          <p:cNvPr id="8" name="Rectangle 7"/>
-          <p:cNvSpPr/>
-          <p:nvPr/>
-        </p:nvSpPr>
-        <p:spPr>
-          <a:xfrm>
-            <a:off x="274320" y="1554480"/>
-            <a:ext cx="2743200" cy="109728"/>
-          </a:xfrm>
-          <a:prstGeom prst="rect">
-            <a:avLst/>
-          </a:prstGeom>
-          <a:solidFill>
-            <a:srgbClr val="009688"/>
-          </a:solidFill>
-          <a:ln>
-            <a:noFill/>
-          </a:ln>
-        </p:spPr>
-        <p:style>
-          <a:lnRef idx="1">
-            <a:schemeClr val="accent1"/>
-          </a:lnRef>
-          <a:fillRef idx="3">
-            <a:schemeClr val="accent1"/>
-          </a:fillRef>
-          <a:effectRef idx="2">
-            <a:schemeClr val="accent1"/>
-          </a:effectRef>
-          <a:fontRef idx="minor">
-            <a:schemeClr val="lt1"/>
-          </a:fontRef>
-        </p:style>
-        <p:txBody>
-          <a:bodyPr rtlCol="0" anchor="ctr"/>
-          <a:lstStyle/>
-          <a:p>
-            <a:pPr algn="ctr"/>
-            <a:endParaRPr/>
-          </a:p>
-        </p:txBody>
-      </p:sp>
-      <p:sp>
-        <p:nvSpPr>
-          <p:cNvPr id="9" name="TextBox 8"/>
-          <p:cNvSpPr txBox="1"/>
-          <p:nvPr/>
-        </p:nvSpPr>
-        <p:spPr>
-          <a:xfrm>
-            <a:off x="274320" y="1874519"/>
-            <a:ext cx="2743200" cy="677108"/>
-          </a:xfrm>
-          <a:prstGeom prst="rect">
-            <a:avLst/>
-          </a:prstGeom>
-          <a:noFill/>
-        </p:spPr>
-        <p:txBody>
-          <a:bodyPr wrap="square">
-            <a:spAutoFit/>
-          </a:bodyPr>
-          <a:lstStyle/>
-          <a:p>
-            <a:pPr algn="ctr"/>
-            <a:r>
-              <a:rPr lang="fr-CI" sz="3800" b="1" i="0" dirty="0">
-                <a:solidFill>
-                  <a:srgbClr val="009688"/>
-                </a:solidFill>
-                <a:latin typeface="Segoe UI"/>
-              </a:rPr>
-              <a:t>29</a:t>
-            </a:r>
-            <a:r>
-              <a:rPr sz="3800" b="1" i="0" dirty="0">
-                <a:solidFill>
-                  <a:srgbClr val="009688"/>
-                </a:solidFill>
-                <a:latin typeface="Segoe UI"/>
-              </a:rPr>
-              <a:t> Md</a:t>
-            </a:r>
-          </a:p>
-        </p:txBody>
-      </p:sp>
-      <p:sp>
-        <p:nvSpPr>
-          <p:cNvPr id="10" name="TextBox 9"/>
-          <p:cNvSpPr txBox="1"/>
-          <p:nvPr/>
-        </p:nvSpPr>
-        <p:spPr>
-          <a:xfrm>
-            <a:off x="274320" y="2651760"/>
-            <a:ext cx="2743200" cy="430887"/>
-          </a:xfrm>
-          <a:prstGeom prst="rect">
-            <a:avLst/>
-          </a:prstGeom>
-          <a:noFill/>
-        </p:spPr>
-        <p:txBody>
-          <a:bodyPr wrap="square">
-            <a:spAutoFit/>
-          </a:bodyPr>
-          <a:lstStyle/>
-          <a:p>
-            <a:pPr algn="ctr"/>
-            <a:r>
-              <a:rPr sz="1100" b="0" i="0" dirty="0">
-                <a:solidFill>
-                  <a:srgbClr val="8E99B0"/>
-                </a:solidFill>
-                <a:latin typeface="Segoe UI"/>
-              </a:rPr>
-              <a:t>Population </a:t>
-            </a:r>
-            <a:r>
-              <a:rPr sz="1100" b="0" i="0" dirty="0" err="1">
-                <a:solidFill>
-                  <a:srgbClr val="8E99B0"/>
-                </a:solidFill>
-                <a:latin typeface="Segoe UI"/>
-              </a:rPr>
-              <a:t>ciblée</a:t>
-            </a:r>
-            <a:r>
-              <a:rPr sz="1100" b="0" i="0" dirty="0">
-                <a:solidFill>
-                  <a:srgbClr val="8E99B0"/>
-                </a:solidFill>
-                <a:latin typeface="Segoe UI"/>
-              </a:rPr>
-              <a:t>
-</a:t>
-            </a:r>
-          </a:p>
-        </p:txBody>
-      </p:sp>
-      <p:sp>
-        <p:nvSpPr>
-          <p:cNvPr id="11" name="Rectangle 10"/>
-          <p:cNvSpPr/>
-          <p:nvPr/>
-        </p:nvSpPr>
-        <p:spPr>
-          <a:xfrm>
-            <a:off x="3218688" y="1554480"/>
-            <a:ext cx="2743200" cy="2103120"/>
-          </a:xfrm>
-          <a:prstGeom prst="rect">
-            <a:avLst/>
-          </a:prstGeom>
-          <a:solidFill>
-            <a:srgbClr val="FFFFFF"/>
-          </a:solidFill>
-          <a:ln>
-            <a:noFill/>
-          </a:ln>
-        </p:spPr>
-        <p:style>
-          <a:lnRef idx="1">
-            <a:schemeClr val="accent1"/>
-          </a:lnRef>
-          <a:fillRef idx="3">
-            <a:schemeClr val="accent1"/>
-          </a:fillRef>
-          <a:effectRef idx="2">
-            <a:schemeClr val="accent1"/>
-          </a:effectRef>
-          <a:fontRef idx="minor">
-            <a:schemeClr val="lt1"/>
-          </a:fontRef>
-        </p:style>
-        <p:txBody>
-          <a:bodyPr rtlCol="0" anchor="ctr"/>
-          <a:lstStyle/>
-          <a:p>
-            <a:pPr algn="ctr"/>
-            <a:endParaRPr/>
-          </a:p>
-        </p:txBody>
-      </p:sp>
-      <p:sp>
-        <p:nvSpPr>
           <p:cNvPr id="12" name="Rectangle 11"/>
           <p:cNvSpPr/>
           <p:nvPr/>
         </p:nvSpPr>
         <p:spPr>
           <a:xfrm>
-            <a:off x="3218688" y="1554480"/>
+            <a:off x="3218688" y="1417320"/>
             <a:ext cx="2743200" cy="109728"/>
           </a:xfrm>
           <a:prstGeom prst="rect">
@@ -5593,38 +6193,29 @@
         </p:nvSpPr>
         <p:spPr>
           <a:xfrm>
-            <a:off x="3218688" y="1874519"/>
-            <a:ext cx="2743200" cy="677108"/>
-          </a:xfrm>
-          <a:prstGeom prst="rect">
-            <a:avLst/>
-          </a:prstGeom>
-          <a:noFill/>
-        </p:spPr>
-        <p:txBody>
-          <a:bodyPr wrap="square">
-            <a:spAutoFit/>
-          </a:bodyPr>
-          <a:lstStyle/>
-          <a:p>
-            <a:pPr algn="ctr"/>
-            <a:r>
-              <a:rPr lang="fr-CI" sz="3800" b="1" dirty="0">
-                <a:solidFill>
-                  <a:srgbClr val="E8620A"/>
-                </a:solidFill>
-                <a:latin typeface="Segoe UI"/>
-              </a:rPr>
-              <a:t>130</a:t>
-            </a:r>
-            <a:r>
-              <a:rPr sz="3800" b="1" i="0" dirty="0">
-                <a:solidFill>
-                  <a:srgbClr val="E8620A"/>
-                </a:solidFill>
-                <a:latin typeface="Segoe UI"/>
-              </a:rPr>
-              <a:t>%</a:t>
+            <a:off x="3355848" y="1691640"/>
+            <a:ext cx="640080" cy="594360"/>
+          </a:xfrm>
+          <a:prstGeom prst="rect">
+            <a:avLst/>
+          </a:prstGeom>
+          <a:noFill/>
+        </p:spPr>
+        <p:txBody>
+          <a:bodyPr wrap="square">
+            <a:spAutoFit/>
+          </a:bodyPr>
+          <a:lstStyle/>
+          <a:p>
+            <a:pPr algn="l"/>
+            <a:r>
+              <a:rPr sz="2800" b="0" i="0">
+                <a:solidFill>
+                  <a:srgbClr val="FFFFFF"/>
+                </a:solidFill>
+                <a:latin typeface="Segoe UI"/>
+              </a:rPr>
+              <a:t>💼</a:t>
             </a:r>
           </a:p>
         </p:txBody>
@@ -5637,50 +6228,85 @@
         </p:nvSpPr>
         <p:spPr>
           <a:xfrm>
-            <a:off x="3218688" y="2651760"/>
-            <a:ext cx="2743200" cy="594360"/>
-          </a:xfrm>
-          <a:prstGeom prst="rect">
-            <a:avLst/>
-          </a:prstGeom>
-          <a:noFill/>
-        </p:spPr>
-        <p:txBody>
-          <a:bodyPr wrap="square">
-            <a:spAutoFit/>
-          </a:bodyPr>
-          <a:lstStyle/>
-          <a:p>
-            <a:pPr algn="ctr"/>
-            <a:r>
-              <a:rPr sz="1100" b="0" i="0">
-                <a:solidFill>
-                  <a:srgbClr val="8E99B0"/>
-                </a:solidFill>
-                <a:latin typeface="Segoe UI"/>
-              </a:rPr>
-              <a:t>Pénétration smartphone
-en 2025 (GSMA)</a:t>
-            </a:r>
-          </a:p>
-        </p:txBody>
-      </p:sp>
-      <p:sp>
-        <p:nvSpPr>
-          <p:cNvPr id="15" name="Rectangle 14"/>
+            <a:off x="3355848" y="2377440"/>
+            <a:ext cx="2468880" cy="457200"/>
+          </a:xfrm>
+          <a:prstGeom prst="rect">
+            <a:avLst/>
+          </a:prstGeom>
+          <a:noFill/>
+        </p:spPr>
+        <p:txBody>
+          <a:bodyPr wrap="square">
+            <a:spAutoFit/>
+          </a:bodyPr>
+          <a:lstStyle/>
+          <a:p>
+            <a:pPr algn="l"/>
+            <a:r>
+              <a:rPr sz="1300" b="1" i="0">
+                <a:solidFill>
+                  <a:srgbClr val="FFFFFF"/>
+                </a:solidFill>
+                <a:latin typeface="Segoe UI"/>
+              </a:rPr>
+              <a:t>SaaS Établissement</a:t>
+            </a:r>
+          </a:p>
+        </p:txBody>
+      </p:sp>
+      <p:sp>
+        <p:nvSpPr>
+          <p:cNvPr id="15" name="TextBox 14"/>
+          <p:cNvSpPr txBox="1"/>
+          <p:nvPr/>
+        </p:nvSpPr>
+        <p:spPr>
+          <a:xfrm>
+            <a:off x="3355848" y="2880360"/>
+            <a:ext cx="2468880" cy="1371600"/>
+          </a:xfrm>
+          <a:prstGeom prst="rect">
+            <a:avLst/>
+          </a:prstGeom>
+          <a:noFill/>
+        </p:spPr>
+        <p:txBody>
+          <a:bodyPr wrap="square">
+            <a:spAutoFit/>
+          </a:bodyPr>
+          <a:lstStyle/>
+          <a:p>
+            <a:pPr algn="l"/>
+            <a:r>
+              <a:rPr sz="1000" b="0" i="0">
+                <a:solidFill>
+                  <a:srgbClr val="BBCCDD"/>
+                </a:solidFill>
+                <a:latin typeface="Segoe UI"/>
+              </a:rPr>
+              <a:t>Abonnement mensuel pour les chefs d'établissement :
+visibilité boostée, statistiques détaillées, support prioritaire.</a:t>
+            </a:r>
+          </a:p>
+        </p:txBody>
+      </p:sp>
+      <p:sp>
+        <p:nvSpPr>
+          <p:cNvPr id="16" name="Rectangle 15"/>
           <p:cNvSpPr/>
           <p:nvPr/>
         </p:nvSpPr>
         <p:spPr>
           <a:xfrm>
-            <a:off x="6163056" y="1554480"/>
-            <a:ext cx="2743200" cy="2103120"/>
+            <a:off x="6163056" y="1417320"/>
+            <a:ext cx="2743200" cy="3657600"/>
           </a:xfrm>
           <a:prstGeom prst="rect">
             <a:avLst/>
           </a:prstGeom>
           <a:solidFill>
-            <a:srgbClr val="FFFFFF"/>
+            <a:srgbClr val="1E2848"/>
           </a:solidFill>
           <a:ln>
             <a:noFill/>
@@ -5711,13 +6337,207 @@
       </p:sp>
       <p:sp>
         <p:nvSpPr>
-          <p:cNvPr id="16" name="Rectangle 15"/>
+          <p:cNvPr id="17" name="Rectangle 16"/>
           <p:cNvSpPr/>
           <p:nvPr/>
         </p:nvSpPr>
         <p:spPr>
           <a:xfrm>
-            <a:off x="6163056" y="1554480"/>
+            <a:off x="6163056" y="1417320"/>
+            <a:ext cx="2743200" cy="109728"/>
+          </a:xfrm>
+          <a:prstGeom prst="rect">
+            <a:avLst/>
+          </a:prstGeom>
+          <a:solidFill>
+            <a:srgbClr val="7B5EA7"/>
+          </a:solidFill>
+          <a:ln>
+            <a:noFill/>
+          </a:ln>
+        </p:spPr>
+        <p:style>
+          <a:lnRef idx="1">
+            <a:schemeClr val="accent1"/>
+          </a:lnRef>
+          <a:fillRef idx="3">
+            <a:schemeClr val="accent1"/>
+          </a:fillRef>
+          <a:effectRef idx="2">
+            <a:schemeClr val="accent1"/>
+          </a:effectRef>
+          <a:fontRef idx="minor">
+            <a:schemeClr val="lt1"/>
+          </a:fontRef>
+        </p:style>
+        <p:txBody>
+          <a:bodyPr rtlCol="0" anchor="ctr"/>
+          <a:lstStyle/>
+          <a:p>
+            <a:pPr algn="ctr"/>
+            <a:endParaRPr/>
+          </a:p>
+        </p:txBody>
+      </p:sp>
+      <p:sp>
+        <p:nvSpPr>
+          <p:cNvPr id="18" name="TextBox 17"/>
+          <p:cNvSpPr txBox="1"/>
+          <p:nvPr/>
+        </p:nvSpPr>
+        <p:spPr>
+          <a:xfrm>
+            <a:off x="6300216" y="1691640"/>
+            <a:ext cx="640080" cy="594360"/>
+          </a:xfrm>
+          <a:prstGeom prst="rect">
+            <a:avLst/>
+          </a:prstGeom>
+          <a:noFill/>
+        </p:spPr>
+        <p:txBody>
+          <a:bodyPr wrap="square">
+            <a:spAutoFit/>
+          </a:bodyPr>
+          <a:lstStyle/>
+          <a:p>
+            <a:pPr algn="l"/>
+            <a:r>
+              <a:rPr sz="2800" b="0" i="0">
+                <a:solidFill>
+                  <a:srgbClr val="FFFFFF"/>
+                </a:solidFill>
+                <a:latin typeface="Segoe UI"/>
+              </a:rPr>
+              <a:t>🏛️</a:t>
+            </a:r>
+          </a:p>
+        </p:txBody>
+      </p:sp>
+      <p:sp>
+        <p:nvSpPr>
+          <p:cNvPr id="19" name="TextBox 18"/>
+          <p:cNvSpPr txBox="1"/>
+          <p:nvPr/>
+        </p:nvSpPr>
+        <p:spPr>
+          <a:xfrm>
+            <a:off x="6300216" y="2377440"/>
+            <a:ext cx="2468880" cy="457200"/>
+          </a:xfrm>
+          <a:prstGeom prst="rect">
+            <a:avLst/>
+          </a:prstGeom>
+          <a:noFill/>
+        </p:spPr>
+        <p:txBody>
+          <a:bodyPr wrap="square">
+            <a:spAutoFit/>
+          </a:bodyPr>
+          <a:lstStyle/>
+          <a:p>
+            <a:pPr algn="l"/>
+            <a:r>
+              <a:rPr sz="1300" b="1" i="0">
+                <a:solidFill>
+                  <a:srgbClr val="FFFFFF"/>
+                </a:solidFill>
+                <a:latin typeface="Segoe UI"/>
+              </a:rPr>
+              <a:t>Licences Gouvernementales</a:t>
+            </a:r>
+          </a:p>
+        </p:txBody>
+      </p:sp>
+      <p:sp>
+        <p:nvSpPr>
+          <p:cNvPr id="20" name="TextBox 19"/>
+          <p:cNvSpPr txBox="1"/>
+          <p:nvPr/>
+        </p:nvSpPr>
+        <p:spPr>
+          <a:xfrm>
+            <a:off x="6300216" y="2880360"/>
+            <a:ext cx="2468880" cy="1371600"/>
+          </a:xfrm>
+          <a:prstGeom prst="rect">
+            <a:avLst/>
+          </a:prstGeom>
+          <a:noFill/>
+        </p:spPr>
+        <p:txBody>
+          <a:bodyPr wrap="square">
+            <a:spAutoFit/>
+          </a:bodyPr>
+          <a:lstStyle/>
+          <a:p>
+            <a:pPr algn="l"/>
+            <a:r>
+              <a:rPr sz="1000" b="0" i="0">
+                <a:solidFill>
+                  <a:srgbClr val="BBCCDD"/>
+                </a:solidFill>
+                <a:latin typeface="Segoe UI"/>
+              </a:rPr>
+              <a:t>Contrats B2G : Ministères de la Santé, mairies, districts.
+Base de données nationale des établissements, tableaux de bord régionaux.</a:t>
+            </a:r>
+          </a:p>
+        </p:txBody>
+      </p:sp>
+      <p:sp>
+        <p:nvSpPr>
+          <p:cNvPr id="21" name="Rectangle 20"/>
+          <p:cNvSpPr/>
+          <p:nvPr/>
+        </p:nvSpPr>
+        <p:spPr>
+          <a:xfrm>
+            <a:off x="9107424" y="1417320"/>
+            <a:ext cx="2743200" cy="3657600"/>
+          </a:xfrm>
+          <a:prstGeom prst="rect">
+            <a:avLst/>
+          </a:prstGeom>
+          <a:solidFill>
+            <a:srgbClr val="1E2848"/>
+          </a:solidFill>
+          <a:ln>
+            <a:noFill/>
+          </a:ln>
+        </p:spPr>
+        <p:style>
+          <a:lnRef idx="1">
+            <a:schemeClr val="accent1"/>
+          </a:lnRef>
+          <a:fillRef idx="3">
+            <a:schemeClr val="accent1"/>
+          </a:fillRef>
+          <a:effectRef idx="2">
+            <a:schemeClr val="accent1"/>
+          </a:effectRef>
+          <a:fontRef idx="minor">
+            <a:schemeClr val="lt1"/>
+          </a:fontRef>
+        </p:style>
+        <p:txBody>
+          <a:bodyPr rtlCol="0" anchor="ctr"/>
+          <a:lstStyle/>
+          <a:p>
+            <a:pPr algn="ctr"/>
+            <a:endParaRPr/>
+          </a:p>
+        </p:txBody>
+      </p:sp>
+      <p:sp>
+        <p:nvSpPr>
+          <p:cNvPr id="22" name="Rectangle 21"/>
+          <p:cNvSpPr/>
+          <p:nvPr/>
+        </p:nvSpPr>
+        <p:spPr>
+          <a:xfrm>
+            <a:off x="9107424" y="1417320"/>
             <a:ext cx="2743200" cy="109728"/>
           </a:xfrm>
           <a:prstGeom prst="rect">
@@ -5755,85 +6575,14 @@
       </p:sp>
       <p:sp>
         <p:nvSpPr>
-          <p:cNvPr id="17" name="TextBox 16"/>
-          <p:cNvSpPr txBox="1"/>
-          <p:nvPr/>
-        </p:nvSpPr>
-        <p:spPr>
-          <a:xfrm>
-            <a:off x="6163056" y="1874519"/>
-            <a:ext cx="2743200" cy="777240"/>
-          </a:xfrm>
-          <a:prstGeom prst="rect">
-            <a:avLst/>
-          </a:prstGeom>
-          <a:noFill/>
-        </p:spPr>
-        <p:txBody>
-          <a:bodyPr wrap="square">
-            <a:spAutoFit/>
-          </a:bodyPr>
-          <a:lstStyle/>
-          <a:p>
-            <a:pPr algn="ctr"/>
-            <a:r>
-              <a:rPr sz="3800" b="1" i="0">
-                <a:solidFill>
-                  <a:srgbClr val="2ECC71"/>
-                </a:solidFill>
-                <a:latin typeface="Segoe UI"/>
-              </a:rPr>
-              <a:t>3 124</a:t>
-            </a:r>
-          </a:p>
-        </p:txBody>
-      </p:sp>
-      <p:sp>
-        <p:nvSpPr>
-          <p:cNvPr id="18" name="TextBox 17"/>
-          <p:cNvSpPr txBox="1"/>
-          <p:nvPr/>
-        </p:nvSpPr>
-        <p:spPr>
-          <a:xfrm>
-            <a:off x="6163056" y="2651760"/>
-            <a:ext cx="2743200" cy="594360"/>
-          </a:xfrm>
-          <a:prstGeom prst="rect">
-            <a:avLst/>
-          </a:prstGeom>
-          <a:noFill/>
-        </p:spPr>
-        <p:txBody>
-          <a:bodyPr wrap="square">
-            <a:spAutoFit/>
-          </a:bodyPr>
-          <a:lstStyle/>
-          <a:p>
-            <a:pPr algn="ctr"/>
-            <a:r>
-              <a:rPr sz="1100" b="0" i="0">
-                <a:solidFill>
-                  <a:srgbClr val="8E99B0"/>
-                </a:solidFill>
-                <a:latin typeface="Segoe UI"/>
-              </a:rPr>
-              <a:t>Centres déjà
-répertoriés</a:t>
-            </a:r>
-          </a:p>
-        </p:txBody>
-      </p:sp>
-      <p:sp>
-        <p:nvSpPr>
           <p:cNvPr id="23" name="TextBox 22"/>
           <p:cNvSpPr txBox="1"/>
           <p:nvPr/>
         </p:nvSpPr>
         <p:spPr>
           <a:xfrm>
-            <a:off x="274320" y="3840480"/>
-            <a:ext cx="7315200" cy="411480"/>
+            <a:off x="9244584" y="1691640"/>
+            <a:ext cx="640080" cy="594360"/>
           </a:xfrm>
           <a:prstGeom prst="rect">
             <a:avLst/>
@@ -5848,58 +6597,49 @@
           <a:p>
             <a:pPr algn="l"/>
             <a:r>
-              <a:rPr sz="1400" b="1" i="0">
-                <a:solidFill>
-                  <a:srgbClr val="1C2340"/>
-                </a:solidFill>
-                <a:latin typeface="Segoe UI"/>
-              </a:rPr>
-              <a:t>Cibles prioritaires de déploiement</a:t>
-            </a:r>
-          </a:p>
-        </p:txBody>
-      </p:sp>
-      <p:sp>
-        <p:nvSpPr>
-          <p:cNvPr id="24" name="Rectangle 23"/>
-          <p:cNvSpPr/>
-          <p:nvPr/>
-        </p:nvSpPr>
-        <p:spPr>
-          <a:xfrm>
-            <a:off x="274320" y="4389120"/>
-            <a:ext cx="5577840" cy="749808"/>
-          </a:xfrm>
-          <a:prstGeom prst="rect">
-            <a:avLst/>
-          </a:prstGeom>
-          <a:solidFill>
-            <a:srgbClr val="FFFFFF"/>
-          </a:solidFill>
-          <a:ln>
-            <a:noFill/>
-          </a:ln>
-        </p:spPr>
-        <p:style>
-          <a:lnRef idx="1">
-            <a:schemeClr val="accent1"/>
-          </a:lnRef>
-          <a:fillRef idx="3">
-            <a:schemeClr val="accent1"/>
-          </a:fillRef>
-          <a:effectRef idx="2">
-            <a:schemeClr val="accent1"/>
-          </a:effectRef>
-          <a:fontRef idx="minor">
-            <a:schemeClr val="lt1"/>
-          </a:fontRef>
-        </p:style>
-        <p:txBody>
-          <a:bodyPr rtlCol="0" anchor="ctr"/>
-          <a:lstStyle/>
-          <a:p>
-            <a:pPr algn="ctr"/>
-            <a:endParaRPr/>
+              <a:rPr sz="2800" b="0" i="0">
+                <a:solidFill>
+                  <a:srgbClr val="FFFFFF"/>
+                </a:solidFill>
+                <a:latin typeface="Segoe UI"/>
+              </a:rPr>
+              <a:t>🤝</a:t>
+            </a:r>
+          </a:p>
+        </p:txBody>
+      </p:sp>
+      <p:sp>
+        <p:nvSpPr>
+          <p:cNvPr id="24" name="TextBox 23"/>
+          <p:cNvSpPr txBox="1"/>
+          <p:nvPr/>
+        </p:nvSpPr>
+        <p:spPr>
+          <a:xfrm>
+            <a:off x="9244584" y="2377440"/>
+            <a:ext cx="2468880" cy="457200"/>
+          </a:xfrm>
+          <a:prstGeom prst="rect">
+            <a:avLst/>
+          </a:prstGeom>
+          <a:noFill/>
+        </p:spPr>
+        <p:txBody>
+          <a:bodyPr wrap="square">
+            <a:spAutoFit/>
+          </a:bodyPr>
+          <a:lstStyle/>
+          <a:p>
+            <a:pPr algn="l"/>
+            <a:r>
+              <a:rPr sz="1300" b="1" i="0">
+                <a:solidFill>
+                  <a:srgbClr val="FFFFFF"/>
+                </a:solidFill>
+                <a:latin typeface="Segoe UI"/>
+              </a:rPr>
+              <a:t>Partenariats</a:t>
+            </a:r>
           </a:p>
         </p:txBody>
       </p:sp>
@@ -5911,8 +6651,8 @@
         </p:nvSpPr>
         <p:spPr>
           <a:xfrm>
-            <a:off x="365760" y="4480560"/>
-            <a:ext cx="457200" cy="457200"/>
+            <a:off x="9244584" y="2880360"/>
+            <a:ext cx="2468880" cy="1371600"/>
           </a:xfrm>
           <a:prstGeom prst="rect">
             <a:avLst/>
@@ -5927,682 +6667,15 @@
           <a:p>
             <a:pPr algn="l"/>
             <a:r>
-              <a:rPr sz="2000" b="0" i="0">
-                <a:solidFill>
-                  <a:srgbClr val="1C2340"/>
-                </a:solidFill>
-                <a:latin typeface="Segoe UI"/>
-              </a:rPr>
-              <a:t>🏛️</a:t>
-            </a:r>
-          </a:p>
-        </p:txBody>
-      </p:sp>
-      <p:sp>
-        <p:nvSpPr>
-          <p:cNvPr id="26" name="TextBox 25"/>
-          <p:cNvSpPr txBox="1"/>
-          <p:nvPr/>
-        </p:nvSpPr>
-        <p:spPr>
-          <a:xfrm>
-            <a:off x="960120" y="4443984"/>
-            <a:ext cx="4754880" cy="320040"/>
-          </a:xfrm>
-          <a:prstGeom prst="rect">
-            <a:avLst/>
-          </a:prstGeom>
-          <a:noFill/>
-        </p:spPr>
-        <p:txBody>
-          <a:bodyPr wrap="square">
-            <a:spAutoFit/>
-          </a:bodyPr>
-          <a:lstStyle/>
-          <a:p>
-            <a:pPr algn="l"/>
-            <a:r>
-              <a:rPr sz="1200" b="1" i="0">
-                <a:solidFill>
-                  <a:srgbClr val="1C2340"/>
-                </a:solidFill>
-                <a:latin typeface="Segoe UI"/>
-              </a:rPr>
-              <a:t>Gouvernements &amp; Ministères de la Santé</a:t>
-            </a:r>
-          </a:p>
-        </p:txBody>
-      </p:sp>
-      <p:sp>
-        <p:nvSpPr>
-          <p:cNvPr id="27" name="TextBox 26"/>
-          <p:cNvSpPr txBox="1"/>
-          <p:nvPr/>
-        </p:nvSpPr>
-        <p:spPr>
-          <a:xfrm>
-            <a:off x="960120" y="4773168"/>
-            <a:ext cx="4754880" cy="292608"/>
-          </a:xfrm>
-          <a:prstGeom prst="rect">
-            <a:avLst/>
-          </a:prstGeom>
-          <a:noFill/>
-        </p:spPr>
-        <p:txBody>
-          <a:bodyPr wrap="square">
-            <a:spAutoFit/>
-          </a:bodyPr>
-          <a:lstStyle/>
-          <a:p>
-            <a:pPr algn="l"/>
-            <a:r>
               <a:rPr sz="1000" b="0" i="0">
                 <a:solidFill>
-                  <a:srgbClr val="8E99B0"/>
-                </a:solidFill>
-                <a:latin typeface="Segoe UI"/>
-              </a:rPr>
-              <a:t>Digitaliser le répertoire national des établissements</a:t>
-            </a:r>
-          </a:p>
-        </p:txBody>
-      </p:sp>
-      <p:sp>
-        <p:nvSpPr>
-          <p:cNvPr id="28" name="Rectangle 27"/>
-          <p:cNvSpPr/>
-          <p:nvPr/>
-        </p:nvSpPr>
-        <p:spPr>
-          <a:xfrm>
-            <a:off x="274320" y="5239512"/>
-            <a:ext cx="5577840" cy="749808"/>
-          </a:xfrm>
-          <a:prstGeom prst="rect">
-            <a:avLst/>
-          </a:prstGeom>
-          <a:solidFill>
-            <a:srgbClr val="FFFFFF"/>
-          </a:solidFill>
-          <a:ln>
-            <a:noFill/>
-          </a:ln>
-        </p:spPr>
-        <p:style>
-          <a:lnRef idx="1">
-            <a:schemeClr val="accent1"/>
-          </a:lnRef>
-          <a:fillRef idx="3">
-            <a:schemeClr val="accent1"/>
-          </a:fillRef>
-          <a:effectRef idx="2">
-            <a:schemeClr val="accent1"/>
-          </a:effectRef>
-          <a:fontRef idx="minor">
-            <a:schemeClr val="lt1"/>
-          </a:fontRef>
-        </p:style>
-        <p:txBody>
-          <a:bodyPr rtlCol="0" anchor="ctr"/>
-          <a:lstStyle/>
-          <a:p>
-            <a:pPr algn="ctr"/>
-            <a:endParaRPr/>
-          </a:p>
-        </p:txBody>
-      </p:sp>
-      <p:sp>
-        <p:nvSpPr>
-          <p:cNvPr id="29" name="TextBox 28"/>
-          <p:cNvSpPr txBox="1"/>
-          <p:nvPr/>
-        </p:nvSpPr>
-        <p:spPr>
-          <a:xfrm>
-            <a:off x="365760" y="5330952"/>
-            <a:ext cx="457200" cy="457200"/>
-          </a:xfrm>
-          <a:prstGeom prst="rect">
-            <a:avLst/>
-          </a:prstGeom>
-          <a:noFill/>
-        </p:spPr>
-        <p:txBody>
-          <a:bodyPr wrap="square">
-            <a:spAutoFit/>
-          </a:bodyPr>
-          <a:lstStyle/>
-          <a:p>
-            <a:pPr algn="l"/>
-            <a:r>
-              <a:rPr sz="2000" b="0" i="0">
-                <a:solidFill>
-                  <a:srgbClr val="1C2340"/>
-                </a:solidFill>
-                <a:latin typeface="Segoe UI"/>
-              </a:rPr>
-              <a:t>🏥</a:t>
-            </a:r>
-          </a:p>
-        </p:txBody>
-      </p:sp>
-      <p:sp>
-        <p:nvSpPr>
-          <p:cNvPr id="30" name="TextBox 29"/>
-          <p:cNvSpPr txBox="1"/>
-          <p:nvPr/>
-        </p:nvSpPr>
-        <p:spPr>
-          <a:xfrm>
-            <a:off x="960120" y="5294376"/>
-            <a:ext cx="4754880" cy="320040"/>
-          </a:xfrm>
-          <a:prstGeom prst="rect">
-            <a:avLst/>
-          </a:prstGeom>
-          <a:noFill/>
-        </p:spPr>
-        <p:txBody>
-          <a:bodyPr wrap="square">
-            <a:spAutoFit/>
-          </a:bodyPr>
-          <a:lstStyle/>
-          <a:p>
-            <a:pPr algn="l"/>
-            <a:r>
-              <a:rPr sz="1200" b="1" i="0">
-                <a:solidFill>
-                  <a:srgbClr val="1C2340"/>
-                </a:solidFill>
-                <a:latin typeface="Segoe UI"/>
-              </a:rPr>
-              <a:t>Établissements Privés</a:t>
-            </a:r>
-          </a:p>
-        </p:txBody>
-      </p:sp>
-      <p:sp>
-        <p:nvSpPr>
-          <p:cNvPr id="31" name="TextBox 30"/>
-          <p:cNvSpPr txBox="1"/>
-          <p:nvPr/>
-        </p:nvSpPr>
-        <p:spPr>
-          <a:xfrm>
-            <a:off x="960120" y="5623560"/>
-            <a:ext cx="4754880" cy="292608"/>
-          </a:xfrm>
-          <a:prstGeom prst="rect">
-            <a:avLst/>
-          </a:prstGeom>
-          <a:noFill/>
-        </p:spPr>
-        <p:txBody>
-          <a:bodyPr wrap="square">
-            <a:spAutoFit/>
-          </a:bodyPr>
-          <a:lstStyle/>
-          <a:p>
-            <a:pPr algn="l"/>
-            <a:r>
-              <a:rPr sz="1000" b="0" i="0">
-                <a:solidFill>
-                  <a:srgbClr val="8E99B0"/>
-                </a:solidFill>
-                <a:latin typeface="Segoe UI"/>
-              </a:rPr>
-              <a:t>Visibilité, réputation et gestion des retours patients</a:t>
-            </a:r>
-          </a:p>
-        </p:txBody>
-      </p:sp>
-      <p:sp>
-        <p:nvSpPr>
-          <p:cNvPr id="32" name="Rectangle 31"/>
-          <p:cNvSpPr/>
-          <p:nvPr/>
-        </p:nvSpPr>
-        <p:spPr>
-          <a:xfrm>
-            <a:off x="274320" y="6089904"/>
-            <a:ext cx="5577840" cy="749808"/>
-          </a:xfrm>
-          <a:prstGeom prst="rect">
-            <a:avLst/>
-          </a:prstGeom>
-          <a:solidFill>
-            <a:srgbClr val="FFFFFF"/>
-          </a:solidFill>
-          <a:ln>
-            <a:noFill/>
-          </a:ln>
-        </p:spPr>
-        <p:style>
-          <a:lnRef idx="1">
-            <a:schemeClr val="accent1"/>
-          </a:lnRef>
-          <a:fillRef idx="3">
-            <a:schemeClr val="accent1"/>
-          </a:fillRef>
-          <a:effectRef idx="2">
-            <a:schemeClr val="accent1"/>
-          </a:effectRef>
-          <a:fontRef idx="minor">
-            <a:schemeClr val="lt1"/>
-          </a:fontRef>
-        </p:style>
-        <p:txBody>
-          <a:bodyPr rtlCol="0" anchor="ctr"/>
-          <a:lstStyle/>
-          <a:p>
-            <a:pPr algn="ctr"/>
-            <a:endParaRPr/>
-          </a:p>
-        </p:txBody>
-      </p:sp>
-      <p:sp>
-        <p:nvSpPr>
-          <p:cNvPr id="33" name="TextBox 32"/>
-          <p:cNvSpPr txBox="1"/>
-          <p:nvPr/>
-        </p:nvSpPr>
-        <p:spPr>
-          <a:xfrm>
-            <a:off x="365760" y="6181344"/>
-            <a:ext cx="457200" cy="457200"/>
-          </a:xfrm>
-          <a:prstGeom prst="rect">
-            <a:avLst/>
-          </a:prstGeom>
-          <a:noFill/>
-        </p:spPr>
-        <p:txBody>
-          <a:bodyPr wrap="square">
-            <a:spAutoFit/>
-          </a:bodyPr>
-          <a:lstStyle/>
-          <a:p>
-            <a:pPr algn="l"/>
-            <a:r>
-              <a:rPr sz="2000" b="0" i="0">
-                <a:solidFill>
-                  <a:srgbClr val="1C2340"/>
-                </a:solidFill>
-                <a:latin typeface="Segoe UI"/>
-              </a:rPr>
-              <a:t>🚑</a:t>
-            </a:r>
-          </a:p>
-        </p:txBody>
-      </p:sp>
-      <p:sp>
-        <p:nvSpPr>
-          <p:cNvPr id="34" name="TextBox 33"/>
-          <p:cNvSpPr txBox="1"/>
-          <p:nvPr/>
-        </p:nvSpPr>
-        <p:spPr>
-          <a:xfrm>
-            <a:off x="960120" y="6144768"/>
-            <a:ext cx="4754880" cy="320040"/>
-          </a:xfrm>
-          <a:prstGeom prst="rect">
-            <a:avLst/>
-          </a:prstGeom>
-          <a:noFill/>
-        </p:spPr>
-        <p:txBody>
-          <a:bodyPr wrap="square">
-            <a:spAutoFit/>
-          </a:bodyPr>
-          <a:lstStyle/>
-          <a:p>
-            <a:pPr algn="l"/>
-            <a:r>
-              <a:rPr sz="1200" b="1" i="0">
-                <a:solidFill>
-                  <a:srgbClr val="1C2340"/>
-                </a:solidFill>
-                <a:latin typeface="Segoe UI"/>
-              </a:rPr>
-              <a:t>Services de Secours</a:t>
-            </a:r>
-          </a:p>
-        </p:txBody>
-      </p:sp>
-      <p:sp>
-        <p:nvSpPr>
-          <p:cNvPr id="35" name="TextBox 34"/>
-          <p:cNvSpPr txBox="1"/>
-          <p:nvPr/>
-        </p:nvSpPr>
-        <p:spPr>
-          <a:xfrm>
-            <a:off x="960120" y="6473952"/>
-            <a:ext cx="4754880" cy="292608"/>
-          </a:xfrm>
-          <a:prstGeom prst="rect">
-            <a:avLst/>
-          </a:prstGeom>
-          <a:noFill/>
-        </p:spPr>
-        <p:txBody>
-          <a:bodyPr wrap="square">
-            <a:spAutoFit/>
-          </a:bodyPr>
-          <a:lstStyle/>
-          <a:p>
-            <a:pPr algn="l"/>
-            <a:r>
-              <a:rPr sz="1000" b="0" i="0">
-                <a:solidFill>
-                  <a:srgbClr val="8E99B0"/>
-                </a:solidFill>
-                <a:latin typeface="Segoe UI"/>
-              </a:rPr>
-              <a:t>Coordination des interventions d'urgence</a:t>
-            </a:r>
-          </a:p>
-        </p:txBody>
-      </p:sp>
-      <p:sp>
-        <p:nvSpPr>
-          <p:cNvPr id="36" name="Rectangle 35"/>
-          <p:cNvSpPr/>
-          <p:nvPr/>
-        </p:nvSpPr>
-        <p:spPr>
-          <a:xfrm>
-            <a:off x="274320" y="6940296"/>
-            <a:ext cx="5577840" cy="749808"/>
-          </a:xfrm>
-          <a:prstGeom prst="rect">
-            <a:avLst/>
-          </a:prstGeom>
-          <a:solidFill>
-            <a:srgbClr val="FFFFFF"/>
-          </a:solidFill>
-          <a:ln>
-            <a:noFill/>
-          </a:ln>
-        </p:spPr>
-        <p:style>
-          <a:lnRef idx="1">
-            <a:schemeClr val="accent1"/>
-          </a:lnRef>
-          <a:fillRef idx="3">
-            <a:schemeClr val="accent1"/>
-          </a:fillRef>
-          <a:effectRef idx="2">
-            <a:schemeClr val="accent1"/>
-          </a:effectRef>
-          <a:fontRef idx="minor">
-            <a:schemeClr val="lt1"/>
-          </a:fontRef>
-        </p:style>
-        <p:txBody>
-          <a:bodyPr rtlCol="0" anchor="ctr"/>
-          <a:lstStyle/>
-          <a:p>
-            <a:pPr algn="ctr"/>
-            <a:endParaRPr/>
-          </a:p>
-        </p:txBody>
-      </p:sp>
-      <p:sp>
-        <p:nvSpPr>
-          <p:cNvPr id="37" name="TextBox 36"/>
-          <p:cNvSpPr txBox="1"/>
-          <p:nvPr/>
-        </p:nvSpPr>
-        <p:spPr>
-          <a:xfrm>
-            <a:off x="365760" y="7031736"/>
-            <a:ext cx="457200" cy="457200"/>
-          </a:xfrm>
-          <a:prstGeom prst="rect">
-            <a:avLst/>
-          </a:prstGeom>
-          <a:noFill/>
-        </p:spPr>
-        <p:txBody>
-          <a:bodyPr wrap="square">
-            <a:spAutoFit/>
-          </a:bodyPr>
-          <a:lstStyle/>
-          <a:p>
-            <a:pPr algn="l"/>
-            <a:r>
-              <a:rPr sz="2000" b="0" i="0">
-                <a:solidFill>
-                  <a:srgbClr val="1C2340"/>
-                </a:solidFill>
-                <a:latin typeface="Segoe UI"/>
-              </a:rPr>
-              <a:t>📱</a:t>
-            </a:r>
-          </a:p>
-        </p:txBody>
-      </p:sp>
-      <p:sp>
-        <p:nvSpPr>
-          <p:cNvPr id="38" name="TextBox 37"/>
-          <p:cNvSpPr txBox="1"/>
-          <p:nvPr/>
-        </p:nvSpPr>
-        <p:spPr>
-          <a:xfrm>
-            <a:off x="960120" y="6995160"/>
-            <a:ext cx="4754880" cy="320040"/>
-          </a:xfrm>
-          <a:prstGeom prst="rect">
-            <a:avLst/>
-          </a:prstGeom>
-          <a:noFill/>
-        </p:spPr>
-        <p:txBody>
-          <a:bodyPr wrap="square">
-            <a:spAutoFit/>
-          </a:bodyPr>
-          <a:lstStyle/>
-          <a:p>
-            <a:pPr algn="l"/>
-            <a:r>
-              <a:rPr sz="1200" b="1" i="0">
-                <a:solidFill>
-                  <a:srgbClr val="1C2340"/>
-                </a:solidFill>
-                <a:latin typeface="Segoe UI"/>
-              </a:rPr>
-              <a:t>Grand Public</a:t>
-            </a:r>
-          </a:p>
-        </p:txBody>
-      </p:sp>
-      <p:sp>
-        <p:nvSpPr>
-          <p:cNvPr id="39" name="TextBox 38"/>
-          <p:cNvSpPr txBox="1"/>
-          <p:nvPr/>
-        </p:nvSpPr>
-        <p:spPr>
-          <a:xfrm>
-            <a:off x="960120" y="7324344"/>
-            <a:ext cx="4754880" cy="292608"/>
-          </a:xfrm>
-          <a:prstGeom prst="rect">
-            <a:avLst/>
-          </a:prstGeom>
-          <a:noFill/>
-        </p:spPr>
-        <p:txBody>
-          <a:bodyPr wrap="square">
-            <a:spAutoFit/>
-          </a:bodyPr>
-          <a:lstStyle/>
-          <a:p>
-            <a:pPr algn="l"/>
-            <a:r>
-              <a:rPr sz="1000" b="0" i="0">
-                <a:solidFill>
-                  <a:srgbClr val="8E99B0"/>
-                </a:solidFill>
-                <a:latin typeface="Segoe UI"/>
-              </a:rPr>
-              <a:t>Application gratuite, accès sans compte pour l'essentiel</a:t>
-            </a:r>
-          </a:p>
-        </p:txBody>
-      </p:sp>
-      <p:sp>
-        <p:nvSpPr>
-          <p:cNvPr id="40" name="Rectangle 39"/>
-          <p:cNvSpPr/>
-          <p:nvPr/>
-        </p:nvSpPr>
-        <p:spPr>
-          <a:xfrm>
-            <a:off x="6035040" y="3840480"/>
-            <a:ext cx="5943600" cy="2834640"/>
-          </a:xfrm>
-          <a:prstGeom prst="rect">
-            <a:avLst/>
-          </a:prstGeom>
-          <a:solidFill>
-            <a:srgbClr val="EEF5FF"/>
-          </a:solidFill>
-          <a:ln>
-            <a:noFill/>
-          </a:ln>
-        </p:spPr>
-        <p:style>
-          <a:lnRef idx="1">
-            <a:schemeClr val="accent1"/>
-          </a:lnRef>
-          <a:fillRef idx="3">
-            <a:schemeClr val="accent1"/>
-          </a:fillRef>
-          <a:effectRef idx="2">
-            <a:schemeClr val="accent1"/>
-          </a:effectRef>
-          <a:fontRef idx="minor">
-            <a:schemeClr val="lt1"/>
-          </a:fontRef>
-        </p:style>
-        <p:txBody>
-          <a:bodyPr rtlCol="0" anchor="ctr"/>
-          <a:lstStyle/>
-          <a:p>
-            <a:pPr algn="ctr"/>
-            <a:endParaRPr/>
-          </a:p>
-        </p:txBody>
-      </p:sp>
-      <p:sp>
-        <p:nvSpPr>
-          <p:cNvPr id="41" name="TextBox 40"/>
-          <p:cNvSpPr txBox="1"/>
-          <p:nvPr/>
-        </p:nvSpPr>
-        <p:spPr>
-          <a:xfrm>
-            <a:off x="6035040" y="3840480"/>
-            <a:ext cx="5943600" cy="2834640"/>
-          </a:xfrm>
-          <a:prstGeom prst="rect">
-            <a:avLst/>
-          </a:prstGeom>
-          <a:noFill/>
-        </p:spPr>
-        <p:txBody>
-          <a:bodyPr wrap="square">
-            <a:spAutoFit/>
-          </a:bodyPr>
-          <a:lstStyle/>
-          <a:p>
-            <a:pPr algn="ctr"/>
-            <a:r>
-              <a:rPr sz="1300" b="0" i="0" dirty="0">
-                <a:solidFill>
-                  <a:srgbClr val="1C2340"/>
-                </a:solidFill>
-                <a:latin typeface="Segoe UI"/>
-              </a:rPr>
-              <a:t>🌍
-Côte d'Ivoire · </a:t>
-            </a:r>
-            <a:r>
-              <a:rPr sz="1300" b="0" i="0" dirty="0" err="1">
-                <a:solidFill>
-                  <a:srgbClr val="1C2340"/>
-                </a:solidFill>
-                <a:latin typeface="Segoe UI"/>
-              </a:rPr>
-              <a:t>Sénégal</a:t>
-            </a:r>
-            <a:r>
-              <a:rPr sz="1300" b="0" i="0" dirty="0">
-                <a:solidFill>
-                  <a:srgbClr val="1C2340"/>
-                </a:solidFill>
-                <a:latin typeface="Segoe UI"/>
-              </a:rPr>
-              <a:t> · Mali
-Burkina Faso · Cameroun · </a:t>
-            </a:r>
-            <a:r>
-              <a:rPr sz="1300" b="0" i="0" dirty="0" err="1">
-                <a:solidFill>
-                  <a:srgbClr val="1C2340"/>
-                </a:solidFill>
-                <a:latin typeface="Segoe UI"/>
-              </a:rPr>
-              <a:t>Bénin</a:t>
-            </a:r>
-            <a:r>
-              <a:rPr sz="1300" b="0" i="0" dirty="0">
-                <a:solidFill>
-                  <a:srgbClr val="1C2340"/>
-                </a:solidFill>
-                <a:latin typeface="Segoe UI"/>
-              </a:rPr>
-              <a:t>
-→ Extension </a:t>
-            </a:r>
-            <a:r>
-              <a:rPr sz="1300" b="0" i="0" dirty="0" err="1">
-                <a:solidFill>
-                  <a:srgbClr val="1C2340"/>
-                </a:solidFill>
-                <a:latin typeface="Segoe UI"/>
-              </a:rPr>
-              <a:t>régionale</a:t>
-            </a:r>
-            <a:r>
-              <a:rPr sz="1300" b="0" i="0" dirty="0">
-                <a:solidFill>
-                  <a:srgbClr val="1C2340"/>
-                </a:solidFill>
-                <a:latin typeface="Segoe UI"/>
-              </a:rPr>
-              <a:t> </a:t>
-            </a:r>
-            <a:r>
-              <a:rPr sz="1300" b="0" i="0" dirty="0" err="1">
-                <a:solidFill>
-                  <a:srgbClr val="1C2340"/>
-                </a:solidFill>
-                <a:latin typeface="Segoe UI"/>
-              </a:rPr>
-              <a:t>planifiée</a:t>
-            </a:r>
-            <a:endParaRPr sz="1300" b="0" i="0" dirty="0">
-              <a:solidFill>
-                <a:srgbClr val="1C2340"/>
-              </a:solidFill>
-              <a:latin typeface="Segoe UI"/>
-            </a:endParaRPr>
+                  <a:srgbClr val="BBCCDD"/>
+                </a:solidFill>
+                <a:latin typeface="Segoe UI"/>
+              </a:rPr>
+              <a:t>Compagnies d'assurance santé, ONG, agences de développement.
+Intégration API pour systèmes existants.</a:t>
+            </a:r>
           </a:p>
         </p:txBody>
       </p:sp>
@@ -6646,6 +6719,50 @@
             <a:avLst/>
           </a:prstGeom>
           <a:solidFill>
+            <a:srgbClr val="F5F6FA"/>
+          </a:solidFill>
+          <a:ln>
+            <a:noFill/>
+          </a:ln>
+        </p:spPr>
+        <p:style>
+          <a:lnRef idx="1">
+            <a:schemeClr val="accent1"/>
+          </a:lnRef>
+          <a:fillRef idx="3">
+            <a:schemeClr val="accent1"/>
+          </a:fillRef>
+          <a:effectRef idx="2">
+            <a:schemeClr val="accent1"/>
+          </a:effectRef>
+          <a:fontRef idx="minor">
+            <a:schemeClr val="lt1"/>
+          </a:fontRef>
+        </p:style>
+        <p:txBody>
+          <a:bodyPr rtlCol="0" anchor="ctr"/>
+          <a:lstStyle/>
+          <a:p>
+            <a:pPr algn="ctr"/>
+            <a:endParaRPr/>
+          </a:p>
+        </p:txBody>
+      </p:sp>
+      <p:sp>
+        <p:nvSpPr>
+          <p:cNvPr id="3" name="Rectangle 2"/>
+          <p:cNvSpPr/>
+          <p:nvPr/>
+        </p:nvSpPr>
+        <p:spPr>
+          <a:xfrm>
+            <a:off x="0" y="0"/>
+            <a:ext cx="12188952" cy="1371600"/>
+          </a:xfrm>
+          <a:prstGeom prst="rect">
+            <a:avLst/>
+          </a:prstGeom>
+          <a:solidFill>
             <a:srgbClr val="1C2340"/>
           </a:solidFill>
           <a:ln>
@@ -6677,7 +6794,7 @@
       </p:sp>
       <p:sp>
         <p:nvSpPr>
-          <p:cNvPr id="3" name="Rectangle 2"/>
+          <p:cNvPr id="4" name="Rectangle 3"/>
           <p:cNvSpPr/>
           <p:nvPr/>
         </p:nvSpPr>
@@ -6721,14 +6838,14 @@
       </p:sp>
       <p:sp>
         <p:nvSpPr>
-          <p:cNvPr id="4" name="TextBox 3"/>
-          <p:cNvSpPr txBox="1"/>
-          <p:nvPr/>
-        </p:nvSpPr>
-        <p:spPr>
-          <a:xfrm>
-            <a:off x="274320" y="274320"/>
-            <a:ext cx="7315200" cy="365760"/>
+          <p:cNvPr id="5" name="TextBox 4"/>
+          <p:cNvSpPr txBox="1"/>
+          <p:nvPr/>
+        </p:nvSpPr>
+        <p:spPr>
+          <a:xfrm>
+            <a:off x="274320" y="201168"/>
+            <a:ext cx="7315200" cy="320040"/>
           </a:xfrm>
           <a:prstGeom prst="rect">
             <a:avLst/>
@@ -6743,27 +6860,27 @@
           <a:p>
             <a:pPr algn="l"/>
             <a:r>
-              <a:rPr sz="1100" b="1" i="0">
+              <a:rPr sz="1000" b="1" i="0">
                 <a:solidFill>
                   <a:srgbClr val="E8620A"/>
                 </a:solidFill>
                 <a:latin typeface="Segoe UI"/>
               </a:rPr>
-              <a:t>MODÈLE ÉCONOMIQUE</a:t>
-            </a:r>
-          </a:p>
-        </p:txBody>
-      </p:sp>
-      <p:sp>
-        <p:nvSpPr>
-          <p:cNvPr id="5" name="TextBox 4"/>
-          <p:cNvSpPr txBox="1"/>
-          <p:nvPr/>
-        </p:nvSpPr>
-        <p:spPr>
-          <a:xfrm>
-            <a:off x="274320" y="640080"/>
-            <a:ext cx="8229600" cy="594360"/>
+              <a:t>POURQUOI INVESTIR</a:t>
+            </a:r>
+          </a:p>
+        </p:txBody>
+      </p:sp>
+      <p:sp>
+        <p:nvSpPr>
+          <p:cNvPr id="6" name="TextBox 5"/>
+          <p:cNvSpPr txBox="1"/>
+          <p:nvPr/>
+        </p:nvSpPr>
+        <p:spPr>
+          <a:xfrm>
+            <a:off x="274320" y="502920"/>
+            <a:ext cx="8229600" cy="685800"/>
           </a:xfrm>
           <a:prstGeom prst="rect">
             <a:avLst/>
@@ -6784,27 +6901,27 @@
                 </a:solidFill>
                 <a:latin typeface="Segoe UI"/>
               </a:rPr>
-              <a:t>Plusieurs leviers de monétisation</a:t>
-            </a:r>
-          </a:p>
-        </p:txBody>
-      </p:sp>
-      <p:sp>
-        <p:nvSpPr>
-          <p:cNvPr id="6" name="Rectangle 5"/>
+              <a:t>5 raisons de rejoindre l'aventure</a:t>
+            </a:r>
+          </a:p>
+        </p:txBody>
+      </p:sp>
+      <p:sp>
+        <p:nvSpPr>
+          <p:cNvPr id="7" name="Rectangle 6"/>
           <p:cNvSpPr/>
           <p:nvPr/>
         </p:nvSpPr>
         <p:spPr>
           <a:xfrm>
-            <a:off x="274320" y="1417320"/>
-            <a:ext cx="2743200" cy="3657600"/>
+            <a:off x="274320" y="1554480"/>
+            <a:ext cx="5486400" cy="1188720"/>
           </a:xfrm>
           <a:prstGeom prst="rect">
             <a:avLst/>
           </a:prstGeom>
           <a:solidFill>
-            <a:srgbClr val="1E2848"/>
+            <a:srgbClr val="FFFFFF"/>
           </a:solidFill>
           <a:ln>
             <a:noFill/>
@@ -6835,208 +6952,14 @@
       </p:sp>
       <p:sp>
         <p:nvSpPr>
-          <p:cNvPr id="7" name="Rectangle 6"/>
+          <p:cNvPr id="8" name="Rectangle 7"/>
           <p:cNvSpPr/>
           <p:nvPr/>
         </p:nvSpPr>
         <p:spPr>
           <a:xfrm>
-            <a:off x="274320" y="1417320"/>
-            <a:ext cx="2743200" cy="109728"/>
-          </a:xfrm>
-          <a:prstGeom prst="rect">
-            <a:avLst/>
-          </a:prstGeom>
-          <a:solidFill>
-            <a:srgbClr val="009688"/>
-          </a:solidFill>
-          <a:ln>
-            <a:noFill/>
-          </a:ln>
-        </p:spPr>
-        <p:style>
-          <a:lnRef idx="1">
-            <a:schemeClr val="accent1"/>
-          </a:lnRef>
-          <a:fillRef idx="3">
-            <a:schemeClr val="accent1"/>
-          </a:fillRef>
-          <a:effectRef idx="2">
-            <a:schemeClr val="accent1"/>
-          </a:effectRef>
-          <a:fontRef idx="minor">
-            <a:schemeClr val="lt1"/>
-          </a:fontRef>
-        </p:style>
-        <p:txBody>
-          <a:bodyPr rtlCol="0" anchor="ctr"/>
-          <a:lstStyle/>
-          <a:p>
-            <a:pPr algn="ctr"/>
-            <a:endParaRPr/>
-          </a:p>
-        </p:txBody>
-      </p:sp>
-      <p:sp>
-        <p:nvSpPr>
-          <p:cNvPr id="8" name="TextBox 7"/>
-          <p:cNvSpPr txBox="1"/>
-          <p:nvPr/>
-        </p:nvSpPr>
-        <p:spPr>
-          <a:xfrm>
-            <a:off x="411480" y="1691640"/>
-            <a:ext cx="640080" cy="594360"/>
-          </a:xfrm>
-          <a:prstGeom prst="rect">
-            <a:avLst/>
-          </a:prstGeom>
-          <a:noFill/>
-        </p:spPr>
-        <p:txBody>
-          <a:bodyPr wrap="square">
-            <a:spAutoFit/>
-          </a:bodyPr>
-          <a:lstStyle/>
-          <a:p>
-            <a:pPr algn="l"/>
-            <a:r>
-              <a:rPr sz="2800" b="0" i="0">
-                <a:solidFill>
-                  <a:srgbClr val="FFFFFF"/>
-                </a:solidFill>
-                <a:latin typeface="Segoe UI"/>
-              </a:rPr>
-              <a:t>🆓</a:t>
-            </a:r>
-          </a:p>
-        </p:txBody>
-      </p:sp>
-      <p:sp>
-        <p:nvSpPr>
-          <p:cNvPr id="9" name="TextBox 8"/>
-          <p:cNvSpPr txBox="1"/>
-          <p:nvPr/>
-        </p:nvSpPr>
-        <p:spPr>
-          <a:xfrm>
-            <a:off x="411480" y="2377440"/>
-            <a:ext cx="2468880" cy="457200"/>
-          </a:xfrm>
-          <a:prstGeom prst="rect">
-            <a:avLst/>
-          </a:prstGeom>
-          <a:noFill/>
-        </p:spPr>
-        <p:txBody>
-          <a:bodyPr wrap="square">
-            <a:spAutoFit/>
-          </a:bodyPr>
-          <a:lstStyle/>
-          <a:p>
-            <a:pPr algn="l"/>
-            <a:r>
-              <a:rPr sz="1300" b="1" i="0">
-                <a:solidFill>
-                  <a:srgbClr val="FFFFFF"/>
-                </a:solidFill>
-                <a:latin typeface="Segoe UI"/>
-              </a:rPr>
-              <a:t>Freemium Citoyen</a:t>
-            </a:r>
-          </a:p>
-        </p:txBody>
-      </p:sp>
-      <p:sp>
-        <p:nvSpPr>
-          <p:cNvPr id="10" name="TextBox 9"/>
-          <p:cNvSpPr txBox="1"/>
-          <p:nvPr/>
-        </p:nvSpPr>
-        <p:spPr>
-          <a:xfrm>
-            <a:off x="411480" y="2880360"/>
-            <a:ext cx="2468880" cy="1371600"/>
-          </a:xfrm>
-          <a:prstGeom prst="rect">
-            <a:avLst/>
-          </a:prstGeom>
-          <a:noFill/>
-        </p:spPr>
-        <p:txBody>
-          <a:bodyPr wrap="square">
-            <a:spAutoFit/>
-          </a:bodyPr>
-          <a:lstStyle/>
-          <a:p>
-            <a:pPr algn="l"/>
-            <a:r>
-              <a:rPr sz="1000" b="0" i="0">
-                <a:solidFill>
-                  <a:srgbClr val="BBCCDD"/>
-                </a:solidFill>
-                <a:latin typeface="Segoe UI"/>
-              </a:rPr>
-              <a:t>Application gratuite pour les utilisateurs finaux.
-Prime pour fonctionnalités avancées (historique étendu, alertes push premium).</a:t>
-            </a:r>
-          </a:p>
-        </p:txBody>
-      </p:sp>
-      <p:sp>
-        <p:nvSpPr>
-          <p:cNvPr id="11" name="Rectangle 10"/>
-          <p:cNvSpPr/>
-          <p:nvPr/>
-        </p:nvSpPr>
-        <p:spPr>
-          <a:xfrm>
-            <a:off x="3218688" y="1417320"/>
-            <a:ext cx="2743200" cy="3657600"/>
-          </a:xfrm>
-          <a:prstGeom prst="rect">
-            <a:avLst/>
-          </a:prstGeom>
-          <a:solidFill>
-            <a:srgbClr val="1E2848"/>
-          </a:solidFill>
-          <a:ln>
-            <a:noFill/>
-          </a:ln>
-        </p:spPr>
-        <p:style>
-          <a:lnRef idx="1">
-            <a:schemeClr val="accent1"/>
-          </a:lnRef>
-          <a:fillRef idx="3">
-            <a:schemeClr val="accent1"/>
-          </a:fillRef>
-          <a:effectRef idx="2">
-            <a:schemeClr val="accent1"/>
-          </a:effectRef>
-          <a:fontRef idx="minor">
-            <a:schemeClr val="lt1"/>
-          </a:fontRef>
-        </p:style>
-        <p:txBody>
-          <a:bodyPr rtlCol="0" anchor="ctr"/>
-          <a:lstStyle/>
-          <a:p>
-            <a:pPr algn="ctr"/>
-            <a:endParaRPr/>
-          </a:p>
-        </p:txBody>
-      </p:sp>
-      <p:sp>
-        <p:nvSpPr>
-          <p:cNvPr id="12" name="Rectangle 11"/>
-          <p:cNvSpPr/>
-          <p:nvPr/>
-        </p:nvSpPr>
-        <p:spPr>
-          <a:xfrm>
-            <a:off x="3218688" y="1417320"/>
-            <a:ext cx="2743200" cy="109728"/>
+            <a:off x="274320" y="1554480"/>
+            <a:ext cx="73152" cy="1188720"/>
           </a:xfrm>
           <a:prstGeom prst="rect">
             <a:avLst/>
@@ -7073,14 +6996,14 @@
       </p:sp>
       <p:sp>
         <p:nvSpPr>
-          <p:cNvPr id="13" name="TextBox 12"/>
-          <p:cNvSpPr txBox="1"/>
-          <p:nvPr/>
-        </p:nvSpPr>
-        <p:spPr>
-          <a:xfrm>
-            <a:off x="3355848" y="1691640"/>
-            <a:ext cx="640080" cy="594360"/>
+          <p:cNvPr id="9" name="TextBox 8"/>
+          <p:cNvSpPr txBox="1"/>
+          <p:nvPr/>
+        </p:nvSpPr>
+        <p:spPr>
+          <a:xfrm>
+            <a:off x="457200" y="1645920"/>
+            <a:ext cx="548640" cy="548640"/>
           </a:xfrm>
           <a:prstGeom prst="rect">
             <a:avLst/>
@@ -7095,27 +7018,27 @@
           <a:p>
             <a:pPr algn="l"/>
             <a:r>
-              <a:rPr sz="2800" b="0" i="0">
-                <a:solidFill>
-                  <a:srgbClr val="FFFFFF"/>
-                </a:solidFill>
-                <a:latin typeface="Segoe UI"/>
-              </a:rPr>
-              <a:t>💼</a:t>
-            </a:r>
-          </a:p>
-        </p:txBody>
-      </p:sp>
-      <p:sp>
-        <p:nvSpPr>
-          <p:cNvPr id="14" name="TextBox 13"/>
-          <p:cNvSpPr txBox="1"/>
-          <p:nvPr/>
-        </p:nvSpPr>
-        <p:spPr>
-          <a:xfrm>
-            <a:off x="3355848" y="2377440"/>
-            <a:ext cx="2468880" cy="457200"/>
+              <a:rPr sz="2400" b="0" i="0">
+                <a:solidFill>
+                  <a:srgbClr val="1C2340"/>
+                </a:solidFill>
+                <a:latin typeface="Segoe UI"/>
+              </a:rPr>
+              <a:t>🚀</a:t>
+            </a:r>
+          </a:p>
+        </p:txBody>
+      </p:sp>
+      <p:sp>
+        <p:nvSpPr>
+          <p:cNvPr id="10" name="TextBox 9"/>
+          <p:cNvSpPr txBox="1"/>
+          <p:nvPr/>
+        </p:nvSpPr>
+        <p:spPr>
+          <a:xfrm>
+            <a:off x="1143000" y="1645920"/>
+            <a:ext cx="4389120" cy="347472"/>
           </a:xfrm>
           <a:prstGeom prst="rect">
             <a:avLst/>
@@ -7132,25 +7055,25 @@
             <a:r>
               <a:rPr sz="1300" b="1" i="0">
                 <a:solidFill>
-                  <a:srgbClr val="FFFFFF"/>
-                </a:solidFill>
-                <a:latin typeface="Segoe UI"/>
-              </a:rPr>
-              <a:t>SaaS Établissement</a:t>
-            </a:r>
-          </a:p>
-        </p:txBody>
-      </p:sp>
-      <p:sp>
-        <p:nvSpPr>
-          <p:cNvPr id="15" name="TextBox 14"/>
-          <p:cNvSpPr txBox="1"/>
-          <p:nvPr/>
-        </p:nvSpPr>
-        <p:spPr>
-          <a:xfrm>
-            <a:off x="3355848" y="2880360"/>
-            <a:ext cx="2468880" cy="1371600"/>
+                  <a:srgbClr val="1C2340"/>
+                </a:solidFill>
+                <a:latin typeface="Segoe UI"/>
+              </a:rPr>
+              <a:t>Produit déjà fonctionnel</a:t>
+            </a:r>
+          </a:p>
+        </p:txBody>
+      </p:sp>
+      <p:sp>
+        <p:nvSpPr>
+          <p:cNvPr id="11" name="TextBox 10"/>
+          <p:cNvSpPr txBox="1"/>
+          <p:nvPr/>
+        </p:nvSpPr>
+        <p:spPr>
+          <a:xfrm>
+            <a:off x="1143000" y="2011680"/>
+            <a:ext cx="4389120" cy="400110"/>
           </a:xfrm>
           <a:prstGeom prst="rect">
             <a:avLst/>
@@ -7165,34 +7088,195 @@
           <a:p>
             <a:pPr algn="l"/>
             <a:r>
-              <a:rPr sz="1000" b="0" i="0">
-                <a:solidFill>
-                  <a:srgbClr val="BBCCDD"/>
-                </a:solidFill>
-                <a:latin typeface="Segoe UI"/>
-              </a:rPr>
-              <a:t>Abonnement mensuel pour les chefs d'établissement :
-visibilité boostée, statistiques détaillées, support prioritaire.</a:t>
-            </a:r>
-          </a:p>
-        </p:txBody>
-      </p:sp>
-      <p:sp>
-        <p:nvSpPr>
-          <p:cNvPr id="16" name="Rectangle 15"/>
+              <a:rPr sz="1000" b="0" i="0" dirty="0">
+                <a:solidFill>
+                  <a:srgbClr val="8E99B0"/>
+                </a:solidFill>
+                <a:latin typeface="Segoe UI"/>
+              </a:rPr>
+              <a:t>MVP </a:t>
+            </a:r>
+            <a:r>
+              <a:rPr sz="1000" b="0" i="0" dirty="0" err="1">
+                <a:solidFill>
+                  <a:srgbClr val="8E99B0"/>
+                </a:solidFill>
+                <a:latin typeface="Segoe UI"/>
+              </a:rPr>
+              <a:t>en</a:t>
+            </a:r>
+            <a:r>
+              <a:rPr sz="1000" b="0" i="0" dirty="0">
+                <a:solidFill>
+                  <a:srgbClr val="8E99B0"/>
+                </a:solidFill>
+                <a:latin typeface="Segoe UI"/>
+              </a:rPr>
+              <a:t> production avec backend </a:t>
+            </a:r>
+            <a:r>
+              <a:rPr sz="1000" b="0" i="0" dirty="0" err="1">
+                <a:solidFill>
+                  <a:srgbClr val="8E99B0"/>
+                </a:solidFill>
+                <a:latin typeface="Segoe UI"/>
+              </a:rPr>
+              <a:t>réel</a:t>
+            </a:r>
+            <a:r>
+              <a:rPr sz="1000" b="0" i="0" dirty="0">
+                <a:solidFill>
+                  <a:srgbClr val="8E99B0"/>
+                </a:solidFill>
+                <a:latin typeface="Segoe UI"/>
+              </a:rPr>
+              <a:t>, 3 124 </a:t>
+            </a:r>
+            <a:r>
+              <a:rPr sz="1000" b="0" i="0" dirty="0" err="1">
+                <a:solidFill>
+                  <a:srgbClr val="8E99B0"/>
+                </a:solidFill>
+                <a:latin typeface="Segoe UI"/>
+              </a:rPr>
+              <a:t>centres</a:t>
+            </a:r>
+            <a:r>
+              <a:rPr sz="1000" b="0" i="0" dirty="0">
+                <a:solidFill>
+                  <a:srgbClr val="8E99B0"/>
+                </a:solidFill>
+                <a:latin typeface="Segoe UI"/>
+              </a:rPr>
+              <a:t>, 6 modules </a:t>
+            </a:r>
+            <a:r>
+              <a:rPr sz="1000" b="0" i="0" dirty="0" err="1">
+                <a:solidFill>
+                  <a:srgbClr val="8E99B0"/>
+                </a:solidFill>
+                <a:latin typeface="Segoe UI"/>
+              </a:rPr>
+              <a:t>actifs</a:t>
+            </a:r>
+            <a:r>
+              <a:rPr sz="1000" b="0" i="0" dirty="0">
+                <a:solidFill>
+                  <a:srgbClr val="8E99B0"/>
+                </a:solidFill>
+                <a:latin typeface="Segoe UI"/>
+              </a:rPr>
+              <a:t>. Pas un concept </a:t>
+            </a:r>
+            <a:r>
+              <a:rPr lang="fr-CI" sz="1000" b="0" i="0" dirty="0">
+                <a:solidFill>
+                  <a:srgbClr val="8E99B0"/>
+                </a:solidFill>
+                <a:latin typeface="Segoe UI"/>
+              </a:rPr>
+              <a:t>-</a:t>
+            </a:r>
+            <a:r>
+              <a:rPr sz="1000" b="0" i="0" dirty="0">
+                <a:solidFill>
+                  <a:srgbClr val="8E99B0"/>
+                </a:solidFill>
+                <a:latin typeface="Segoe UI"/>
+              </a:rPr>
+              <a:t> </a:t>
+            </a:r>
+            <a:r>
+              <a:rPr sz="1000" b="0" i="0" dirty="0" err="1">
+                <a:solidFill>
+                  <a:srgbClr val="8E99B0"/>
+                </a:solidFill>
+                <a:latin typeface="Segoe UI"/>
+              </a:rPr>
+              <a:t>une</a:t>
+            </a:r>
+            <a:r>
+              <a:rPr sz="1000" b="0" i="0" dirty="0">
+                <a:solidFill>
+                  <a:srgbClr val="8E99B0"/>
+                </a:solidFill>
+                <a:latin typeface="Segoe UI"/>
+              </a:rPr>
+              <a:t> </a:t>
+            </a:r>
+            <a:r>
+              <a:rPr sz="1000" b="0" i="0" dirty="0" err="1">
+                <a:solidFill>
+                  <a:srgbClr val="8E99B0"/>
+                </a:solidFill>
+                <a:latin typeface="Segoe UI"/>
+              </a:rPr>
+              <a:t>réalité</a:t>
+            </a:r>
+            <a:r>
+              <a:rPr sz="1000" b="0" i="0" dirty="0">
+                <a:solidFill>
+                  <a:srgbClr val="8E99B0"/>
+                </a:solidFill>
+                <a:latin typeface="Segoe UI"/>
+              </a:rPr>
+              <a:t> testable </a:t>
+            </a:r>
+            <a:r>
+              <a:rPr sz="1000" b="0" i="0" dirty="0" err="1">
+                <a:solidFill>
+                  <a:srgbClr val="8E99B0"/>
+                </a:solidFill>
+                <a:latin typeface="Segoe UI"/>
+              </a:rPr>
+              <a:t>dès</a:t>
+            </a:r>
+            <a:r>
+              <a:rPr sz="1000" b="0" i="0" dirty="0">
+                <a:solidFill>
+                  <a:srgbClr val="8E99B0"/>
+                </a:solidFill>
+                <a:latin typeface="Segoe UI"/>
+              </a:rPr>
+              <a:t> </a:t>
+            </a:r>
+            <a:r>
+              <a:rPr sz="1000" b="0" i="0" dirty="0" err="1">
+                <a:solidFill>
+                  <a:srgbClr val="8E99B0"/>
+                </a:solidFill>
+                <a:latin typeface="Segoe UI"/>
+              </a:rPr>
+              <a:t>aujourd'hui</a:t>
+            </a:r>
+            <a:r>
+              <a:rPr sz="1000" b="0" i="0" dirty="0">
+                <a:solidFill>
+                  <a:srgbClr val="8E99B0"/>
+                </a:solidFill>
+                <a:latin typeface="Segoe UI"/>
+              </a:rPr>
+              <a:t>.</a:t>
+            </a:r>
+          </a:p>
+        </p:txBody>
+      </p:sp>
+      <p:sp>
+        <p:nvSpPr>
+          <p:cNvPr id="12" name="Rectangle 11"/>
           <p:cNvSpPr/>
           <p:nvPr/>
         </p:nvSpPr>
         <p:spPr>
           <a:xfrm>
-            <a:off x="6163056" y="1417320"/>
-            <a:ext cx="2743200" cy="3657600"/>
+            <a:off x="6035040" y="1554480"/>
+            <a:ext cx="5486400" cy="1188720"/>
           </a:xfrm>
           <a:prstGeom prst="rect">
             <a:avLst/>
           </a:prstGeom>
           <a:solidFill>
-            <a:srgbClr val="1E2848"/>
+            <a:srgbClr val="FFFFFF"/>
           </a:solidFill>
           <a:ln>
             <a:noFill/>
@@ -7223,20 +7307,20 @@
       </p:sp>
       <p:sp>
         <p:nvSpPr>
-          <p:cNvPr id="17" name="Rectangle 16"/>
+          <p:cNvPr id="13" name="Rectangle 12"/>
           <p:cNvSpPr/>
           <p:nvPr/>
         </p:nvSpPr>
         <p:spPr>
           <a:xfrm>
-            <a:off x="6163056" y="1417320"/>
-            <a:ext cx="2743200" cy="109728"/>
+            <a:off x="6035040" y="1554480"/>
+            <a:ext cx="73152" cy="1188720"/>
           </a:xfrm>
           <a:prstGeom prst="rect">
             <a:avLst/>
           </a:prstGeom>
           <a:solidFill>
-            <a:srgbClr val="7B5EA7"/>
+            <a:srgbClr val="E8620A"/>
           </a:solidFill>
           <a:ln>
             <a:noFill/>
@@ -7267,14 +7351,14 @@
       </p:sp>
       <p:sp>
         <p:nvSpPr>
-          <p:cNvPr id="18" name="TextBox 17"/>
-          <p:cNvSpPr txBox="1"/>
-          <p:nvPr/>
-        </p:nvSpPr>
-        <p:spPr>
-          <a:xfrm>
-            <a:off x="6300216" y="1691640"/>
-            <a:ext cx="640080" cy="594360"/>
+          <p:cNvPr id="14" name="TextBox 13"/>
+          <p:cNvSpPr txBox="1"/>
+          <p:nvPr/>
+        </p:nvSpPr>
+        <p:spPr>
+          <a:xfrm>
+            <a:off x="6217920" y="1645920"/>
+            <a:ext cx="548640" cy="548640"/>
           </a:xfrm>
           <a:prstGeom prst="rect">
             <a:avLst/>
@@ -7289,27 +7373,27 @@
           <a:p>
             <a:pPr algn="l"/>
             <a:r>
-              <a:rPr sz="2800" b="0" i="0">
-                <a:solidFill>
-                  <a:srgbClr val="FFFFFF"/>
-                </a:solidFill>
-                <a:latin typeface="Segoe UI"/>
-              </a:rPr>
-              <a:t>🏛️</a:t>
-            </a:r>
-          </a:p>
-        </p:txBody>
-      </p:sp>
-      <p:sp>
-        <p:nvSpPr>
-          <p:cNvPr id="19" name="TextBox 18"/>
-          <p:cNvSpPr txBox="1"/>
-          <p:nvPr/>
-        </p:nvSpPr>
-        <p:spPr>
-          <a:xfrm>
-            <a:off x="6300216" y="2377440"/>
-            <a:ext cx="2468880" cy="457200"/>
+              <a:rPr sz="2400" b="0" i="0">
+                <a:solidFill>
+                  <a:srgbClr val="1C2340"/>
+                </a:solidFill>
+                <a:latin typeface="Segoe UI"/>
+              </a:rPr>
+              <a:t>🌍</a:t>
+            </a:r>
+          </a:p>
+        </p:txBody>
+      </p:sp>
+      <p:sp>
+        <p:nvSpPr>
+          <p:cNvPr id="15" name="TextBox 14"/>
+          <p:cNvSpPr txBox="1"/>
+          <p:nvPr/>
+        </p:nvSpPr>
+        <p:spPr>
+          <a:xfrm>
+            <a:off x="6903720" y="1645920"/>
+            <a:ext cx="4389120" cy="347472"/>
           </a:xfrm>
           <a:prstGeom prst="rect">
             <a:avLst/>
@@ -7326,25 +7410,25 @@
             <a:r>
               <a:rPr sz="1300" b="1" i="0">
                 <a:solidFill>
-                  <a:srgbClr val="FFFFFF"/>
-                </a:solidFill>
-                <a:latin typeface="Segoe UI"/>
-              </a:rPr>
-              <a:t>Licences Gouvernementales</a:t>
-            </a:r>
-          </a:p>
-        </p:txBody>
-      </p:sp>
-      <p:sp>
-        <p:nvSpPr>
-          <p:cNvPr id="20" name="TextBox 19"/>
-          <p:cNvSpPr txBox="1"/>
-          <p:nvPr/>
-        </p:nvSpPr>
-        <p:spPr>
-          <a:xfrm>
-            <a:off x="6300216" y="2880360"/>
-            <a:ext cx="2468880" cy="1371600"/>
+                  <a:srgbClr val="1C2340"/>
+                </a:solidFill>
+                <a:latin typeface="Segoe UI"/>
+              </a:rPr>
+              <a:t>Marché sous-digitalisé</a:t>
+            </a:r>
+          </a:p>
+        </p:txBody>
+      </p:sp>
+      <p:sp>
+        <p:nvSpPr>
+          <p:cNvPr id="16" name="TextBox 15"/>
+          <p:cNvSpPr txBox="1"/>
+          <p:nvPr/>
+        </p:nvSpPr>
+        <p:spPr>
+          <a:xfrm>
+            <a:off x="6903720" y="2011680"/>
+            <a:ext cx="4389120" cy="640080"/>
           </a:xfrm>
           <a:prstGeom prst="rect">
             <a:avLst/>
@@ -7361,32 +7445,31 @@
             <a:r>
               <a:rPr sz="1000" b="0" i="0">
                 <a:solidFill>
-                  <a:srgbClr val="BBCCDD"/>
-                </a:solidFill>
-                <a:latin typeface="Segoe UI"/>
-              </a:rPr>
-              <a:t>Contrats B2G : Ministères de la Santé, mairies, districts.
-Base de données nationale des établissements, tableaux de bord régionaux.</a:t>
-            </a:r>
-          </a:p>
-        </p:txBody>
-      </p:sp>
-      <p:sp>
-        <p:nvSpPr>
-          <p:cNvPr id="21" name="Rectangle 20"/>
+                  <a:srgbClr val="8E99B0"/>
+                </a:solidFill>
+                <a:latin typeface="Segoe UI"/>
+              </a:rPr>
+              <a:t>L'Afrique subsaharienne a besoin de solutions locales, adaptées au contexte réseau, au multilinguisme et aux usages mobiles-first.</a:t>
+            </a:r>
+          </a:p>
+        </p:txBody>
+      </p:sp>
+      <p:sp>
+        <p:nvSpPr>
+          <p:cNvPr id="17" name="Rectangle 16"/>
           <p:cNvSpPr/>
           <p:nvPr/>
         </p:nvSpPr>
         <p:spPr>
           <a:xfrm>
-            <a:off x="9107424" y="1417320"/>
-            <a:ext cx="2743200" cy="3657600"/>
+            <a:off x="274320" y="2880360"/>
+            <a:ext cx="5486400" cy="1188720"/>
           </a:xfrm>
           <a:prstGeom prst="rect">
             <a:avLst/>
           </a:prstGeom>
           <a:solidFill>
-            <a:srgbClr val="1E2848"/>
+            <a:srgbClr val="FFFFFF"/>
           </a:solidFill>
           <a:ln>
             <a:noFill/>
@@ -7417,20 +7500,20 @@
       </p:sp>
       <p:sp>
         <p:nvSpPr>
-          <p:cNvPr id="22" name="Rectangle 21"/>
+          <p:cNvPr id="18" name="Rectangle 17"/>
           <p:cNvSpPr/>
           <p:nvPr/>
         </p:nvSpPr>
         <p:spPr>
           <a:xfrm>
-            <a:off x="9107424" y="1417320"/>
-            <a:ext cx="2743200" cy="109728"/>
+            <a:off x="274320" y="2880360"/>
+            <a:ext cx="73152" cy="1188720"/>
           </a:xfrm>
           <a:prstGeom prst="rect">
             <a:avLst/>
           </a:prstGeom>
           <a:solidFill>
-            <a:srgbClr val="2ECC71"/>
+            <a:srgbClr val="E8620A"/>
           </a:solidFill>
           <a:ln>
             <a:noFill/>
@@ -7461,14 +7544,14 @@
       </p:sp>
       <p:sp>
         <p:nvSpPr>
-          <p:cNvPr id="23" name="TextBox 22"/>
-          <p:cNvSpPr txBox="1"/>
-          <p:nvPr/>
-        </p:nvSpPr>
-        <p:spPr>
-          <a:xfrm>
-            <a:off x="9244584" y="1691640"/>
-            <a:ext cx="640080" cy="594360"/>
+          <p:cNvPr id="19" name="TextBox 18"/>
+          <p:cNvSpPr txBox="1"/>
+          <p:nvPr/>
+        </p:nvSpPr>
+        <p:spPr>
+          <a:xfrm>
+            <a:off x="457200" y="2971800"/>
+            <a:ext cx="548640" cy="548640"/>
           </a:xfrm>
           <a:prstGeom prst="rect">
             <a:avLst/>
@@ -7483,27 +7566,27 @@
           <a:p>
             <a:pPr algn="l"/>
             <a:r>
-              <a:rPr sz="2800" b="0" i="0">
-                <a:solidFill>
-                  <a:srgbClr val="FFFFFF"/>
-                </a:solidFill>
-                <a:latin typeface="Segoe UI"/>
-              </a:rPr>
-              <a:t>🤝</a:t>
-            </a:r>
-          </a:p>
-        </p:txBody>
-      </p:sp>
-      <p:sp>
-        <p:nvSpPr>
-          <p:cNvPr id="24" name="TextBox 23"/>
-          <p:cNvSpPr txBox="1"/>
-          <p:nvPr/>
-        </p:nvSpPr>
-        <p:spPr>
-          <a:xfrm>
-            <a:off x="9244584" y="2377440"/>
-            <a:ext cx="2468880" cy="457200"/>
+              <a:rPr sz="2400" b="0" i="0">
+                <a:solidFill>
+                  <a:srgbClr val="1C2340"/>
+                </a:solidFill>
+                <a:latin typeface="Segoe UI"/>
+              </a:rPr>
+              <a:t>🔒</a:t>
+            </a:r>
+          </a:p>
+        </p:txBody>
+      </p:sp>
+      <p:sp>
+        <p:nvSpPr>
+          <p:cNvPr id="20" name="TextBox 19"/>
+          <p:cNvSpPr txBox="1"/>
+          <p:nvPr/>
+        </p:nvSpPr>
+        <p:spPr>
+          <a:xfrm>
+            <a:off x="1143000" y="2971800"/>
+            <a:ext cx="4389120" cy="347472"/>
           </a:xfrm>
           <a:prstGeom prst="rect">
             <a:avLst/>
@@ -7520,25 +7603,25 @@
             <a:r>
               <a:rPr sz="1300" b="1" i="0">
                 <a:solidFill>
-                  <a:srgbClr val="FFFFFF"/>
-                </a:solidFill>
-                <a:latin typeface="Segoe UI"/>
-              </a:rPr>
-              <a:t>Partenariats</a:t>
-            </a:r>
-          </a:p>
-        </p:txBody>
-      </p:sp>
-      <p:sp>
-        <p:nvSpPr>
-          <p:cNvPr id="25" name="TextBox 24"/>
-          <p:cNvSpPr txBox="1"/>
-          <p:nvPr/>
-        </p:nvSpPr>
-        <p:spPr>
-          <a:xfrm>
-            <a:off x="9244584" y="2880360"/>
-            <a:ext cx="2468880" cy="1371600"/>
+                  <a:srgbClr val="1C2340"/>
+                </a:solidFill>
+                <a:latin typeface="Segoe UI"/>
+              </a:rPr>
+              <a:t>Barrières à l'entrée solides</a:t>
+            </a:r>
+          </a:p>
+        </p:txBody>
+      </p:sp>
+      <p:sp>
+        <p:nvSpPr>
+          <p:cNvPr id="21" name="TextBox 20"/>
+          <p:cNvSpPr txBox="1"/>
+          <p:nvPr/>
+        </p:nvSpPr>
+        <p:spPr>
+          <a:xfrm>
+            <a:off x="1143000" y="3337560"/>
+            <a:ext cx="4389120" cy="400110"/>
           </a:xfrm>
           <a:prstGeom prst="rect">
             <a:avLst/>
@@ -7553,34 +7636,186 @@
           <a:p>
             <a:pPr algn="l"/>
             <a:r>
-              <a:rPr sz="1000" b="0" i="0">
-                <a:solidFill>
-                  <a:srgbClr val="BBCCDD"/>
-                </a:solidFill>
-                <a:latin typeface="Segoe UI"/>
-              </a:rPr>
-              <a:t>Compagnies d'assurance santé, ONG, agences de développement.
-Intégration API pour systèmes existants.</a:t>
-            </a:r>
-          </a:p>
-        </p:txBody>
-      </p:sp>
-      <p:sp>
-        <p:nvSpPr>
-          <p:cNvPr id="26" name="Rectangle 25"/>
+              <a:rPr sz="1000" b="0" i="0" dirty="0" err="1">
+                <a:solidFill>
+                  <a:srgbClr val="8E99B0"/>
+                </a:solidFill>
+                <a:latin typeface="Segoe UI"/>
+              </a:rPr>
+              <a:t>Données</a:t>
+            </a:r>
+            <a:r>
+              <a:rPr sz="1000" b="0" i="0" dirty="0">
+                <a:solidFill>
+                  <a:srgbClr val="8E99B0"/>
+                </a:solidFill>
+                <a:latin typeface="Segoe UI"/>
+              </a:rPr>
+              <a:t> </a:t>
+            </a:r>
+            <a:r>
+              <a:rPr sz="1000" b="0" i="0" dirty="0" err="1">
+                <a:solidFill>
+                  <a:srgbClr val="8E99B0"/>
+                </a:solidFill>
+                <a:latin typeface="Segoe UI"/>
+              </a:rPr>
+              <a:t>géolocalisées</a:t>
+            </a:r>
+            <a:r>
+              <a:rPr sz="1000" b="0" i="0" dirty="0">
+                <a:solidFill>
+                  <a:srgbClr val="8E99B0"/>
+                </a:solidFill>
+                <a:latin typeface="Segoe UI"/>
+              </a:rPr>
+              <a:t> propriétaires, </a:t>
+            </a:r>
+            <a:r>
+              <a:rPr sz="1000" b="0" i="0" dirty="0" err="1">
+                <a:solidFill>
+                  <a:srgbClr val="8E99B0"/>
+                </a:solidFill>
+                <a:latin typeface="Segoe UI"/>
+              </a:rPr>
+              <a:t>réseau</a:t>
+            </a:r>
+            <a:r>
+              <a:rPr sz="1000" b="0" i="0" dirty="0">
+                <a:solidFill>
+                  <a:srgbClr val="8E99B0"/>
+                </a:solidFill>
+                <a:latin typeface="Segoe UI"/>
+              </a:rPr>
+              <a:t> de </a:t>
+            </a:r>
+            <a:r>
+              <a:rPr sz="1000" b="0" i="0" dirty="0" err="1">
+                <a:solidFill>
+                  <a:srgbClr val="8E99B0"/>
+                </a:solidFill>
+                <a:latin typeface="Segoe UI"/>
+              </a:rPr>
+              <a:t>centres</a:t>
+            </a:r>
+            <a:r>
+              <a:rPr sz="1000" b="0" i="0" dirty="0">
+                <a:solidFill>
+                  <a:srgbClr val="8E99B0"/>
+                </a:solidFill>
+                <a:latin typeface="Segoe UI"/>
+              </a:rPr>
+              <a:t> </a:t>
+            </a:r>
+            <a:r>
+              <a:rPr sz="1000" b="0" i="0" dirty="0" err="1">
+                <a:solidFill>
+                  <a:srgbClr val="8E99B0"/>
+                </a:solidFill>
+                <a:latin typeface="Segoe UI"/>
+              </a:rPr>
+              <a:t>référencés</a:t>
+            </a:r>
+            <a:r>
+              <a:rPr sz="1000" b="0" i="0" dirty="0">
+                <a:solidFill>
+                  <a:srgbClr val="8E99B0"/>
+                </a:solidFill>
+                <a:latin typeface="Segoe UI"/>
+              </a:rPr>
+              <a:t>, </a:t>
+            </a:r>
+            <a:r>
+              <a:rPr sz="1000" b="0" i="0" dirty="0" err="1">
+                <a:solidFill>
+                  <a:srgbClr val="8E99B0"/>
+                </a:solidFill>
+                <a:latin typeface="Segoe UI"/>
+              </a:rPr>
+              <a:t>intégrations</a:t>
+            </a:r>
+            <a:r>
+              <a:rPr sz="1000" b="0" i="0" dirty="0">
+                <a:solidFill>
+                  <a:srgbClr val="8E99B0"/>
+                </a:solidFill>
+                <a:latin typeface="Segoe UI"/>
+              </a:rPr>
+              <a:t> services de secours</a:t>
+            </a:r>
+            <a:r>
+              <a:rPr lang="fr-FR" sz="1000" b="0" i="0" dirty="0">
+                <a:solidFill>
+                  <a:srgbClr val="8E99B0"/>
+                </a:solidFill>
+                <a:latin typeface="Segoe UI"/>
+              </a:rPr>
+              <a:t>-</a:t>
+            </a:r>
+            <a:r>
+              <a:rPr sz="1000" b="0" i="0" dirty="0">
+                <a:solidFill>
+                  <a:srgbClr val="8E99B0"/>
+                </a:solidFill>
+                <a:latin typeface="Segoe UI"/>
+              </a:rPr>
+              <a:t>difficile à </a:t>
+            </a:r>
+            <a:r>
+              <a:rPr sz="1000" b="0" i="0" dirty="0" err="1">
+                <a:solidFill>
+                  <a:srgbClr val="8E99B0"/>
+                </a:solidFill>
+                <a:latin typeface="Segoe UI"/>
+              </a:rPr>
+              <a:t>répliquer</a:t>
+            </a:r>
+            <a:r>
+              <a:rPr sz="1000" b="0" i="0" dirty="0">
+                <a:solidFill>
+                  <a:srgbClr val="8E99B0"/>
+                </a:solidFill>
+                <a:latin typeface="Segoe UI"/>
+              </a:rPr>
+              <a:t> </a:t>
+            </a:r>
+            <a:r>
+              <a:rPr sz="1000" b="0" i="0" dirty="0" err="1">
+                <a:solidFill>
+                  <a:srgbClr val="8E99B0"/>
+                </a:solidFill>
+                <a:latin typeface="Segoe UI"/>
+              </a:rPr>
+              <a:t>rapidement</a:t>
+            </a:r>
+            <a:r>
+              <a:rPr sz="1000" b="0" i="0" dirty="0">
+                <a:solidFill>
+                  <a:srgbClr val="8E99B0"/>
+                </a:solidFill>
+                <a:latin typeface="Segoe UI"/>
+              </a:rPr>
+              <a:t>.</a:t>
+            </a:r>
+          </a:p>
+        </p:txBody>
+      </p:sp>
+      <p:sp>
+        <p:nvSpPr>
+          <p:cNvPr id="22" name="Rectangle 21"/>
           <p:cNvSpPr/>
           <p:nvPr/>
         </p:nvSpPr>
         <p:spPr>
           <a:xfrm>
-            <a:off x="274320" y="5303520"/>
-            <a:ext cx="11640312" cy="1280160"/>
+            <a:off x="6035040" y="2880360"/>
+            <a:ext cx="5486400" cy="1188720"/>
           </a:xfrm>
           <a:prstGeom prst="rect">
             <a:avLst/>
           </a:prstGeom>
           <a:solidFill>
-            <a:srgbClr val="151C38"/>
+            <a:srgbClr val="FFFFFF"/>
           </a:solidFill>
           <a:ln>
             <a:noFill/>
@@ -7611,14 +7846,58 @@
       </p:sp>
       <p:sp>
         <p:nvSpPr>
-          <p:cNvPr id="27" name="TextBox 26"/>
-          <p:cNvSpPr txBox="1"/>
-          <p:nvPr/>
-        </p:nvSpPr>
-        <p:spPr>
-          <a:xfrm>
-            <a:off x="457200" y="5376672"/>
-            <a:ext cx="1828800" cy="320040"/>
+          <p:cNvPr id="23" name="Rectangle 22"/>
+          <p:cNvSpPr/>
+          <p:nvPr/>
+        </p:nvSpPr>
+        <p:spPr>
+          <a:xfrm>
+            <a:off x="6035040" y="2880360"/>
+            <a:ext cx="73152" cy="1188720"/>
+          </a:xfrm>
+          <a:prstGeom prst="rect">
+            <a:avLst/>
+          </a:prstGeom>
+          <a:solidFill>
+            <a:srgbClr val="E8620A"/>
+          </a:solidFill>
+          <a:ln>
+            <a:noFill/>
+          </a:ln>
+        </p:spPr>
+        <p:style>
+          <a:lnRef idx="1">
+            <a:schemeClr val="accent1"/>
+          </a:lnRef>
+          <a:fillRef idx="3">
+            <a:schemeClr val="accent1"/>
+          </a:fillRef>
+          <a:effectRef idx="2">
+            <a:schemeClr val="accent1"/>
+          </a:effectRef>
+          <a:fontRef idx="minor">
+            <a:schemeClr val="lt1"/>
+          </a:fontRef>
+        </p:style>
+        <p:txBody>
+          <a:bodyPr rtlCol="0" anchor="ctr"/>
+          <a:lstStyle/>
+          <a:p>
+            <a:pPr algn="ctr"/>
+            <a:endParaRPr/>
+          </a:p>
+        </p:txBody>
+      </p:sp>
+      <p:sp>
+        <p:nvSpPr>
+          <p:cNvPr id="24" name="TextBox 23"/>
+          <p:cNvSpPr txBox="1"/>
+          <p:nvPr/>
+        </p:nvSpPr>
+        <p:spPr>
+          <a:xfrm>
+            <a:off x="6217920" y="2971800"/>
+            <a:ext cx="548640" cy="548640"/>
           </a:xfrm>
           <a:prstGeom prst="rect">
             <a:avLst/>
@@ -7633,27 +7912,27 @@
           <a:p>
             <a:pPr algn="l"/>
             <a:r>
-              <a:rPr sz="1200" b="1" i="0">
-                <a:solidFill>
-                  <a:srgbClr val="009688"/>
-                </a:solidFill>
-                <a:latin typeface="Segoe UI"/>
-              </a:rPr>
-              <a:t>🗓️  Roadmap</a:t>
-            </a:r>
-          </a:p>
-        </p:txBody>
-      </p:sp>
-      <p:sp>
-        <p:nvSpPr>
-          <p:cNvPr id="28" name="TextBox 27"/>
-          <p:cNvSpPr txBox="1"/>
-          <p:nvPr/>
-        </p:nvSpPr>
-        <p:spPr>
-          <a:xfrm>
-            <a:off x="457200" y="5760720"/>
-            <a:ext cx="1371600" cy="274320"/>
+              <a:rPr sz="2400" b="0" i="0">
+                <a:solidFill>
+                  <a:srgbClr val="1C2340"/>
+                </a:solidFill>
+                <a:latin typeface="Segoe UI"/>
+              </a:rPr>
+              <a:t>📈</a:t>
+            </a:r>
+          </a:p>
+        </p:txBody>
+      </p:sp>
+      <p:sp>
+        <p:nvSpPr>
+          <p:cNvPr id="25" name="TextBox 24"/>
+          <p:cNvSpPr txBox="1"/>
+          <p:nvPr/>
+        </p:nvSpPr>
+        <p:spPr>
+          <a:xfrm>
+            <a:off x="6903720" y="2971800"/>
+            <a:ext cx="4389120" cy="347472"/>
           </a:xfrm>
           <a:prstGeom prst="rect">
             <a:avLst/>
@@ -7668,14 +7947,137 @@
           <a:p>
             <a:pPr algn="l"/>
             <a:r>
-              <a:rPr sz="900" b="1" i="0">
-                <a:solidFill>
-                  <a:srgbClr val="E8620A"/>
-                </a:solidFill>
-                <a:latin typeface="Segoe UI"/>
-              </a:rPr>
-              <a:t>Q2 2025</a:t>
-            </a:r>
+              <a:rPr sz="1300" b="1" i="0">
+                <a:solidFill>
+                  <a:srgbClr val="1C2340"/>
+                </a:solidFill>
+                <a:latin typeface="Segoe UI"/>
+              </a:rPr>
+              <a:t>Scalabilité prouvée</a:t>
+            </a:r>
+          </a:p>
+        </p:txBody>
+      </p:sp>
+      <p:sp>
+        <p:nvSpPr>
+          <p:cNvPr id="26" name="TextBox 25"/>
+          <p:cNvSpPr txBox="1"/>
+          <p:nvPr/>
+        </p:nvSpPr>
+        <p:spPr>
+          <a:xfrm>
+            <a:off x="6903720" y="3337560"/>
+            <a:ext cx="4389120" cy="640080"/>
+          </a:xfrm>
+          <a:prstGeom prst="rect">
+            <a:avLst/>
+          </a:prstGeom>
+          <a:noFill/>
+        </p:spPr>
+        <p:txBody>
+          <a:bodyPr wrap="square">
+            <a:spAutoFit/>
+          </a:bodyPr>
+          <a:lstStyle/>
+          <a:p>
+            <a:pPr algn="l"/>
+            <a:r>
+              <a:rPr sz="1000" b="0" i="0">
+                <a:solidFill>
+                  <a:srgbClr val="8E99B0"/>
+                </a:solidFill>
+                <a:latin typeface="Segoe UI"/>
+              </a:rPr>
+              <a:t>Architecture API REST découplée. L'ajout de nouvelles régions ou pays se fait par configuration, sans refonte du code.</a:t>
+            </a:r>
+          </a:p>
+        </p:txBody>
+      </p:sp>
+      <p:sp>
+        <p:nvSpPr>
+          <p:cNvPr id="27" name="Rectangle 26"/>
+          <p:cNvSpPr/>
+          <p:nvPr/>
+        </p:nvSpPr>
+        <p:spPr>
+          <a:xfrm>
+            <a:off x="274320" y="4206240"/>
+            <a:ext cx="5486400" cy="1188720"/>
+          </a:xfrm>
+          <a:prstGeom prst="rect">
+            <a:avLst/>
+          </a:prstGeom>
+          <a:solidFill>
+            <a:srgbClr val="FFFFFF"/>
+          </a:solidFill>
+          <a:ln>
+            <a:noFill/>
+          </a:ln>
+        </p:spPr>
+        <p:style>
+          <a:lnRef idx="1">
+            <a:schemeClr val="accent1"/>
+          </a:lnRef>
+          <a:fillRef idx="3">
+            <a:schemeClr val="accent1"/>
+          </a:fillRef>
+          <a:effectRef idx="2">
+            <a:schemeClr val="accent1"/>
+          </a:effectRef>
+          <a:fontRef idx="minor">
+            <a:schemeClr val="lt1"/>
+          </a:fontRef>
+        </p:style>
+        <p:txBody>
+          <a:bodyPr rtlCol="0" anchor="ctr"/>
+          <a:lstStyle/>
+          <a:p>
+            <a:pPr algn="ctr"/>
+            <a:endParaRPr/>
+          </a:p>
+        </p:txBody>
+      </p:sp>
+      <p:sp>
+        <p:nvSpPr>
+          <p:cNvPr id="28" name="Rectangle 27"/>
+          <p:cNvSpPr/>
+          <p:nvPr/>
+        </p:nvSpPr>
+        <p:spPr>
+          <a:xfrm>
+            <a:off x="274320" y="4206240"/>
+            <a:ext cx="73152" cy="1188720"/>
+          </a:xfrm>
+          <a:prstGeom prst="rect">
+            <a:avLst/>
+          </a:prstGeom>
+          <a:solidFill>
+            <a:srgbClr val="E8620A"/>
+          </a:solidFill>
+          <a:ln>
+            <a:noFill/>
+          </a:ln>
+        </p:spPr>
+        <p:style>
+          <a:lnRef idx="1">
+            <a:schemeClr val="accent1"/>
+          </a:lnRef>
+          <a:fillRef idx="3">
+            <a:schemeClr val="accent1"/>
+          </a:fillRef>
+          <a:effectRef idx="2">
+            <a:schemeClr val="accent1"/>
+          </a:effectRef>
+          <a:fontRef idx="minor">
+            <a:schemeClr val="lt1"/>
+          </a:fontRef>
+        </p:style>
+        <p:txBody>
+          <a:bodyPr rtlCol="0" anchor="ctr"/>
+          <a:lstStyle/>
+          <a:p>
+            <a:pPr algn="ctr"/>
+            <a:endParaRPr/>
           </a:p>
         </p:txBody>
       </p:sp>
@@ -7687,8 +8089,8 @@
         </p:nvSpPr>
         <p:spPr>
           <a:xfrm>
-            <a:off x="457200" y="6035040"/>
-            <a:ext cx="2606040" cy="411480"/>
+            <a:off x="457200" y="4297680"/>
+            <a:ext cx="548640" cy="548640"/>
           </a:xfrm>
           <a:prstGeom prst="rect">
             <a:avLst/>
@@ -7703,13 +8105,13 @@
           <a:p>
             <a:pPr algn="l"/>
             <a:r>
-              <a:rPr sz="900" b="0" i="0">
-                <a:solidFill>
-                  <a:srgbClr val="BBCCDD"/>
-                </a:solidFill>
-                <a:latin typeface="Segoe UI"/>
-              </a:rPr>
-              <a:t>MVP lancé · 3 124 centres · Backend production</a:t>
+              <a:rPr sz="2400" b="0" i="0">
+                <a:solidFill>
+                  <a:srgbClr val="1C2340"/>
+                </a:solidFill>
+                <a:latin typeface="Segoe UI"/>
+              </a:rPr>
+              <a:t>🤝</a:t>
             </a:r>
           </a:p>
         </p:txBody>
@@ -7722,8 +8124,8 @@
         </p:nvSpPr>
         <p:spPr>
           <a:xfrm>
-            <a:off x="3401568" y="5760720"/>
-            <a:ext cx="1371600" cy="274320"/>
+            <a:off x="1143000" y="4297680"/>
+            <a:ext cx="4389120" cy="347472"/>
           </a:xfrm>
           <a:prstGeom prst="rect">
             <a:avLst/>
@@ -7738,13 +8140,13 @@
           <a:p>
             <a:pPr algn="l"/>
             <a:r>
-              <a:rPr sz="900" b="1" i="0">
-                <a:solidFill>
-                  <a:srgbClr val="E8620A"/>
-                </a:solidFill>
-                <a:latin typeface="Segoe UI"/>
-              </a:rPr>
-              <a:t>Q3 2025</a:t>
+              <a:rPr sz="1300" b="1" i="0">
+                <a:solidFill>
+                  <a:srgbClr val="1C2340"/>
+                </a:solidFill>
+                <a:latin typeface="Segoe UI"/>
+              </a:rPr>
+              <a:t>Équipe focalisée &amp; motivée</a:t>
             </a:r>
           </a:p>
         </p:txBody>
@@ -7757,8 +8159,8 @@
         </p:nvSpPr>
         <p:spPr>
           <a:xfrm>
-            <a:off x="3401568" y="6035040"/>
-            <a:ext cx="2606040" cy="411480"/>
+            <a:off x="1143000" y="4663440"/>
+            <a:ext cx="4389120" cy="400110"/>
           </a:xfrm>
           <a:prstGeom prst="rect">
             <a:avLst/>
@@ -7773,27 +8175,205 @@
           <a:p>
             <a:pPr algn="l"/>
             <a:r>
-              <a:rPr sz="900" b="0" i="0">
-                <a:solidFill>
-                  <a:srgbClr val="BBCCDD"/>
-                </a:solidFill>
-                <a:latin typeface="Segoe UI"/>
-              </a:rPr>
-              <a:t>Onboarding établissements · Module régulateur</a:t>
-            </a:r>
-          </a:p>
-        </p:txBody>
-      </p:sp>
-      <p:sp>
-        <p:nvSpPr>
-          <p:cNvPr id="32" name="TextBox 31"/>
-          <p:cNvSpPr txBox="1"/>
-          <p:nvPr/>
-        </p:nvSpPr>
-        <p:spPr>
-          <a:xfrm>
-            <a:off x="6345936" y="5760720"/>
-            <a:ext cx="1371600" cy="274320"/>
+              <a:rPr sz="1000" b="0" i="0" dirty="0">
+                <a:solidFill>
+                  <a:srgbClr val="8E99B0"/>
+                </a:solidFill>
+                <a:latin typeface="Segoe UI"/>
+              </a:rPr>
+              <a:t>YEFA TECHNOLOGIE, </a:t>
+            </a:r>
+            <a:r>
+              <a:rPr lang="fr-CI" sz="1000" dirty="0">
+                <a:solidFill>
+                  <a:srgbClr val="8E99B0"/>
+                </a:solidFill>
+                <a:latin typeface="Segoe UI"/>
+              </a:rPr>
+              <a:t>Entreprise</a:t>
+            </a:r>
+            <a:r>
+              <a:rPr sz="1000" b="0" i="0" dirty="0">
+                <a:solidFill>
+                  <a:srgbClr val="8E99B0"/>
+                </a:solidFill>
+                <a:latin typeface="Segoe UI"/>
+              </a:rPr>
+              <a:t> </a:t>
+            </a:r>
+            <a:r>
+              <a:rPr sz="1000" b="0" i="0" dirty="0" err="1">
+                <a:solidFill>
+                  <a:srgbClr val="8E99B0"/>
+                </a:solidFill>
+                <a:latin typeface="Segoe UI"/>
+              </a:rPr>
+              <a:t>spécialisé</a:t>
+            </a:r>
+            <a:r>
+              <a:rPr sz="1000" b="0" i="0" dirty="0">
+                <a:solidFill>
+                  <a:srgbClr val="8E99B0"/>
+                </a:solidFill>
+                <a:latin typeface="Segoe UI"/>
+              </a:rPr>
+              <a:t> </a:t>
+            </a:r>
+            <a:r>
+              <a:rPr sz="1000" b="0" i="0" dirty="0" err="1">
+                <a:solidFill>
+                  <a:srgbClr val="8E99B0"/>
+                </a:solidFill>
+                <a:latin typeface="Segoe UI"/>
+              </a:rPr>
+              <a:t>en</a:t>
+            </a:r>
+            <a:r>
+              <a:rPr sz="1000" b="0" i="0" dirty="0">
+                <a:solidFill>
+                  <a:srgbClr val="8E99B0"/>
+                </a:solidFill>
+                <a:latin typeface="Segoe UI"/>
+              </a:rPr>
+              <a:t> solutions </a:t>
+            </a:r>
+            <a:r>
+              <a:rPr sz="1000" b="0" i="0" dirty="0" err="1">
+                <a:solidFill>
+                  <a:srgbClr val="8E99B0"/>
+                </a:solidFill>
+                <a:latin typeface="Segoe UI"/>
+              </a:rPr>
+              <a:t>digitales</a:t>
+            </a:r>
+            <a:r>
+              <a:rPr sz="1000" b="0" i="0" dirty="0">
+                <a:solidFill>
+                  <a:srgbClr val="8E99B0"/>
+                </a:solidFill>
+                <a:latin typeface="Segoe UI"/>
+              </a:rPr>
+              <a:t> pour </a:t>
+            </a:r>
+            <a:r>
+              <a:rPr sz="1000" b="0" i="0" dirty="0" err="1">
+                <a:solidFill>
+                  <a:srgbClr val="8E99B0"/>
+                </a:solidFill>
+                <a:latin typeface="Segoe UI"/>
+              </a:rPr>
+              <a:t>l'Afrique</a:t>
+            </a:r>
+            <a:r>
+              <a:rPr sz="1000" b="0" i="0" dirty="0">
+                <a:solidFill>
+                  <a:srgbClr val="8E99B0"/>
+                </a:solidFill>
+                <a:latin typeface="Segoe UI"/>
+              </a:rPr>
+              <a:t> avec expertise mobile et backend.</a:t>
+            </a:r>
+          </a:p>
+        </p:txBody>
+      </p:sp>
+      <p:sp>
+        <p:nvSpPr>
+          <p:cNvPr id="32" name="Rectangle 31"/>
+          <p:cNvSpPr/>
+          <p:nvPr/>
+        </p:nvSpPr>
+        <p:spPr>
+          <a:xfrm>
+            <a:off x="274320" y="5532120"/>
+            <a:ext cx="11640312" cy="914400"/>
+          </a:xfrm>
+          <a:prstGeom prst="rect">
+            <a:avLst/>
+          </a:prstGeom>
+          <a:solidFill>
+            <a:srgbClr val="FFF0E0"/>
+          </a:solidFill>
+          <a:ln>
+            <a:noFill/>
+          </a:ln>
+        </p:spPr>
+        <p:style>
+          <a:lnRef idx="1">
+            <a:schemeClr val="accent1"/>
+          </a:lnRef>
+          <a:fillRef idx="3">
+            <a:schemeClr val="accent1"/>
+          </a:fillRef>
+          <a:effectRef idx="2">
+            <a:schemeClr val="accent1"/>
+          </a:effectRef>
+          <a:fontRef idx="minor">
+            <a:schemeClr val="lt1"/>
+          </a:fontRef>
+        </p:style>
+        <p:txBody>
+          <a:bodyPr rtlCol="0" anchor="ctr"/>
+          <a:lstStyle/>
+          <a:p>
+            <a:pPr algn="ctr"/>
+            <a:endParaRPr/>
+          </a:p>
+        </p:txBody>
+      </p:sp>
+      <p:sp>
+        <p:nvSpPr>
+          <p:cNvPr id="33" name="Rectangle 32"/>
+          <p:cNvSpPr/>
+          <p:nvPr/>
+        </p:nvSpPr>
+        <p:spPr>
+          <a:xfrm>
+            <a:off x="274320" y="5532120"/>
+            <a:ext cx="73152" cy="914400"/>
+          </a:xfrm>
+          <a:prstGeom prst="rect">
+            <a:avLst/>
+          </a:prstGeom>
+          <a:solidFill>
+            <a:srgbClr val="E8620A"/>
+          </a:solidFill>
+          <a:ln>
+            <a:noFill/>
+          </a:ln>
+        </p:spPr>
+        <p:style>
+          <a:lnRef idx="1">
+            <a:schemeClr val="accent1"/>
+          </a:lnRef>
+          <a:fillRef idx="3">
+            <a:schemeClr val="accent1"/>
+          </a:fillRef>
+          <a:effectRef idx="2">
+            <a:schemeClr val="accent1"/>
+          </a:effectRef>
+          <a:fontRef idx="minor">
+            <a:schemeClr val="lt1"/>
+          </a:fontRef>
+        </p:style>
+        <p:txBody>
+          <a:bodyPr rtlCol="0" anchor="ctr"/>
+          <a:lstStyle/>
+          <a:p>
+            <a:pPr algn="ctr"/>
+            <a:endParaRPr/>
+          </a:p>
+        </p:txBody>
+      </p:sp>
+      <p:sp>
+        <p:nvSpPr>
+          <p:cNvPr id="34" name="TextBox 33"/>
+          <p:cNvSpPr txBox="1"/>
+          <p:nvPr/>
+        </p:nvSpPr>
+        <p:spPr>
+          <a:xfrm>
+            <a:off x="457200" y="5623560"/>
+            <a:ext cx="548640" cy="548640"/>
           </a:xfrm>
           <a:prstGeom prst="rect">
             <a:avLst/>
@@ -7808,27 +8388,27 @@
           <a:p>
             <a:pPr algn="l"/>
             <a:r>
-              <a:rPr sz="900" b="1" i="0">
-                <a:solidFill>
-                  <a:srgbClr val="E8620A"/>
-                </a:solidFill>
-                <a:latin typeface="Segoe UI"/>
-              </a:rPr>
-              <a:t>Q4 2025</a:t>
-            </a:r>
-          </a:p>
-        </p:txBody>
-      </p:sp>
-      <p:sp>
-        <p:nvSpPr>
-          <p:cNvPr id="33" name="TextBox 32"/>
-          <p:cNvSpPr txBox="1"/>
-          <p:nvPr/>
-        </p:nvSpPr>
-        <p:spPr>
-          <a:xfrm>
-            <a:off x="6345936" y="6035040"/>
-            <a:ext cx="2606040" cy="411480"/>
+              <a:rPr sz="2400" b="0" i="0">
+                <a:solidFill>
+                  <a:srgbClr val="1C2340"/>
+                </a:solidFill>
+                <a:latin typeface="Segoe UI"/>
+              </a:rPr>
+              <a:t>🤝</a:t>
+            </a:r>
+          </a:p>
+        </p:txBody>
+      </p:sp>
+      <p:sp>
+        <p:nvSpPr>
+          <p:cNvPr id="35" name="TextBox 34"/>
+          <p:cNvSpPr txBox="1"/>
+          <p:nvPr/>
+        </p:nvSpPr>
+        <p:spPr>
+          <a:xfrm>
+            <a:off x="1143000" y="5605272"/>
+            <a:ext cx="10515600" cy="347472"/>
           </a:xfrm>
           <a:prstGeom prst="rect">
             <a:avLst/>
@@ -7843,27 +8423,27 @@
           <a:p>
             <a:pPr algn="l"/>
             <a:r>
-              <a:rPr sz="900" b="0" i="0">
-                <a:solidFill>
-                  <a:srgbClr val="BBCCDD"/>
-                </a:solidFill>
-                <a:latin typeface="Segoe UI"/>
-              </a:rPr>
-              <a:t>Partenariat pilote Ministère · Monétisation SaaS</a:t>
-            </a:r>
-          </a:p>
-        </p:txBody>
-      </p:sp>
-      <p:sp>
-        <p:nvSpPr>
-          <p:cNvPr id="34" name="TextBox 33"/>
-          <p:cNvSpPr txBox="1"/>
-          <p:nvPr/>
-        </p:nvSpPr>
-        <p:spPr>
-          <a:xfrm>
-            <a:off x="9290304" y="5760720"/>
-            <a:ext cx="1371600" cy="274320"/>
+              <a:rPr sz="1300" b="1" i="0">
+                <a:solidFill>
+                  <a:srgbClr val="1C2340"/>
+                </a:solidFill>
+                <a:latin typeface="Segoe UI"/>
+              </a:rPr>
+              <a:t>Équipe focalisée &amp; motivée</a:t>
+            </a:r>
+          </a:p>
+        </p:txBody>
+      </p:sp>
+      <p:sp>
+        <p:nvSpPr>
+          <p:cNvPr id="36" name="TextBox 35"/>
+          <p:cNvSpPr txBox="1"/>
+          <p:nvPr/>
+        </p:nvSpPr>
+        <p:spPr>
+          <a:xfrm>
+            <a:off x="1143000" y="5952744"/>
+            <a:ext cx="10515600" cy="246221"/>
           </a:xfrm>
           <a:prstGeom prst="rect">
             <a:avLst/>
@@ -7878,48 +8458,112 @@
           <a:p>
             <a:pPr algn="l"/>
             <a:r>
-              <a:rPr sz="900" b="1" i="0">
-                <a:solidFill>
-                  <a:srgbClr val="E8620A"/>
-                </a:solidFill>
-                <a:latin typeface="Segoe UI"/>
-              </a:rPr>
-              <a:t>2026</a:t>
-            </a:r>
-          </a:p>
-        </p:txBody>
-      </p:sp>
-      <p:sp>
-        <p:nvSpPr>
-          <p:cNvPr id="35" name="TextBox 34"/>
-          <p:cNvSpPr txBox="1"/>
-          <p:nvPr/>
-        </p:nvSpPr>
-        <p:spPr>
-          <a:xfrm>
-            <a:off x="9290304" y="6035040"/>
-            <a:ext cx="2606040" cy="411480"/>
-          </a:xfrm>
-          <a:prstGeom prst="rect">
-            <a:avLst/>
-          </a:prstGeom>
-          <a:noFill/>
-        </p:spPr>
-        <p:txBody>
-          <a:bodyPr wrap="square">
-            <a:spAutoFit/>
-          </a:bodyPr>
-          <a:lstStyle/>
-          <a:p>
-            <a:pPr algn="l"/>
-            <a:r>
-              <a:rPr sz="900" b="0" i="0">
-                <a:solidFill>
-                  <a:srgbClr val="BBCCDD"/>
-                </a:solidFill>
-                <a:latin typeface="Segoe UI"/>
-              </a:rPr>
-              <a:t>Expansion sous-régionale · Levée de fonds Série A</a:t>
+              <a:rPr sz="1000" b="0" i="0" dirty="0">
+                <a:solidFill>
+                  <a:srgbClr val="8E99B0"/>
+                </a:solidFill>
+                <a:latin typeface="Segoe UI"/>
+              </a:rPr>
+              <a:t>YEFA TECHNOLOGIE, </a:t>
+            </a:r>
+            <a:r>
+              <a:rPr lang="fr-CI" sz="1000" dirty="0">
+                <a:solidFill>
+                  <a:srgbClr val="8E99B0"/>
+                </a:solidFill>
+                <a:latin typeface="Segoe UI"/>
+              </a:rPr>
+              <a:t>Entreprise</a:t>
+            </a:r>
+            <a:r>
+              <a:rPr sz="1000" b="0" i="0" dirty="0">
+                <a:solidFill>
+                  <a:srgbClr val="8E99B0"/>
+                </a:solidFill>
+                <a:latin typeface="Segoe UI"/>
+              </a:rPr>
+              <a:t> </a:t>
+            </a:r>
+            <a:r>
+              <a:rPr sz="1000" b="0" i="0" dirty="0" err="1">
+                <a:solidFill>
+                  <a:srgbClr val="8E99B0"/>
+                </a:solidFill>
+                <a:latin typeface="Segoe UI"/>
+              </a:rPr>
+              <a:t>spécialisé</a:t>
+            </a:r>
+            <a:r>
+              <a:rPr lang="fr-CI" sz="1000" b="0" i="0" dirty="0">
+                <a:solidFill>
+                  <a:srgbClr val="8E99B0"/>
+                </a:solidFill>
+                <a:latin typeface="Segoe UI"/>
+              </a:rPr>
+              <a:t>e</a:t>
+            </a:r>
+            <a:r>
+              <a:rPr sz="1000" b="0" i="0" dirty="0">
+                <a:solidFill>
+                  <a:srgbClr val="8E99B0"/>
+                </a:solidFill>
+                <a:latin typeface="Segoe UI"/>
+              </a:rPr>
+              <a:t> </a:t>
+            </a:r>
+            <a:r>
+              <a:rPr sz="1000" b="0" i="0" dirty="0" err="1">
+                <a:solidFill>
+                  <a:srgbClr val="8E99B0"/>
+                </a:solidFill>
+                <a:latin typeface="Segoe UI"/>
+              </a:rPr>
+              <a:t>en</a:t>
+            </a:r>
+            <a:r>
+              <a:rPr sz="1000" b="0" i="0" dirty="0">
+                <a:solidFill>
+                  <a:srgbClr val="8E99B0"/>
+                </a:solidFill>
+                <a:latin typeface="Segoe UI"/>
+              </a:rPr>
+              <a:t> solutions </a:t>
+            </a:r>
+            <a:r>
+              <a:rPr sz="1000" b="0" i="0" dirty="0" err="1">
+                <a:solidFill>
+                  <a:srgbClr val="8E99B0"/>
+                </a:solidFill>
+                <a:latin typeface="Segoe UI"/>
+              </a:rPr>
+              <a:t>digitales</a:t>
+            </a:r>
+            <a:r>
+              <a:rPr sz="1000" b="0" i="0" dirty="0">
+                <a:solidFill>
+                  <a:srgbClr val="8E99B0"/>
+                </a:solidFill>
+                <a:latin typeface="Segoe UI"/>
+              </a:rPr>
+              <a:t> pour </a:t>
+            </a:r>
+            <a:r>
+              <a:rPr sz="1000" b="0" i="0" dirty="0" err="1">
+                <a:solidFill>
+                  <a:srgbClr val="8E99B0"/>
+                </a:solidFill>
+                <a:latin typeface="Segoe UI"/>
+              </a:rPr>
+              <a:t>l'Afrique</a:t>
+            </a:r>
+            <a:r>
+              <a:rPr sz="1000" b="0" i="0" dirty="0">
+                <a:solidFill>
+                  <a:srgbClr val="8E99B0"/>
+                </a:solidFill>
+                <a:latin typeface="Segoe UI"/>
+              </a:rPr>
+              <a:t> avec expertise mobile et backend.</a:t>
             </a:r>
           </a:p>
         </p:txBody>
@@ -7964,1706 +8608,6 @@
             <a:avLst/>
           </a:prstGeom>
           <a:solidFill>
-            <a:srgbClr val="F5F6FA"/>
-          </a:solidFill>
-          <a:ln>
-            <a:noFill/>
-          </a:ln>
-        </p:spPr>
-        <p:style>
-          <a:lnRef idx="1">
-            <a:schemeClr val="accent1"/>
-          </a:lnRef>
-          <a:fillRef idx="3">
-            <a:schemeClr val="accent1"/>
-          </a:fillRef>
-          <a:effectRef idx="2">
-            <a:schemeClr val="accent1"/>
-          </a:effectRef>
-          <a:fontRef idx="minor">
-            <a:schemeClr val="lt1"/>
-          </a:fontRef>
-        </p:style>
-        <p:txBody>
-          <a:bodyPr rtlCol="0" anchor="ctr"/>
-          <a:lstStyle/>
-          <a:p>
-            <a:pPr algn="ctr"/>
-            <a:endParaRPr/>
-          </a:p>
-        </p:txBody>
-      </p:sp>
-      <p:sp>
-        <p:nvSpPr>
-          <p:cNvPr id="3" name="Rectangle 2"/>
-          <p:cNvSpPr/>
-          <p:nvPr/>
-        </p:nvSpPr>
-        <p:spPr>
-          <a:xfrm>
-            <a:off x="0" y="0"/>
-            <a:ext cx="12188952" cy="1371600"/>
-          </a:xfrm>
-          <a:prstGeom prst="rect">
-            <a:avLst/>
-          </a:prstGeom>
-          <a:solidFill>
-            <a:srgbClr val="1C2340"/>
-          </a:solidFill>
-          <a:ln>
-            <a:noFill/>
-          </a:ln>
-        </p:spPr>
-        <p:style>
-          <a:lnRef idx="1">
-            <a:schemeClr val="accent1"/>
-          </a:lnRef>
-          <a:fillRef idx="3">
-            <a:schemeClr val="accent1"/>
-          </a:fillRef>
-          <a:effectRef idx="2">
-            <a:schemeClr val="accent1"/>
-          </a:effectRef>
-          <a:fontRef idx="minor">
-            <a:schemeClr val="lt1"/>
-          </a:fontRef>
-        </p:style>
-        <p:txBody>
-          <a:bodyPr rtlCol="0" anchor="ctr"/>
-          <a:lstStyle/>
-          <a:p>
-            <a:pPr algn="ctr"/>
-            <a:endParaRPr/>
-          </a:p>
-        </p:txBody>
-      </p:sp>
-      <p:sp>
-        <p:nvSpPr>
-          <p:cNvPr id="4" name="Rectangle 3"/>
-          <p:cNvSpPr/>
-          <p:nvPr/>
-        </p:nvSpPr>
-        <p:spPr>
-          <a:xfrm>
-            <a:off x="0" y="0"/>
-            <a:ext cx="109728" cy="6858000"/>
-          </a:xfrm>
-          <a:prstGeom prst="rect">
-            <a:avLst/>
-          </a:prstGeom>
-          <a:solidFill>
-            <a:srgbClr val="E8620A"/>
-          </a:solidFill>
-          <a:ln>
-            <a:noFill/>
-          </a:ln>
-        </p:spPr>
-        <p:style>
-          <a:lnRef idx="1">
-            <a:schemeClr val="accent1"/>
-          </a:lnRef>
-          <a:fillRef idx="3">
-            <a:schemeClr val="accent1"/>
-          </a:fillRef>
-          <a:effectRef idx="2">
-            <a:schemeClr val="accent1"/>
-          </a:effectRef>
-          <a:fontRef idx="minor">
-            <a:schemeClr val="lt1"/>
-          </a:fontRef>
-        </p:style>
-        <p:txBody>
-          <a:bodyPr rtlCol="0" anchor="ctr"/>
-          <a:lstStyle/>
-          <a:p>
-            <a:pPr algn="ctr"/>
-            <a:endParaRPr/>
-          </a:p>
-        </p:txBody>
-      </p:sp>
-      <p:sp>
-        <p:nvSpPr>
-          <p:cNvPr id="5" name="TextBox 4"/>
-          <p:cNvSpPr txBox="1"/>
-          <p:nvPr/>
-        </p:nvSpPr>
-        <p:spPr>
-          <a:xfrm>
-            <a:off x="274320" y="201168"/>
-            <a:ext cx="7315200" cy="320040"/>
-          </a:xfrm>
-          <a:prstGeom prst="rect">
-            <a:avLst/>
-          </a:prstGeom>
-          <a:noFill/>
-        </p:spPr>
-        <p:txBody>
-          <a:bodyPr wrap="square">
-            <a:spAutoFit/>
-          </a:bodyPr>
-          <a:lstStyle/>
-          <a:p>
-            <a:pPr algn="l"/>
-            <a:r>
-              <a:rPr sz="1000" b="1" i="0">
-                <a:solidFill>
-                  <a:srgbClr val="E8620A"/>
-                </a:solidFill>
-                <a:latin typeface="Segoe UI"/>
-              </a:rPr>
-              <a:t>POURQUOI INVESTIR</a:t>
-            </a:r>
-          </a:p>
-        </p:txBody>
-      </p:sp>
-      <p:sp>
-        <p:nvSpPr>
-          <p:cNvPr id="6" name="TextBox 5"/>
-          <p:cNvSpPr txBox="1"/>
-          <p:nvPr/>
-        </p:nvSpPr>
-        <p:spPr>
-          <a:xfrm>
-            <a:off x="274320" y="502920"/>
-            <a:ext cx="8229600" cy="685800"/>
-          </a:xfrm>
-          <a:prstGeom prst="rect">
-            <a:avLst/>
-          </a:prstGeom>
-          <a:noFill/>
-        </p:spPr>
-        <p:txBody>
-          <a:bodyPr wrap="square">
-            <a:spAutoFit/>
-          </a:bodyPr>
-          <a:lstStyle/>
-          <a:p>
-            <a:pPr algn="l"/>
-            <a:r>
-              <a:rPr sz="2600" b="1" i="0">
-                <a:solidFill>
-                  <a:srgbClr val="FFFFFF"/>
-                </a:solidFill>
-                <a:latin typeface="Segoe UI"/>
-              </a:rPr>
-              <a:t>5 raisons de rejoindre l'aventure</a:t>
-            </a:r>
-          </a:p>
-        </p:txBody>
-      </p:sp>
-      <p:sp>
-        <p:nvSpPr>
-          <p:cNvPr id="7" name="Rectangle 6"/>
-          <p:cNvSpPr/>
-          <p:nvPr/>
-        </p:nvSpPr>
-        <p:spPr>
-          <a:xfrm>
-            <a:off x="274320" y="1554480"/>
-            <a:ext cx="5486400" cy="1188720"/>
-          </a:xfrm>
-          <a:prstGeom prst="rect">
-            <a:avLst/>
-          </a:prstGeom>
-          <a:solidFill>
-            <a:srgbClr val="FFFFFF"/>
-          </a:solidFill>
-          <a:ln>
-            <a:noFill/>
-          </a:ln>
-        </p:spPr>
-        <p:style>
-          <a:lnRef idx="1">
-            <a:schemeClr val="accent1"/>
-          </a:lnRef>
-          <a:fillRef idx="3">
-            <a:schemeClr val="accent1"/>
-          </a:fillRef>
-          <a:effectRef idx="2">
-            <a:schemeClr val="accent1"/>
-          </a:effectRef>
-          <a:fontRef idx="minor">
-            <a:schemeClr val="lt1"/>
-          </a:fontRef>
-        </p:style>
-        <p:txBody>
-          <a:bodyPr rtlCol="0" anchor="ctr"/>
-          <a:lstStyle/>
-          <a:p>
-            <a:pPr algn="ctr"/>
-            <a:endParaRPr/>
-          </a:p>
-        </p:txBody>
-      </p:sp>
-      <p:sp>
-        <p:nvSpPr>
-          <p:cNvPr id="8" name="Rectangle 7"/>
-          <p:cNvSpPr/>
-          <p:nvPr/>
-        </p:nvSpPr>
-        <p:spPr>
-          <a:xfrm>
-            <a:off x="274320" y="1554480"/>
-            <a:ext cx="73152" cy="1188720"/>
-          </a:xfrm>
-          <a:prstGeom prst="rect">
-            <a:avLst/>
-          </a:prstGeom>
-          <a:solidFill>
-            <a:srgbClr val="E8620A"/>
-          </a:solidFill>
-          <a:ln>
-            <a:noFill/>
-          </a:ln>
-        </p:spPr>
-        <p:style>
-          <a:lnRef idx="1">
-            <a:schemeClr val="accent1"/>
-          </a:lnRef>
-          <a:fillRef idx="3">
-            <a:schemeClr val="accent1"/>
-          </a:fillRef>
-          <a:effectRef idx="2">
-            <a:schemeClr val="accent1"/>
-          </a:effectRef>
-          <a:fontRef idx="minor">
-            <a:schemeClr val="lt1"/>
-          </a:fontRef>
-        </p:style>
-        <p:txBody>
-          <a:bodyPr rtlCol="0" anchor="ctr"/>
-          <a:lstStyle/>
-          <a:p>
-            <a:pPr algn="ctr"/>
-            <a:endParaRPr/>
-          </a:p>
-        </p:txBody>
-      </p:sp>
-      <p:sp>
-        <p:nvSpPr>
-          <p:cNvPr id="9" name="TextBox 8"/>
-          <p:cNvSpPr txBox="1"/>
-          <p:nvPr/>
-        </p:nvSpPr>
-        <p:spPr>
-          <a:xfrm>
-            <a:off x="457200" y="1645920"/>
-            <a:ext cx="548640" cy="548640"/>
-          </a:xfrm>
-          <a:prstGeom prst="rect">
-            <a:avLst/>
-          </a:prstGeom>
-          <a:noFill/>
-        </p:spPr>
-        <p:txBody>
-          <a:bodyPr wrap="square">
-            <a:spAutoFit/>
-          </a:bodyPr>
-          <a:lstStyle/>
-          <a:p>
-            <a:pPr algn="l"/>
-            <a:r>
-              <a:rPr sz="2400" b="0" i="0">
-                <a:solidFill>
-                  <a:srgbClr val="1C2340"/>
-                </a:solidFill>
-                <a:latin typeface="Segoe UI"/>
-              </a:rPr>
-              <a:t>🚀</a:t>
-            </a:r>
-          </a:p>
-        </p:txBody>
-      </p:sp>
-      <p:sp>
-        <p:nvSpPr>
-          <p:cNvPr id="10" name="TextBox 9"/>
-          <p:cNvSpPr txBox="1"/>
-          <p:nvPr/>
-        </p:nvSpPr>
-        <p:spPr>
-          <a:xfrm>
-            <a:off x="1143000" y="1645920"/>
-            <a:ext cx="4389120" cy="347472"/>
-          </a:xfrm>
-          <a:prstGeom prst="rect">
-            <a:avLst/>
-          </a:prstGeom>
-          <a:noFill/>
-        </p:spPr>
-        <p:txBody>
-          <a:bodyPr wrap="square">
-            <a:spAutoFit/>
-          </a:bodyPr>
-          <a:lstStyle/>
-          <a:p>
-            <a:pPr algn="l"/>
-            <a:r>
-              <a:rPr sz="1300" b="1" i="0">
-                <a:solidFill>
-                  <a:srgbClr val="1C2340"/>
-                </a:solidFill>
-                <a:latin typeface="Segoe UI"/>
-              </a:rPr>
-              <a:t>Produit déjà fonctionnel</a:t>
-            </a:r>
-          </a:p>
-        </p:txBody>
-      </p:sp>
-      <p:sp>
-        <p:nvSpPr>
-          <p:cNvPr id="11" name="TextBox 10"/>
-          <p:cNvSpPr txBox="1"/>
-          <p:nvPr/>
-        </p:nvSpPr>
-        <p:spPr>
-          <a:xfrm>
-            <a:off x="1143000" y="2011680"/>
-            <a:ext cx="4389120" cy="400110"/>
-          </a:xfrm>
-          <a:prstGeom prst="rect">
-            <a:avLst/>
-          </a:prstGeom>
-          <a:noFill/>
-        </p:spPr>
-        <p:txBody>
-          <a:bodyPr wrap="square">
-            <a:spAutoFit/>
-          </a:bodyPr>
-          <a:lstStyle/>
-          <a:p>
-            <a:pPr algn="l"/>
-            <a:r>
-              <a:rPr sz="1000" b="0" i="0" dirty="0">
-                <a:solidFill>
-                  <a:srgbClr val="8E99B0"/>
-                </a:solidFill>
-                <a:latin typeface="Segoe UI"/>
-              </a:rPr>
-              <a:t>MVP </a:t>
-            </a:r>
-            <a:r>
-              <a:rPr sz="1000" b="0" i="0" dirty="0" err="1">
-                <a:solidFill>
-                  <a:srgbClr val="8E99B0"/>
-                </a:solidFill>
-                <a:latin typeface="Segoe UI"/>
-              </a:rPr>
-              <a:t>en</a:t>
-            </a:r>
-            <a:r>
-              <a:rPr sz="1000" b="0" i="0" dirty="0">
-                <a:solidFill>
-                  <a:srgbClr val="8E99B0"/>
-                </a:solidFill>
-                <a:latin typeface="Segoe UI"/>
-              </a:rPr>
-              <a:t> production avec backend </a:t>
-            </a:r>
-            <a:r>
-              <a:rPr sz="1000" b="0" i="0" dirty="0" err="1">
-                <a:solidFill>
-                  <a:srgbClr val="8E99B0"/>
-                </a:solidFill>
-                <a:latin typeface="Segoe UI"/>
-              </a:rPr>
-              <a:t>réel</a:t>
-            </a:r>
-            <a:r>
-              <a:rPr sz="1000" b="0" i="0" dirty="0">
-                <a:solidFill>
-                  <a:srgbClr val="8E99B0"/>
-                </a:solidFill>
-                <a:latin typeface="Segoe UI"/>
-              </a:rPr>
-              <a:t>, 3 124 </a:t>
-            </a:r>
-            <a:r>
-              <a:rPr sz="1000" b="0" i="0" dirty="0" err="1">
-                <a:solidFill>
-                  <a:srgbClr val="8E99B0"/>
-                </a:solidFill>
-                <a:latin typeface="Segoe UI"/>
-              </a:rPr>
-              <a:t>centres</a:t>
-            </a:r>
-            <a:r>
-              <a:rPr sz="1000" b="0" i="0" dirty="0">
-                <a:solidFill>
-                  <a:srgbClr val="8E99B0"/>
-                </a:solidFill>
-                <a:latin typeface="Segoe UI"/>
-              </a:rPr>
-              <a:t>, 6 modules </a:t>
-            </a:r>
-            <a:r>
-              <a:rPr sz="1000" b="0" i="0" dirty="0" err="1">
-                <a:solidFill>
-                  <a:srgbClr val="8E99B0"/>
-                </a:solidFill>
-                <a:latin typeface="Segoe UI"/>
-              </a:rPr>
-              <a:t>actifs</a:t>
-            </a:r>
-            <a:r>
-              <a:rPr sz="1000" b="0" i="0" dirty="0">
-                <a:solidFill>
-                  <a:srgbClr val="8E99B0"/>
-                </a:solidFill>
-                <a:latin typeface="Segoe UI"/>
-              </a:rPr>
-              <a:t>. Pas un concept </a:t>
-            </a:r>
-            <a:r>
-              <a:rPr lang="fr-CI" sz="1000" b="0" i="0" dirty="0">
-                <a:solidFill>
-                  <a:srgbClr val="8E99B0"/>
-                </a:solidFill>
-                <a:latin typeface="Segoe UI"/>
-              </a:rPr>
-              <a:t>-</a:t>
-            </a:r>
-            <a:r>
-              <a:rPr sz="1000" b="0" i="0" dirty="0">
-                <a:solidFill>
-                  <a:srgbClr val="8E99B0"/>
-                </a:solidFill>
-                <a:latin typeface="Segoe UI"/>
-              </a:rPr>
-              <a:t> </a:t>
-            </a:r>
-            <a:r>
-              <a:rPr sz="1000" b="0" i="0" dirty="0" err="1">
-                <a:solidFill>
-                  <a:srgbClr val="8E99B0"/>
-                </a:solidFill>
-                <a:latin typeface="Segoe UI"/>
-              </a:rPr>
-              <a:t>une</a:t>
-            </a:r>
-            <a:r>
-              <a:rPr sz="1000" b="0" i="0" dirty="0">
-                <a:solidFill>
-                  <a:srgbClr val="8E99B0"/>
-                </a:solidFill>
-                <a:latin typeface="Segoe UI"/>
-              </a:rPr>
-              <a:t> </a:t>
-            </a:r>
-            <a:r>
-              <a:rPr sz="1000" b="0" i="0" dirty="0" err="1">
-                <a:solidFill>
-                  <a:srgbClr val="8E99B0"/>
-                </a:solidFill>
-                <a:latin typeface="Segoe UI"/>
-              </a:rPr>
-              <a:t>réalité</a:t>
-            </a:r>
-            <a:r>
-              <a:rPr sz="1000" b="0" i="0" dirty="0">
-                <a:solidFill>
-                  <a:srgbClr val="8E99B0"/>
-                </a:solidFill>
-                <a:latin typeface="Segoe UI"/>
-              </a:rPr>
-              <a:t> testable </a:t>
-            </a:r>
-            <a:r>
-              <a:rPr sz="1000" b="0" i="0" dirty="0" err="1">
-                <a:solidFill>
-                  <a:srgbClr val="8E99B0"/>
-                </a:solidFill>
-                <a:latin typeface="Segoe UI"/>
-              </a:rPr>
-              <a:t>dès</a:t>
-            </a:r>
-            <a:r>
-              <a:rPr sz="1000" b="0" i="0" dirty="0">
-                <a:solidFill>
-                  <a:srgbClr val="8E99B0"/>
-                </a:solidFill>
-                <a:latin typeface="Segoe UI"/>
-              </a:rPr>
-              <a:t> </a:t>
-            </a:r>
-            <a:r>
-              <a:rPr sz="1000" b="0" i="0" dirty="0" err="1">
-                <a:solidFill>
-                  <a:srgbClr val="8E99B0"/>
-                </a:solidFill>
-                <a:latin typeface="Segoe UI"/>
-              </a:rPr>
-              <a:t>aujourd'hui</a:t>
-            </a:r>
-            <a:r>
-              <a:rPr sz="1000" b="0" i="0" dirty="0">
-                <a:solidFill>
-                  <a:srgbClr val="8E99B0"/>
-                </a:solidFill>
-                <a:latin typeface="Segoe UI"/>
-              </a:rPr>
-              <a:t>.</a:t>
-            </a:r>
-          </a:p>
-        </p:txBody>
-      </p:sp>
-      <p:sp>
-        <p:nvSpPr>
-          <p:cNvPr id="12" name="Rectangle 11"/>
-          <p:cNvSpPr/>
-          <p:nvPr/>
-        </p:nvSpPr>
-        <p:spPr>
-          <a:xfrm>
-            <a:off x="6035040" y="1554480"/>
-            <a:ext cx="5486400" cy="1188720"/>
-          </a:xfrm>
-          <a:prstGeom prst="rect">
-            <a:avLst/>
-          </a:prstGeom>
-          <a:solidFill>
-            <a:srgbClr val="FFFFFF"/>
-          </a:solidFill>
-          <a:ln>
-            <a:noFill/>
-          </a:ln>
-        </p:spPr>
-        <p:style>
-          <a:lnRef idx="1">
-            <a:schemeClr val="accent1"/>
-          </a:lnRef>
-          <a:fillRef idx="3">
-            <a:schemeClr val="accent1"/>
-          </a:fillRef>
-          <a:effectRef idx="2">
-            <a:schemeClr val="accent1"/>
-          </a:effectRef>
-          <a:fontRef idx="minor">
-            <a:schemeClr val="lt1"/>
-          </a:fontRef>
-        </p:style>
-        <p:txBody>
-          <a:bodyPr rtlCol="0" anchor="ctr"/>
-          <a:lstStyle/>
-          <a:p>
-            <a:pPr algn="ctr"/>
-            <a:endParaRPr/>
-          </a:p>
-        </p:txBody>
-      </p:sp>
-      <p:sp>
-        <p:nvSpPr>
-          <p:cNvPr id="13" name="Rectangle 12"/>
-          <p:cNvSpPr/>
-          <p:nvPr/>
-        </p:nvSpPr>
-        <p:spPr>
-          <a:xfrm>
-            <a:off x="6035040" y="1554480"/>
-            <a:ext cx="73152" cy="1188720"/>
-          </a:xfrm>
-          <a:prstGeom prst="rect">
-            <a:avLst/>
-          </a:prstGeom>
-          <a:solidFill>
-            <a:srgbClr val="E8620A"/>
-          </a:solidFill>
-          <a:ln>
-            <a:noFill/>
-          </a:ln>
-        </p:spPr>
-        <p:style>
-          <a:lnRef idx="1">
-            <a:schemeClr val="accent1"/>
-          </a:lnRef>
-          <a:fillRef idx="3">
-            <a:schemeClr val="accent1"/>
-          </a:fillRef>
-          <a:effectRef idx="2">
-            <a:schemeClr val="accent1"/>
-          </a:effectRef>
-          <a:fontRef idx="minor">
-            <a:schemeClr val="lt1"/>
-          </a:fontRef>
-        </p:style>
-        <p:txBody>
-          <a:bodyPr rtlCol="0" anchor="ctr"/>
-          <a:lstStyle/>
-          <a:p>
-            <a:pPr algn="ctr"/>
-            <a:endParaRPr/>
-          </a:p>
-        </p:txBody>
-      </p:sp>
-      <p:sp>
-        <p:nvSpPr>
-          <p:cNvPr id="14" name="TextBox 13"/>
-          <p:cNvSpPr txBox="1"/>
-          <p:nvPr/>
-        </p:nvSpPr>
-        <p:spPr>
-          <a:xfrm>
-            <a:off x="6217920" y="1645920"/>
-            <a:ext cx="548640" cy="548640"/>
-          </a:xfrm>
-          <a:prstGeom prst="rect">
-            <a:avLst/>
-          </a:prstGeom>
-          <a:noFill/>
-        </p:spPr>
-        <p:txBody>
-          <a:bodyPr wrap="square">
-            <a:spAutoFit/>
-          </a:bodyPr>
-          <a:lstStyle/>
-          <a:p>
-            <a:pPr algn="l"/>
-            <a:r>
-              <a:rPr sz="2400" b="0" i="0">
-                <a:solidFill>
-                  <a:srgbClr val="1C2340"/>
-                </a:solidFill>
-                <a:latin typeface="Segoe UI"/>
-              </a:rPr>
-              <a:t>🌍</a:t>
-            </a:r>
-          </a:p>
-        </p:txBody>
-      </p:sp>
-      <p:sp>
-        <p:nvSpPr>
-          <p:cNvPr id="15" name="TextBox 14"/>
-          <p:cNvSpPr txBox="1"/>
-          <p:nvPr/>
-        </p:nvSpPr>
-        <p:spPr>
-          <a:xfrm>
-            <a:off x="6903720" y="1645920"/>
-            <a:ext cx="4389120" cy="347472"/>
-          </a:xfrm>
-          <a:prstGeom prst="rect">
-            <a:avLst/>
-          </a:prstGeom>
-          <a:noFill/>
-        </p:spPr>
-        <p:txBody>
-          <a:bodyPr wrap="square">
-            <a:spAutoFit/>
-          </a:bodyPr>
-          <a:lstStyle/>
-          <a:p>
-            <a:pPr algn="l"/>
-            <a:r>
-              <a:rPr sz="1300" b="1" i="0">
-                <a:solidFill>
-                  <a:srgbClr val="1C2340"/>
-                </a:solidFill>
-                <a:latin typeface="Segoe UI"/>
-              </a:rPr>
-              <a:t>Marché sous-digitalisé</a:t>
-            </a:r>
-          </a:p>
-        </p:txBody>
-      </p:sp>
-      <p:sp>
-        <p:nvSpPr>
-          <p:cNvPr id="16" name="TextBox 15"/>
-          <p:cNvSpPr txBox="1"/>
-          <p:nvPr/>
-        </p:nvSpPr>
-        <p:spPr>
-          <a:xfrm>
-            <a:off x="6903720" y="2011680"/>
-            <a:ext cx="4389120" cy="640080"/>
-          </a:xfrm>
-          <a:prstGeom prst="rect">
-            <a:avLst/>
-          </a:prstGeom>
-          <a:noFill/>
-        </p:spPr>
-        <p:txBody>
-          <a:bodyPr wrap="square">
-            <a:spAutoFit/>
-          </a:bodyPr>
-          <a:lstStyle/>
-          <a:p>
-            <a:pPr algn="l"/>
-            <a:r>
-              <a:rPr sz="1000" b="0" i="0">
-                <a:solidFill>
-                  <a:srgbClr val="8E99B0"/>
-                </a:solidFill>
-                <a:latin typeface="Segoe UI"/>
-              </a:rPr>
-              <a:t>L'Afrique subsaharienne a besoin de solutions locales, adaptées au contexte réseau, au multilinguisme et aux usages mobiles-first.</a:t>
-            </a:r>
-          </a:p>
-        </p:txBody>
-      </p:sp>
-      <p:sp>
-        <p:nvSpPr>
-          <p:cNvPr id="17" name="Rectangle 16"/>
-          <p:cNvSpPr/>
-          <p:nvPr/>
-        </p:nvSpPr>
-        <p:spPr>
-          <a:xfrm>
-            <a:off x="274320" y="2880360"/>
-            <a:ext cx="5486400" cy="1188720"/>
-          </a:xfrm>
-          <a:prstGeom prst="rect">
-            <a:avLst/>
-          </a:prstGeom>
-          <a:solidFill>
-            <a:srgbClr val="FFFFFF"/>
-          </a:solidFill>
-          <a:ln>
-            <a:noFill/>
-          </a:ln>
-        </p:spPr>
-        <p:style>
-          <a:lnRef idx="1">
-            <a:schemeClr val="accent1"/>
-          </a:lnRef>
-          <a:fillRef idx="3">
-            <a:schemeClr val="accent1"/>
-          </a:fillRef>
-          <a:effectRef idx="2">
-            <a:schemeClr val="accent1"/>
-          </a:effectRef>
-          <a:fontRef idx="minor">
-            <a:schemeClr val="lt1"/>
-          </a:fontRef>
-        </p:style>
-        <p:txBody>
-          <a:bodyPr rtlCol="0" anchor="ctr"/>
-          <a:lstStyle/>
-          <a:p>
-            <a:pPr algn="ctr"/>
-            <a:endParaRPr/>
-          </a:p>
-        </p:txBody>
-      </p:sp>
-      <p:sp>
-        <p:nvSpPr>
-          <p:cNvPr id="18" name="Rectangle 17"/>
-          <p:cNvSpPr/>
-          <p:nvPr/>
-        </p:nvSpPr>
-        <p:spPr>
-          <a:xfrm>
-            <a:off x="274320" y="2880360"/>
-            <a:ext cx="73152" cy="1188720"/>
-          </a:xfrm>
-          <a:prstGeom prst="rect">
-            <a:avLst/>
-          </a:prstGeom>
-          <a:solidFill>
-            <a:srgbClr val="E8620A"/>
-          </a:solidFill>
-          <a:ln>
-            <a:noFill/>
-          </a:ln>
-        </p:spPr>
-        <p:style>
-          <a:lnRef idx="1">
-            <a:schemeClr val="accent1"/>
-          </a:lnRef>
-          <a:fillRef idx="3">
-            <a:schemeClr val="accent1"/>
-          </a:fillRef>
-          <a:effectRef idx="2">
-            <a:schemeClr val="accent1"/>
-          </a:effectRef>
-          <a:fontRef idx="minor">
-            <a:schemeClr val="lt1"/>
-          </a:fontRef>
-        </p:style>
-        <p:txBody>
-          <a:bodyPr rtlCol="0" anchor="ctr"/>
-          <a:lstStyle/>
-          <a:p>
-            <a:pPr algn="ctr"/>
-            <a:endParaRPr/>
-          </a:p>
-        </p:txBody>
-      </p:sp>
-      <p:sp>
-        <p:nvSpPr>
-          <p:cNvPr id="19" name="TextBox 18"/>
-          <p:cNvSpPr txBox="1"/>
-          <p:nvPr/>
-        </p:nvSpPr>
-        <p:spPr>
-          <a:xfrm>
-            <a:off x="457200" y="2971800"/>
-            <a:ext cx="548640" cy="548640"/>
-          </a:xfrm>
-          <a:prstGeom prst="rect">
-            <a:avLst/>
-          </a:prstGeom>
-          <a:noFill/>
-        </p:spPr>
-        <p:txBody>
-          <a:bodyPr wrap="square">
-            <a:spAutoFit/>
-          </a:bodyPr>
-          <a:lstStyle/>
-          <a:p>
-            <a:pPr algn="l"/>
-            <a:r>
-              <a:rPr sz="2400" b="0" i="0">
-                <a:solidFill>
-                  <a:srgbClr val="1C2340"/>
-                </a:solidFill>
-                <a:latin typeface="Segoe UI"/>
-              </a:rPr>
-              <a:t>🔒</a:t>
-            </a:r>
-          </a:p>
-        </p:txBody>
-      </p:sp>
-      <p:sp>
-        <p:nvSpPr>
-          <p:cNvPr id="20" name="TextBox 19"/>
-          <p:cNvSpPr txBox="1"/>
-          <p:nvPr/>
-        </p:nvSpPr>
-        <p:spPr>
-          <a:xfrm>
-            <a:off x="1143000" y="2971800"/>
-            <a:ext cx="4389120" cy="347472"/>
-          </a:xfrm>
-          <a:prstGeom prst="rect">
-            <a:avLst/>
-          </a:prstGeom>
-          <a:noFill/>
-        </p:spPr>
-        <p:txBody>
-          <a:bodyPr wrap="square">
-            <a:spAutoFit/>
-          </a:bodyPr>
-          <a:lstStyle/>
-          <a:p>
-            <a:pPr algn="l"/>
-            <a:r>
-              <a:rPr sz="1300" b="1" i="0">
-                <a:solidFill>
-                  <a:srgbClr val="1C2340"/>
-                </a:solidFill>
-                <a:latin typeface="Segoe UI"/>
-              </a:rPr>
-              <a:t>Barrières à l'entrée solides</a:t>
-            </a:r>
-          </a:p>
-        </p:txBody>
-      </p:sp>
-      <p:sp>
-        <p:nvSpPr>
-          <p:cNvPr id="21" name="TextBox 20"/>
-          <p:cNvSpPr txBox="1"/>
-          <p:nvPr/>
-        </p:nvSpPr>
-        <p:spPr>
-          <a:xfrm>
-            <a:off x="1143000" y="3337560"/>
-            <a:ext cx="4389120" cy="400110"/>
-          </a:xfrm>
-          <a:prstGeom prst="rect">
-            <a:avLst/>
-          </a:prstGeom>
-          <a:noFill/>
-        </p:spPr>
-        <p:txBody>
-          <a:bodyPr wrap="square">
-            <a:spAutoFit/>
-          </a:bodyPr>
-          <a:lstStyle/>
-          <a:p>
-            <a:pPr algn="l"/>
-            <a:r>
-              <a:rPr sz="1000" b="0" i="0" dirty="0" err="1">
-                <a:solidFill>
-                  <a:srgbClr val="8E99B0"/>
-                </a:solidFill>
-                <a:latin typeface="Segoe UI"/>
-              </a:rPr>
-              <a:t>Données</a:t>
-            </a:r>
-            <a:r>
-              <a:rPr sz="1000" b="0" i="0" dirty="0">
-                <a:solidFill>
-                  <a:srgbClr val="8E99B0"/>
-                </a:solidFill>
-                <a:latin typeface="Segoe UI"/>
-              </a:rPr>
-              <a:t> </a:t>
-            </a:r>
-            <a:r>
-              <a:rPr sz="1000" b="0" i="0" dirty="0" err="1">
-                <a:solidFill>
-                  <a:srgbClr val="8E99B0"/>
-                </a:solidFill>
-                <a:latin typeface="Segoe UI"/>
-              </a:rPr>
-              <a:t>géolocalisées</a:t>
-            </a:r>
-            <a:r>
-              <a:rPr sz="1000" b="0" i="0" dirty="0">
-                <a:solidFill>
-                  <a:srgbClr val="8E99B0"/>
-                </a:solidFill>
-                <a:latin typeface="Segoe UI"/>
-              </a:rPr>
-              <a:t> propriétaires, </a:t>
-            </a:r>
-            <a:r>
-              <a:rPr sz="1000" b="0" i="0" dirty="0" err="1">
-                <a:solidFill>
-                  <a:srgbClr val="8E99B0"/>
-                </a:solidFill>
-                <a:latin typeface="Segoe UI"/>
-              </a:rPr>
-              <a:t>réseau</a:t>
-            </a:r>
-            <a:r>
-              <a:rPr sz="1000" b="0" i="0" dirty="0">
-                <a:solidFill>
-                  <a:srgbClr val="8E99B0"/>
-                </a:solidFill>
-                <a:latin typeface="Segoe UI"/>
-              </a:rPr>
-              <a:t> de </a:t>
-            </a:r>
-            <a:r>
-              <a:rPr sz="1000" b="0" i="0" dirty="0" err="1">
-                <a:solidFill>
-                  <a:srgbClr val="8E99B0"/>
-                </a:solidFill>
-                <a:latin typeface="Segoe UI"/>
-              </a:rPr>
-              <a:t>centres</a:t>
-            </a:r>
-            <a:r>
-              <a:rPr sz="1000" b="0" i="0" dirty="0">
-                <a:solidFill>
-                  <a:srgbClr val="8E99B0"/>
-                </a:solidFill>
-                <a:latin typeface="Segoe UI"/>
-              </a:rPr>
-              <a:t> </a:t>
-            </a:r>
-            <a:r>
-              <a:rPr sz="1000" b="0" i="0" dirty="0" err="1">
-                <a:solidFill>
-                  <a:srgbClr val="8E99B0"/>
-                </a:solidFill>
-                <a:latin typeface="Segoe UI"/>
-              </a:rPr>
-              <a:t>référencés</a:t>
-            </a:r>
-            <a:r>
-              <a:rPr sz="1000" b="0" i="0" dirty="0">
-                <a:solidFill>
-                  <a:srgbClr val="8E99B0"/>
-                </a:solidFill>
-                <a:latin typeface="Segoe UI"/>
-              </a:rPr>
-              <a:t>, </a:t>
-            </a:r>
-            <a:r>
-              <a:rPr sz="1000" b="0" i="0" dirty="0" err="1">
-                <a:solidFill>
-                  <a:srgbClr val="8E99B0"/>
-                </a:solidFill>
-                <a:latin typeface="Segoe UI"/>
-              </a:rPr>
-              <a:t>intégrations</a:t>
-            </a:r>
-            <a:r>
-              <a:rPr sz="1000" b="0" i="0" dirty="0">
-                <a:solidFill>
-                  <a:srgbClr val="8E99B0"/>
-                </a:solidFill>
-                <a:latin typeface="Segoe UI"/>
-              </a:rPr>
-              <a:t> services de secours</a:t>
-            </a:r>
-            <a:r>
-              <a:rPr lang="fr-FR" sz="1000" b="0" i="0" dirty="0">
-                <a:solidFill>
-                  <a:srgbClr val="8E99B0"/>
-                </a:solidFill>
-                <a:latin typeface="Segoe UI"/>
-              </a:rPr>
-              <a:t>-</a:t>
-            </a:r>
-            <a:r>
-              <a:rPr sz="1000" b="0" i="0" dirty="0">
-                <a:solidFill>
-                  <a:srgbClr val="8E99B0"/>
-                </a:solidFill>
-                <a:latin typeface="Segoe UI"/>
-              </a:rPr>
-              <a:t>difficile à </a:t>
-            </a:r>
-            <a:r>
-              <a:rPr sz="1000" b="0" i="0" dirty="0" err="1">
-                <a:solidFill>
-                  <a:srgbClr val="8E99B0"/>
-                </a:solidFill>
-                <a:latin typeface="Segoe UI"/>
-              </a:rPr>
-              <a:t>répliquer</a:t>
-            </a:r>
-            <a:r>
-              <a:rPr sz="1000" b="0" i="0" dirty="0">
-                <a:solidFill>
-                  <a:srgbClr val="8E99B0"/>
-                </a:solidFill>
-                <a:latin typeface="Segoe UI"/>
-              </a:rPr>
-              <a:t> </a:t>
-            </a:r>
-            <a:r>
-              <a:rPr sz="1000" b="0" i="0" dirty="0" err="1">
-                <a:solidFill>
-                  <a:srgbClr val="8E99B0"/>
-                </a:solidFill>
-                <a:latin typeface="Segoe UI"/>
-              </a:rPr>
-              <a:t>rapidement</a:t>
-            </a:r>
-            <a:r>
-              <a:rPr sz="1000" b="0" i="0" dirty="0">
-                <a:solidFill>
-                  <a:srgbClr val="8E99B0"/>
-                </a:solidFill>
-                <a:latin typeface="Segoe UI"/>
-              </a:rPr>
-              <a:t>.</a:t>
-            </a:r>
-          </a:p>
-        </p:txBody>
-      </p:sp>
-      <p:sp>
-        <p:nvSpPr>
-          <p:cNvPr id="22" name="Rectangle 21"/>
-          <p:cNvSpPr/>
-          <p:nvPr/>
-        </p:nvSpPr>
-        <p:spPr>
-          <a:xfrm>
-            <a:off x="6035040" y="2880360"/>
-            <a:ext cx="5486400" cy="1188720"/>
-          </a:xfrm>
-          <a:prstGeom prst="rect">
-            <a:avLst/>
-          </a:prstGeom>
-          <a:solidFill>
-            <a:srgbClr val="FFFFFF"/>
-          </a:solidFill>
-          <a:ln>
-            <a:noFill/>
-          </a:ln>
-        </p:spPr>
-        <p:style>
-          <a:lnRef idx="1">
-            <a:schemeClr val="accent1"/>
-          </a:lnRef>
-          <a:fillRef idx="3">
-            <a:schemeClr val="accent1"/>
-          </a:fillRef>
-          <a:effectRef idx="2">
-            <a:schemeClr val="accent1"/>
-          </a:effectRef>
-          <a:fontRef idx="minor">
-            <a:schemeClr val="lt1"/>
-          </a:fontRef>
-        </p:style>
-        <p:txBody>
-          <a:bodyPr rtlCol="0" anchor="ctr"/>
-          <a:lstStyle/>
-          <a:p>
-            <a:pPr algn="ctr"/>
-            <a:endParaRPr/>
-          </a:p>
-        </p:txBody>
-      </p:sp>
-      <p:sp>
-        <p:nvSpPr>
-          <p:cNvPr id="23" name="Rectangle 22"/>
-          <p:cNvSpPr/>
-          <p:nvPr/>
-        </p:nvSpPr>
-        <p:spPr>
-          <a:xfrm>
-            <a:off x="6035040" y="2880360"/>
-            <a:ext cx="73152" cy="1188720"/>
-          </a:xfrm>
-          <a:prstGeom prst="rect">
-            <a:avLst/>
-          </a:prstGeom>
-          <a:solidFill>
-            <a:srgbClr val="E8620A"/>
-          </a:solidFill>
-          <a:ln>
-            <a:noFill/>
-          </a:ln>
-        </p:spPr>
-        <p:style>
-          <a:lnRef idx="1">
-            <a:schemeClr val="accent1"/>
-          </a:lnRef>
-          <a:fillRef idx="3">
-            <a:schemeClr val="accent1"/>
-          </a:fillRef>
-          <a:effectRef idx="2">
-            <a:schemeClr val="accent1"/>
-          </a:effectRef>
-          <a:fontRef idx="minor">
-            <a:schemeClr val="lt1"/>
-          </a:fontRef>
-        </p:style>
-        <p:txBody>
-          <a:bodyPr rtlCol="0" anchor="ctr"/>
-          <a:lstStyle/>
-          <a:p>
-            <a:pPr algn="ctr"/>
-            <a:endParaRPr/>
-          </a:p>
-        </p:txBody>
-      </p:sp>
-      <p:sp>
-        <p:nvSpPr>
-          <p:cNvPr id="24" name="TextBox 23"/>
-          <p:cNvSpPr txBox="1"/>
-          <p:nvPr/>
-        </p:nvSpPr>
-        <p:spPr>
-          <a:xfrm>
-            <a:off x="6217920" y="2971800"/>
-            <a:ext cx="548640" cy="548640"/>
-          </a:xfrm>
-          <a:prstGeom prst="rect">
-            <a:avLst/>
-          </a:prstGeom>
-          <a:noFill/>
-        </p:spPr>
-        <p:txBody>
-          <a:bodyPr wrap="square">
-            <a:spAutoFit/>
-          </a:bodyPr>
-          <a:lstStyle/>
-          <a:p>
-            <a:pPr algn="l"/>
-            <a:r>
-              <a:rPr sz="2400" b="0" i="0">
-                <a:solidFill>
-                  <a:srgbClr val="1C2340"/>
-                </a:solidFill>
-                <a:latin typeface="Segoe UI"/>
-              </a:rPr>
-              <a:t>📈</a:t>
-            </a:r>
-          </a:p>
-        </p:txBody>
-      </p:sp>
-      <p:sp>
-        <p:nvSpPr>
-          <p:cNvPr id="25" name="TextBox 24"/>
-          <p:cNvSpPr txBox="1"/>
-          <p:nvPr/>
-        </p:nvSpPr>
-        <p:spPr>
-          <a:xfrm>
-            <a:off x="6903720" y="2971800"/>
-            <a:ext cx="4389120" cy="347472"/>
-          </a:xfrm>
-          <a:prstGeom prst="rect">
-            <a:avLst/>
-          </a:prstGeom>
-          <a:noFill/>
-        </p:spPr>
-        <p:txBody>
-          <a:bodyPr wrap="square">
-            <a:spAutoFit/>
-          </a:bodyPr>
-          <a:lstStyle/>
-          <a:p>
-            <a:pPr algn="l"/>
-            <a:r>
-              <a:rPr sz="1300" b="1" i="0">
-                <a:solidFill>
-                  <a:srgbClr val="1C2340"/>
-                </a:solidFill>
-                <a:latin typeface="Segoe UI"/>
-              </a:rPr>
-              <a:t>Scalabilité prouvée</a:t>
-            </a:r>
-          </a:p>
-        </p:txBody>
-      </p:sp>
-      <p:sp>
-        <p:nvSpPr>
-          <p:cNvPr id="26" name="TextBox 25"/>
-          <p:cNvSpPr txBox="1"/>
-          <p:nvPr/>
-        </p:nvSpPr>
-        <p:spPr>
-          <a:xfrm>
-            <a:off x="6903720" y="3337560"/>
-            <a:ext cx="4389120" cy="640080"/>
-          </a:xfrm>
-          <a:prstGeom prst="rect">
-            <a:avLst/>
-          </a:prstGeom>
-          <a:noFill/>
-        </p:spPr>
-        <p:txBody>
-          <a:bodyPr wrap="square">
-            <a:spAutoFit/>
-          </a:bodyPr>
-          <a:lstStyle/>
-          <a:p>
-            <a:pPr algn="l"/>
-            <a:r>
-              <a:rPr sz="1000" b="0" i="0">
-                <a:solidFill>
-                  <a:srgbClr val="8E99B0"/>
-                </a:solidFill>
-                <a:latin typeface="Segoe UI"/>
-              </a:rPr>
-              <a:t>Architecture API REST découplée. L'ajout de nouvelles régions ou pays se fait par configuration, sans refonte du code.</a:t>
-            </a:r>
-          </a:p>
-        </p:txBody>
-      </p:sp>
-      <p:sp>
-        <p:nvSpPr>
-          <p:cNvPr id="27" name="Rectangle 26"/>
-          <p:cNvSpPr/>
-          <p:nvPr/>
-        </p:nvSpPr>
-        <p:spPr>
-          <a:xfrm>
-            <a:off x="274320" y="4206240"/>
-            <a:ext cx="5486400" cy="1188720"/>
-          </a:xfrm>
-          <a:prstGeom prst="rect">
-            <a:avLst/>
-          </a:prstGeom>
-          <a:solidFill>
-            <a:srgbClr val="FFFFFF"/>
-          </a:solidFill>
-          <a:ln>
-            <a:noFill/>
-          </a:ln>
-        </p:spPr>
-        <p:style>
-          <a:lnRef idx="1">
-            <a:schemeClr val="accent1"/>
-          </a:lnRef>
-          <a:fillRef idx="3">
-            <a:schemeClr val="accent1"/>
-          </a:fillRef>
-          <a:effectRef idx="2">
-            <a:schemeClr val="accent1"/>
-          </a:effectRef>
-          <a:fontRef idx="minor">
-            <a:schemeClr val="lt1"/>
-          </a:fontRef>
-        </p:style>
-        <p:txBody>
-          <a:bodyPr rtlCol="0" anchor="ctr"/>
-          <a:lstStyle/>
-          <a:p>
-            <a:pPr algn="ctr"/>
-            <a:endParaRPr/>
-          </a:p>
-        </p:txBody>
-      </p:sp>
-      <p:sp>
-        <p:nvSpPr>
-          <p:cNvPr id="28" name="Rectangle 27"/>
-          <p:cNvSpPr/>
-          <p:nvPr/>
-        </p:nvSpPr>
-        <p:spPr>
-          <a:xfrm>
-            <a:off x="274320" y="4206240"/>
-            <a:ext cx="73152" cy="1188720"/>
-          </a:xfrm>
-          <a:prstGeom prst="rect">
-            <a:avLst/>
-          </a:prstGeom>
-          <a:solidFill>
-            <a:srgbClr val="E8620A"/>
-          </a:solidFill>
-          <a:ln>
-            <a:noFill/>
-          </a:ln>
-        </p:spPr>
-        <p:style>
-          <a:lnRef idx="1">
-            <a:schemeClr val="accent1"/>
-          </a:lnRef>
-          <a:fillRef idx="3">
-            <a:schemeClr val="accent1"/>
-          </a:fillRef>
-          <a:effectRef idx="2">
-            <a:schemeClr val="accent1"/>
-          </a:effectRef>
-          <a:fontRef idx="minor">
-            <a:schemeClr val="lt1"/>
-          </a:fontRef>
-        </p:style>
-        <p:txBody>
-          <a:bodyPr rtlCol="0" anchor="ctr"/>
-          <a:lstStyle/>
-          <a:p>
-            <a:pPr algn="ctr"/>
-            <a:endParaRPr/>
-          </a:p>
-        </p:txBody>
-      </p:sp>
-      <p:sp>
-        <p:nvSpPr>
-          <p:cNvPr id="29" name="TextBox 28"/>
-          <p:cNvSpPr txBox="1"/>
-          <p:nvPr/>
-        </p:nvSpPr>
-        <p:spPr>
-          <a:xfrm>
-            <a:off x="457200" y="4297680"/>
-            <a:ext cx="548640" cy="548640"/>
-          </a:xfrm>
-          <a:prstGeom prst="rect">
-            <a:avLst/>
-          </a:prstGeom>
-          <a:noFill/>
-        </p:spPr>
-        <p:txBody>
-          <a:bodyPr wrap="square">
-            <a:spAutoFit/>
-          </a:bodyPr>
-          <a:lstStyle/>
-          <a:p>
-            <a:pPr algn="l"/>
-            <a:r>
-              <a:rPr sz="2400" b="0" i="0">
-                <a:solidFill>
-                  <a:srgbClr val="1C2340"/>
-                </a:solidFill>
-                <a:latin typeface="Segoe UI"/>
-              </a:rPr>
-              <a:t>🤝</a:t>
-            </a:r>
-          </a:p>
-        </p:txBody>
-      </p:sp>
-      <p:sp>
-        <p:nvSpPr>
-          <p:cNvPr id="30" name="TextBox 29"/>
-          <p:cNvSpPr txBox="1"/>
-          <p:nvPr/>
-        </p:nvSpPr>
-        <p:spPr>
-          <a:xfrm>
-            <a:off x="1143000" y="4297680"/>
-            <a:ext cx="4389120" cy="347472"/>
-          </a:xfrm>
-          <a:prstGeom prst="rect">
-            <a:avLst/>
-          </a:prstGeom>
-          <a:noFill/>
-        </p:spPr>
-        <p:txBody>
-          <a:bodyPr wrap="square">
-            <a:spAutoFit/>
-          </a:bodyPr>
-          <a:lstStyle/>
-          <a:p>
-            <a:pPr algn="l"/>
-            <a:r>
-              <a:rPr sz="1300" b="1" i="0">
-                <a:solidFill>
-                  <a:srgbClr val="1C2340"/>
-                </a:solidFill>
-                <a:latin typeface="Segoe UI"/>
-              </a:rPr>
-              <a:t>Équipe focalisée &amp; motivée</a:t>
-            </a:r>
-          </a:p>
-        </p:txBody>
-      </p:sp>
-      <p:sp>
-        <p:nvSpPr>
-          <p:cNvPr id="31" name="TextBox 30"/>
-          <p:cNvSpPr txBox="1"/>
-          <p:nvPr/>
-        </p:nvSpPr>
-        <p:spPr>
-          <a:xfrm>
-            <a:off x="1143000" y="4663440"/>
-            <a:ext cx="4389120" cy="640080"/>
-          </a:xfrm>
-          <a:prstGeom prst="rect">
-            <a:avLst/>
-          </a:prstGeom>
-          <a:noFill/>
-        </p:spPr>
-        <p:txBody>
-          <a:bodyPr wrap="square">
-            <a:spAutoFit/>
-          </a:bodyPr>
-          <a:lstStyle/>
-          <a:p>
-            <a:pPr algn="l"/>
-            <a:r>
-              <a:rPr sz="1000" b="0" i="0">
-                <a:solidFill>
-                  <a:srgbClr val="8E99B0"/>
-                </a:solidFill>
-                <a:latin typeface="Segoe UI"/>
-              </a:rPr>
-              <a:t>YEFA TECHNOLOGIE, studio technique spécialisé en solutions digitales pour l'Afrique avec expertise mobile et backend.</a:t>
-            </a:r>
-          </a:p>
-        </p:txBody>
-      </p:sp>
-      <p:sp>
-        <p:nvSpPr>
-          <p:cNvPr id="32" name="Rectangle 31"/>
-          <p:cNvSpPr/>
-          <p:nvPr/>
-        </p:nvSpPr>
-        <p:spPr>
-          <a:xfrm>
-            <a:off x="274320" y="5532120"/>
-            <a:ext cx="11640312" cy="914400"/>
-          </a:xfrm>
-          <a:prstGeom prst="rect">
-            <a:avLst/>
-          </a:prstGeom>
-          <a:solidFill>
-            <a:srgbClr val="FFF0E0"/>
-          </a:solidFill>
-          <a:ln>
-            <a:noFill/>
-          </a:ln>
-        </p:spPr>
-        <p:style>
-          <a:lnRef idx="1">
-            <a:schemeClr val="accent1"/>
-          </a:lnRef>
-          <a:fillRef idx="3">
-            <a:schemeClr val="accent1"/>
-          </a:fillRef>
-          <a:effectRef idx="2">
-            <a:schemeClr val="accent1"/>
-          </a:effectRef>
-          <a:fontRef idx="minor">
-            <a:schemeClr val="lt1"/>
-          </a:fontRef>
-        </p:style>
-        <p:txBody>
-          <a:bodyPr rtlCol="0" anchor="ctr"/>
-          <a:lstStyle/>
-          <a:p>
-            <a:pPr algn="ctr"/>
-            <a:endParaRPr/>
-          </a:p>
-        </p:txBody>
-      </p:sp>
-      <p:sp>
-        <p:nvSpPr>
-          <p:cNvPr id="33" name="Rectangle 32"/>
-          <p:cNvSpPr/>
-          <p:nvPr/>
-        </p:nvSpPr>
-        <p:spPr>
-          <a:xfrm>
-            <a:off x="274320" y="5532120"/>
-            <a:ext cx="73152" cy="914400"/>
-          </a:xfrm>
-          <a:prstGeom prst="rect">
-            <a:avLst/>
-          </a:prstGeom>
-          <a:solidFill>
-            <a:srgbClr val="E8620A"/>
-          </a:solidFill>
-          <a:ln>
-            <a:noFill/>
-          </a:ln>
-        </p:spPr>
-        <p:style>
-          <a:lnRef idx="1">
-            <a:schemeClr val="accent1"/>
-          </a:lnRef>
-          <a:fillRef idx="3">
-            <a:schemeClr val="accent1"/>
-          </a:fillRef>
-          <a:effectRef idx="2">
-            <a:schemeClr val="accent1"/>
-          </a:effectRef>
-          <a:fontRef idx="minor">
-            <a:schemeClr val="lt1"/>
-          </a:fontRef>
-        </p:style>
-        <p:txBody>
-          <a:bodyPr rtlCol="0" anchor="ctr"/>
-          <a:lstStyle/>
-          <a:p>
-            <a:pPr algn="ctr"/>
-            <a:endParaRPr/>
-          </a:p>
-        </p:txBody>
-      </p:sp>
-      <p:sp>
-        <p:nvSpPr>
-          <p:cNvPr id="34" name="TextBox 33"/>
-          <p:cNvSpPr txBox="1"/>
-          <p:nvPr/>
-        </p:nvSpPr>
-        <p:spPr>
-          <a:xfrm>
-            <a:off x="457200" y="5623560"/>
-            <a:ext cx="548640" cy="548640"/>
-          </a:xfrm>
-          <a:prstGeom prst="rect">
-            <a:avLst/>
-          </a:prstGeom>
-          <a:noFill/>
-        </p:spPr>
-        <p:txBody>
-          <a:bodyPr wrap="square">
-            <a:spAutoFit/>
-          </a:bodyPr>
-          <a:lstStyle/>
-          <a:p>
-            <a:pPr algn="l"/>
-            <a:r>
-              <a:rPr sz="2400" b="0" i="0">
-                <a:solidFill>
-                  <a:srgbClr val="1C2340"/>
-                </a:solidFill>
-                <a:latin typeface="Segoe UI"/>
-              </a:rPr>
-              <a:t>🤝</a:t>
-            </a:r>
-          </a:p>
-        </p:txBody>
-      </p:sp>
-      <p:sp>
-        <p:nvSpPr>
-          <p:cNvPr id="35" name="TextBox 34"/>
-          <p:cNvSpPr txBox="1"/>
-          <p:nvPr/>
-        </p:nvSpPr>
-        <p:spPr>
-          <a:xfrm>
-            <a:off x="1143000" y="5605272"/>
-            <a:ext cx="10515600" cy="347472"/>
-          </a:xfrm>
-          <a:prstGeom prst="rect">
-            <a:avLst/>
-          </a:prstGeom>
-          <a:noFill/>
-        </p:spPr>
-        <p:txBody>
-          <a:bodyPr wrap="square">
-            <a:spAutoFit/>
-          </a:bodyPr>
-          <a:lstStyle/>
-          <a:p>
-            <a:pPr algn="l"/>
-            <a:r>
-              <a:rPr sz="1300" b="1" i="0">
-                <a:solidFill>
-                  <a:srgbClr val="1C2340"/>
-                </a:solidFill>
-                <a:latin typeface="Segoe UI"/>
-              </a:rPr>
-              <a:t>Équipe focalisée &amp; motivée</a:t>
-            </a:r>
-          </a:p>
-        </p:txBody>
-      </p:sp>
-      <p:sp>
-        <p:nvSpPr>
-          <p:cNvPr id="36" name="TextBox 35"/>
-          <p:cNvSpPr txBox="1"/>
-          <p:nvPr/>
-        </p:nvSpPr>
-        <p:spPr>
-          <a:xfrm>
-            <a:off x="1143000" y="5952744"/>
-            <a:ext cx="10515600" cy="438912"/>
-          </a:xfrm>
-          <a:prstGeom prst="rect">
-            <a:avLst/>
-          </a:prstGeom>
-          <a:noFill/>
-        </p:spPr>
-        <p:txBody>
-          <a:bodyPr wrap="square">
-            <a:spAutoFit/>
-          </a:bodyPr>
-          <a:lstStyle/>
-          <a:p>
-            <a:pPr algn="l"/>
-            <a:r>
-              <a:rPr sz="1000" b="0" i="0">
-                <a:solidFill>
-                  <a:srgbClr val="8E99B0"/>
-                </a:solidFill>
-                <a:latin typeface="Segoe UI"/>
-              </a:rPr>
-              <a:t>YEFA TECHNOLOGIE, studio technique spécialisé en solutions digitales pour l'Afrique avec expertise mobile et backend.</a:t>
-            </a:r>
-          </a:p>
-        </p:txBody>
-      </p:sp>
-    </p:spTree>
-  </p:cSld>
-  <p:clrMapOvr>
-    <a:masterClrMapping/>
-  </p:clrMapOvr>
-</p:sld>
-</file>
-
-<file path=ppt/slides/slide14.xml><?xml version="1.0" encoding="utf-8"?>
-<p:sld xmlns:a="http://schemas.openxmlformats.org/drawingml/2006/main" xmlns:r="http://schemas.openxmlformats.org/officeDocument/2006/relationships" xmlns:p="http://schemas.openxmlformats.org/presentationml/2006/main">
-  <p:cSld>
-    <p:spTree>
-      <p:nvGrpSpPr>
-        <p:cNvPr id="1" name=""/>
-        <p:cNvGrpSpPr/>
-        <p:nvPr/>
-      </p:nvGrpSpPr>
-      <p:grpSpPr>
-        <a:xfrm>
-          <a:off x="0" y="0"/>
-          <a:ext cx="0" cy="0"/>
-          <a:chOff x="0" y="0"/>
-          <a:chExt cx="0" cy="0"/>
-        </a:xfrm>
-      </p:grpSpPr>
-      <p:sp>
-        <p:nvSpPr>
-          <p:cNvPr id="2" name="Rectangle 1"/>
-          <p:cNvSpPr/>
-          <p:nvPr/>
-        </p:nvSpPr>
-        <p:spPr>
-          <a:xfrm>
-            <a:off x="0" y="0"/>
-            <a:ext cx="12188952" cy="6858000"/>
-          </a:xfrm>
-          <a:prstGeom prst="rect">
-            <a:avLst/>
-          </a:prstGeom>
-          <a:solidFill>
             <a:srgbClr val="1C2340"/>
           </a:solidFill>
           <a:ln>
@@ -11267,14 +10211,38 @@
           <a:p>
             <a:pPr algn="l"/>
             <a:r>
-              <a:rPr sz="1300" b="1" i="0">
+              <a:rPr sz="1300" b="1" i="0" dirty="0" err="1">
                 <a:solidFill>
                   <a:srgbClr val="1C2340"/>
                 </a:solidFill>
                 <a:latin typeface="Segoe UI"/>
               </a:rPr>
-              <a:t>Plaintes sans réponse</a:t>
-            </a:r>
+              <a:t>Plaintes</a:t>
+            </a:r>
+            <a:r>
+              <a:rPr sz="1300" b="1" i="0" dirty="0">
+                <a:solidFill>
+                  <a:srgbClr val="1C2340"/>
+                </a:solidFill>
+                <a:latin typeface="Segoe UI"/>
+              </a:rPr>
+              <a:t> sans </a:t>
+            </a:r>
+            <a:r>
+              <a:rPr sz="1300" b="1" i="0" dirty="0" err="1">
+                <a:solidFill>
+                  <a:srgbClr val="1C2340"/>
+                </a:solidFill>
+                <a:latin typeface="Segoe UI"/>
+              </a:rPr>
+              <a:t>réponse</a:t>
+            </a:r>
+            <a:endParaRPr sz="1300" b="1" i="0" dirty="0">
+              <a:solidFill>
+                <a:srgbClr val="1C2340"/>
+              </a:solidFill>
+              <a:latin typeface="Segoe UI"/>
+            </a:endParaRPr>
           </a:p>
         </p:txBody>
       </p:sp>
@@ -11585,29 +10553,121 @@
         <p:spPr>
           <a:xfrm>
             <a:off x="8046720" y="2148840"/>
-            <a:ext cx="3840480" cy="548640"/>
-          </a:xfrm>
-          <a:prstGeom prst="rect">
-            <a:avLst/>
-          </a:prstGeom>
-          <a:noFill/>
-        </p:spPr>
-        <p:txBody>
-          <a:bodyPr wrap="square">
-            <a:spAutoFit/>
-          </a:bodyPr>
-          <a:lstStyle/>
-          <a:p>
-            <a:pPr algn="ctr"/>
-            <a:r>
-              <a:rPr sz="1100" b="0" i="0">
+            <a:ext cx="3840480" cy="430887"/>
+          </a:xfrm>
+          <a:prstGeom prst="rect">
+            <a:avLst/>
+          </a:prstGeom>
+          <a:noFill/>
+        </p:spPr>
+        <p:txBody>
+          <a:bodyPr wrap="square">
+            <a:spAutoFit/>
+          </a:bodyPr>
+          <a:lstStyle/>
+          <a:p>
+            <a:pPr algn="ctr"/>
+            <a:r>
+              <a:rPr sz="1100" b="0" i="0" dirty="0">
                 <a:solidFill>
                   <a:srgbClr val="FFFFFF"/>
                 </a:solidFill>
                 <a:latin typeface="Segoe UI"/>
               </a:rPr>
-              <a:t>des Africains n'ont pas accès
-à un médecin à moins de 5 km</a:t>
+              <a:t>des </a:t>
+            </a:r>
+            <a:r>
+              <a:rPr sz="1100" b="0" i="0" dirty="0" err="1">
+                <a:solidFill>
+                  <a:srgbClr val="FFFFFF"/>
+                </a:solidFill>
+                <a:latin typeface="Segoe UI"/>
+              </a:rPr>
+              <a:t>Africains</a:t>
+            </a:r>
+            <a:r>
+              <a:rPr sz="1100" b="0" i="0" dirty="0">
+                <a:solidFill>
+                  <a:srgbClr val="FFFFFF"/>
+                </a:solidFill>
+                <a:latin typeface="Segoe UI"/>
+              </a:rPr>
+              <a:t> n</a:t>
+            </a:r>
+            <a:r>
+              <a:rPr lang="fr-CI" sz="1100" b="0" i="0" dirty="0">
+                <a:solidFill>
+                  <a:srgbClr val="FFFFFF"/>
+                </a:solidFill>
+                <a:latin typeface="Segoe UI"/>
+              </a:rPr>
+              <a:t>e savent</a:t>
+            </a:r>
+            <a:r>
+              <a:rPr sz="1100" b="0" i="0" dirty="0">
+                <a:solidFill>
+                  <a:srgbClr val="FFFFFF"/>
+                </a:solidFill>
+                <a:latin typeface="Segoe UI"/>
+              </a:rPr>
+              <a:t> pas </a:t>
+            </a:r>
+            <a:r>
+              <a:rPr lang="fr-CI" sz="1100" dirty="0">
+                <a:solidFill>
+                  <a:srgbClr val="FFFFFF"/>
+                </a:solidFill>
+                <a:latin typeface="Segoe UI"/>
+              </a:rPr>
+              <a:t>ou trouver </a:t>
+            </a:r>
+          </a:p>
+          <a:p>
+            <a:pPr algn="ctr"/>
+            <a:r>
+              <a:rPr sz="1100" b="0" i="0" dirty="0">
+                <a:solidFill>
+                  <a:srgbClr val="FFFFFF"/>
+                </a:solidFill>
+                <a:latin typeface="Segoe UI"/>
+              </a:rPr>
+              <a:t>à un </a:t>
+            </a:r>
+            <a:r>
+              <a:rPr sz="1100" b="0" i="0" dirty="0" err="1">
+                <a:solidFill>
+                  <a:srgbClr val="FFFFFF"/>
+                </a:solidFill>
+                <a:latin typeface="Segoe UI"/>
+              </a:rPr>
+              <a:t>médecin</a:t>
+            </a:r>
+            <a:r>
+              <a:rPr sz="1100" b="0" i="0" dirty="0">
+                <a:solidFill>
+                  <a:srgbClr val="FFFFFF"/>
+                </a:solidFill>
+                <a:latin typeface="Segoe UI"/>
+              </a:rPr>
+              <a:t> à </a:t>
+            </a:r>
+            <a:r>
+              <a:rPr sz="1100" b="0" i="0" dirty="0" err="1">
+                <a:solidFill>
+                  <a:srgbClr val="FFFFFF"/>
+                </a:solidFill>
+                <a:latin typeface="Segoe UI"/>
+              </a:rPr>
+              <a:t>moins</a:t>
+            </a:r>
+            <a:r>
+              <a:rPr sz="1100" b="0" i="0" dirty="0">
+                <a:solidFill>
+                  <a:srgbClr val="FFFFFF"/>
+                </a:solidFill>
+                <a:latin typeface="Segoe UI"/>
+              </a:rPr>
+              <a:t> de 5 km</a:t>
             </a:r>
           </a:p>
         </p:txBody>
@@ -11947,7 +11007,7 @@
         <p:spPr>
           <a:xfrm>
             <a:off x="274320" y="1920240"/>
-            <a:ext cx="6858000" cy="731520"/>
+            <a:ext cx="6858000" cy="523220"/>
           </a:xfrm>
           <a:prstGeom prst="rect">
             <a:avLst/>
@@ -11962,14 +11022,203 @@
           <a:p>
             <a:pPr algn="l"/>
             <a:r>
-              <a:rPr sz="1400" b="0" i="0">
+              <a:rPr sz="1400" b="0" i="0" dirty="0" err="1">
                 <a:solidFill>
                   <a:srgbClr val="BBCCDD"/>
                 </a:solidFill>
                 <a:latin typeface="Segoe UI"/>
               </a:rPr>
-              <a:t>Santé Aproximite connecte citoyens, établissements de santé et secours
-via une application mobile intuitive et hors-ligne, géolocalisée en temps réel.</a:t>
+              <a:t>Santé</a:t>
+            </a:r>
+            <a:r>
+              <a:rPr sz="1400" b="0" i="0" dirty="0">
+                <a:solidFill>
+                  <a:srgbClr val="BBCCDD"/>
+                </a:solidFill>
+                <a:latin typeface="Segoe UI"/>
+              </a:rPr>
+              <a:t> </a:t>
+            </a:r>
+            <a:r>
+              <a:rPr sz="1400" b="0" i="0" dirty="0" err="1">
+                <a:solidFill>
+                  <a:srgbClr val="BBCCDD"/>
+                </a:solidFill>
+                <a:latin typeface="Segoe UI"/>
+              </a:rPr>
+              <a:t>Aproximite</a:t>
+            </a:r>
+            <a:r>
+              <a:rPr lang="fr-CI" sz="1400" dirty="0">
+                <a:solidFill>
+                  <a:srgbClr val="BBCCDD"/>
+                </a:solidFill>
+                <a:latin typeface="Segoe UI"/>
+              </a:rPr>
+              <a:t> </a:t>
+            </a:r>
+            <a:r>
+              <a:rPr sz="1400" b="0" i="0" dirty="0" err="1">
+                <a:solidFill>
+                  <a:srgbClr val="BBCCDD"/>
+                </a:solidFill>
+                <a:latin typeface="Segoe UI"/>
+              </a:rPr>
+              <a:t>connecte</a:t>
+            </a:r>
+            <a:r>
+              <a:rPr sz="1400" b="0" i="0" dirty="0">
+                <a:solidFill>
+                  <a:srgbClr val="BBCCDD"/>
+                </a:solidFill>
+                <a:latin typeface="Segoe UI"/>
+              </a:rPr>
+              <a:t> </a:t>
+            </a:r>
+            <a:r>
+              <a:rPr sz="1400" b="0" i="0" dirty="0" err="1">
+                <a:solidFill>
+                  <a:srgbClr val="BBCCDD"/>
+                </a:solidFill>
+                <a:latin typeface="Segoe UI"/>
+              </a:rPr>
+              <a:t>citoyens</a:t>
+            </a:r>
+            <a:r>
+              <a:rPr sz="1400" b="0" i="0" dirty="0">
+                <a:solidFill>
+                  <a:srgbClr val="BBCCDD"/>
+                </a:solidFill>
+                <a:latin typeface="Segoe UI"/>
+              </a:rPr>
+              <a:t>, </a:t>
+            </a:r>
+            <a:r>
+              <a:rPr sz="1400" b="0" i="0" dirty="0" err="1">
+                <a:solidFill>
+                  <a:srgbClr val="BBCCDD"/>
+                </a:solidFill>
+                <a:latin typeface="Segoe UI"/>
+              </a:rPr>
+              <a:t>établissements</a:t>
+            </a:r>
+            <a:r>
+              <a:rPr sz="1400" b="0" i="0" dirty="0">
+                <a:solidFill>
+                  <a:srgbClr val="BBCCDD"/>
+                </a:solidFill>
+                <a:latin typeface="Segoe UI"/>
+              </a:rPr>
+              <a:t> de </a:t>
+            </a:r>
+            <a:r>
+              <a:rPr sz="1400" b="0" i="0" dirty="0" err="1">
+                <a:solidFill>
+                  <a:srgbClr val="BBCCDD"/>
+                </a:solidFill>
+                <a:latin typeface="Segoe UI"/>
+              </a:rPr>
+              <a:t>santé</a:t>
+            </a:r>
+            <a:r>
+              <a:rPr sz="1400" b="0" i="0" dirty="0">
+                <a:solidFill>
+                  <a:srgbClr val="BBCCDD"/>
+                </a:solidFill>
+                <a:latin typeface="Segoe UI"/>
+              </a:rPr>
+              <a:t> et secours
+via </a:t>
+            </a:r>
+            <a:r>
+              <a:rPr sz="1400" b="0" i="0" dirty="0" err="1">
+                <a:solidFill>
+                  <a:srgbClr val="BBCCDD"/>
+                </a:solidFill>
+                <a:latin typeface="Segoe UI"/>
+              </a:rPr>
+              <a:t>une</a:t>
+            </a:r>
+            <a:r>
+              <a:rPr sz="1400" b="0" i="0" dirty="0">
+                <a:solidFill>
+                  <a:srgbClr val="BBCCDD"/>
+                </a:solidFill>
+                <a:latin typeface="Segoe UI"/>
+              </a:rPr>
+              <a:t> application mobile intuitive et hors-</a:t>
+            </a:r>
+            <a:r>
+              <a:rPr sz="1400" b="0" i="0" dirty="0" err="1">
+                <a:solidFill>
+                  <a:srgbClr val="BBCCDD"/>
+                </a:solidFill>
+                <a:latin typeface="Segoe UI"/>
+              </a:rPr>
+              <a:t>ligne</a:t>
+            </a:r>
+            <a:r>
+              <a:rPr sz="1400" b="0" i="0" dirty="0">
+                <a:solidFill>
+                  <a:srgbClr val="BBCCDD"/>
+                </a:solidFill>
+                <a:latin typeface="Segoe UI"/>
+              </a:rPr>
+              <a:t>, </a:t>
+            </a:r>
+            <a:r>
+              <a:rPr sz="1400" b="0" i="0" dirty="0" err="1">
+                <a:solidFill>
+                  <a:srgbClr val="BBCCDD"/>
+                </a:solidFill>
+                <a:latin typeface="Segoe UI"/>
+              </a:rPr>
+              <a:t>géolocalisée</a:t>
+            </a:r>
+            <a:r>
+              <a:rPr sz="1400" b="0" i="0" dirty="0">
+                <a:solidFill>
+                  <a:srgbClr val="BBCCDD"/>
+                </a:solidFill>
+                <a:latin typeface="Segoe UI"/>
+              </a:rPr>
+              <a:t> </a:t>
+            </a:r>
+            <a:r>
+              <a:rPr sz="1400" b="0" i="0" dirty="0" err="1">
+                <a:solidFill>
+                  <a:srgbClr val="BBCCDD"/>
+                </a:solidFill>
+                <a:latin typeface="Segoe UI"/>
+              </a:rPr>
+              <a:t>en</a:t>
+            </a:r>
+            <a:r>
+              <a:rPr sz="1400" b="0" i="0" dirty="0">
+                <a:solidFill>
+                  <a:srgbClr val="BBCCDD"/>
+                </a:solidFill>
+                <a:latin typeface="Segoe UI"/>
+              </a:rPr>
+              <a:t> temps </a:t>
+            </a:r>
+            <a:r>
+              <a:rPr sz="1400" b="0" i="0" dirty="0" err="1">
+                <a:solidFill>
+                  <a:srgbClr val="BBCCDD"/>
+                </a:solidFill>
+                <a:latin typeface="Segoe UI"/>
+              </a:rPr>
+              <a:t>réel</a:t>
+            </a:r>
+            <a:r>
+              <a:rPr sz="1400" b="0" i="0" dirty="0">
+                <a:solidFill>
+                  <a:srgbClr val="BBCCDD"/>
+                </a:solidFill>
+                <a:latin typeface="Segoe UI"/>
+              </a:rPr>
+              <a:t>.</a:t>
             </a:r>
           </a:p>
         </p:txBody>
@@ -11982,8 +11231,8 @@
         </p:nvSpPr>
         <p:spPr>
           <a:xfrm>
-            <a:off x="274320" y="2926080"/>
-            <a:ext cx="2743200" cy="3474720"/>
+            <a:off x="274319" y="2926080"/>
+            <a:ext cx="2283651" cy="3474720"/>
           </a:xfrm>
           <a:prstGeom prst="rect">
             <a:avLst/>
@@ -12026,8 +11275,8 @@
         </p:nvSpPr>
         <p:spPr>
           <a:xfrm>
-            <a:off x="274320" y="2926080"/>
-            <a:ext cx="2743200" cy="109728"/>
+            <a:off x="274321" y="2907411"/>
+            <a:ext cx="2283650" cy="150114"/>
           </a:xfrm>
           <a:prstGeom prst="rect">
             <a:avLst/>
@@ -12141,7 +11390,7 @@
         <p:spPr>
           <a:xfrm>
             <a:off x="457200" y="4206240"/>
-            <a:ext cx="2468880" cy="822960"/>
+            <a:ext cx="2076873" cy="400110"/>
           </a:xfrm>
           <a:prstGeom prst="rect">
             <a:avLst/>
@@ -12176,8 +11425,8 @@
         </p:nvSpPr>
         <p:spPr>
           <a:xfrm>
-            <a:off x="3218688" y="2926080"/>
-            <a:ext cx="2743200" cy="3474720"/>
+            <a:off x="2790063" y="2926080"/>
+            <a:ext cx="2308947" cy="3474720"/>
           </a:xfrm>
           <a:prstGeom prst="rect">
             <a:avLst/>
@@ -12220,8 +11469,8 @@
         </p:nvSpPr>
         <p:spPr>
           <a:xfrm>
-            <a:off x="3218688" y="2926080"/>
-            <a:ext cx="2743200" cy="109728"/>
+            <a:off x="2790063" y="2926079"/>
+            <a:ext cx="2308947" cy="131445"/>
           </a:xfrm>
           <a:prstGeom prst="rect">
             <a:avLst/>
@@ -12264,7 +11513,7 @@
         </p:nvSpPr>
         <p:spPr>
           <a:xfrm>
-            <a:off x="3401568" y="3108960"/>
+            <a:off x="2972943" y="3108960"/>
             <a:ext cx="731520" cy="640080"/>
           </a:xfrm>
           <a:prstGeom prst="rect">
@@ -12299,7 +11548,7 @@
         </p:nvSpPr>
         <p:spPr>
           <a:xfrm>
-            <a:off x="3401568" y="3794760"/>
+            <a:off x="2859740" y="3813429"/>
             <a:ext cx="2468880" cy="411480"/>
           </a:xfrm>
           <a:prstGeom prst="rect">
@@ -12334,8 +11583,8 @@
         </p:nvSpPr>
         <p:spPr>
           <a:xfrm>
-            <a:off x="3401568" y="4206240"/>
-            <a:ext cx="2468880" cy="822960"/>
+            <a:off x="2876886" y="4206240"/>
+            <a:ext cx="2222124" cy="400110"/>
           </a:xfrm>
           <a:prstGeom prst="rect">
             <a:avLst/>
@@ -12350,15 +11599,129 @@
           <a:p>
             <a:pPr algn="l"/>
             <a:r>
-              <a:rPr sz="1000" b="0" i="0">
+              <a:rPr sz="1000" b="0" i="0" dirty="0" err="1">
                 <a:solidFill>
                   <a:srgbClr val="AABBCC"/>
                 </a:solidFill>
                 <a:latin typeface="Segoe UI"/>
               </a:rPr>
-              <a:t>Signalez et suivez toute urgence
-médical ou sécuritaire en temps réel</a:t>
-            </a:r>
+              <a:t>Signalez</a:t>
+            </a:r>
+            <a:r>
+              <a:rPr sz="1000" b="0" i="0" dirty="0">
+                <a:solidFill>
+                  <a:srgbClr val="AABBCC"/>
+                </a:solidFill>
+                <a:latin typeface="Segoe UI"/>
+              </a:rPr>
+              <a:t> et suivez </a:t>
+            </a:r>
+            <a:r>
+              <a:rPr sz="1000" b="0" i="0" dirty="0" err="1">
+                <a:solidFill>
+                  <a:srgbClr val="AABBCC"/>
+                </a:solidFill>
+                <a:latin typeface="Segoe UI"/>
+              </a:rPr>
+              <a:t>toute</a:t>
+            </a:r>
+            <a:r>
+              <a:rPr sz="1000" b="0" i="0" dirty="0">
+                <a:solidFill>
+                  <a:srgbClr val="AABBCC"/>
+                </a:solidFill>
+                <a:latin typeface="Segoe UI"/>
+              </a:rPr>
+              <a:t> urgence
+</a:t>
+            </a:r>
+            <a:r>
+              <a:rPr sz="1000" b="0" i="0" dirty="0" err="1">
+                <a:solidFill>
+                  <a:srgbClr val="AABBCC"/>
+                </a:solidFill>
+                <a:latin typeface="Segoe UI"/>
+              </a:rPr>
+              <a:t>médical</a:t>
+            </a:r>
+            <a:r>
+              <a:rPr sz="1000" b="0" i="0" dirty="0">
+                <a:solidFill>
+                  <a:srgbClr val="AABBCC"/>
+                </a:solidFill>
+                <a:latin typeface="Segoe UI"/>
+              </a:rPr>
+              <a:t> </a:t>
+            </a:r>
+            <a:r>
+              <a:rPr sz="1000" b="0" i="0" dirty="0" err="1">
+                <a:solidFill>
+                  <a:srgbClr val="AABBCC"/>
+                </a:solidFill>
+                <a:latin typeface="Segoe UI"/>
+              </a:rPr>
+              <a:t>ou</a:t>
+            </a:r>
+            <a:r>
+              <a:rPr sz="1000" b="0" i="0" dirty="0">
+                <a:solidFill>
+                  <a:srgbClr val="AABBCC"/>
+                </a:solidFill>
+                <a:latin typeface="Segoe UI"/>
+              </a:rPr>
+              <a:t> </a:t>
+            </a:r>
+            <a:r>
+              <a:rPr sz="1000" b="0" i="0" dirty="0" err="1">
+                <a:solidFill>
+                  <a:srgbClr val="AABBCC"/>
+                </a:solidFill>
+                <a:latin typeface="Segoe UI"/>
+              </a:rPr>
+              <a:t>sécuritaire</a:t>
+            </a:r>
+            <a:r>
+              <a:rPr sz="1000" b="0" i="0" dirty="0">
+                <a:solidFill>
+                  <a:srgbClr val="AABBCC"/>
+                </a:solidFill>
+                <a:latin typeface="Segoe UI"/>
+              </a:rPr>
+              <a:t> </a:t>
+            </a:r>
+            <a:r>
+              <a:rPr sz="1000" b="0" i="0" dirty="0" err="1">
+                <a:solidFill>
+                  <a:srgbClr val="AABBCC"/>
+                </a:solidFill>
+                <a:latin typeface="Segoe UI"/>
+              </a:rPr>
+              <a:t>en</a:t>
+            </a:r>
+            <a:r>
+              <a:rPr sz="1000" b="0" i="0" dirty="0">
+                <a:solidFill>
+                  <a:srgbClr val="AABBCC"/>
+                </a:solidFill>
+                <a:latin typeface="Segoe UI"/>
+              </a:rPr>
+              <a:t> temps </a:t>
+            </a:r>
+            <a:r>
+              <a:rPr sz="1000" b="0" i="0" dirty="0" err="1">
+                <a:solidFill>
+                  <a:srgbClr val="AABBCC"/>
+                </a:solidFill>
+                <a:latin typeface="Segoe UI"/>
+              </a:rPr>
+              <a:t>réel</a:t>
+            </a:r>
+            <a:endParaRPr sz="1000" b="0" i="0" dirty="0">
+              <a:solidFill>
+                <a:srgbClr val="AABBCC"/>
+              </a:solidFill>
+              <a:latin typeface="Segoe UI"/>
+            </a:endParaRPr>
           </a:p>
         </p:txBody>
       </p:sp>
@@ -12370,8 +11733,8 @@
         </p:nvSpPr>
         <p:spPr>
           <a:xfrm>
-            <a:off x="6163056" y="2926080"/>
-            <a:ext cx="2743200" cy="3474720"/>
+            <a:off x="5296281" y="2926080"/>
+            <a:ext cx="2308947" cy="3474720"/>
           </a:xfrm>
           <a:prstGeom prst="rect">
             <a:avLst/>
@@ -12414,8 +11777,8 @@
         </p:nvSpPr>
         <p:spPr>
           <a:xfrm>
-            <a:off x="6163056" y="2926080"/>
-            <a:ext cx="2743200" cy="109728"/>
+            <a:off x="5296281" y="2926080"/>
+            <a:ext cx="2308947" cy="109728"/>
           </a:xfrm>
           <a:prstGeom prst="rect">
             <a:avLst/>
@@ -12458,8 +11821,8 @@
         </p:nvSpPr>
         <p:spPr>
           <a:xfrm>
-            <a:off x="6345936" y="3108960"/>
-            <a:ext cx="731520" cy="640080"/>
+            <a:off x="5479161" y="3108960"/>
+            <a:ext cx="615719" cy="553998"/>
           </a:xfrm>
           <a:prstGeom prst="rect">
             <a:avLst/>
@@ -12493,8 +11856,8 @@
         </p:nvSpPr>
         <p:spPr>
           <a:xfrm>
-            <a:off x="6345936" y="3794760"/>
-            <a:ext cx="2468880" cy="411480"/>
+            <a:off x="5479161" y="3794760"/>
+            <a:ext cx="2078052" cy="323165"/>
           </a:xfrm>
           <a:prstGeom prst="rect">
             <a:avLst/>
@@ -12528,8 +11891,8 @@
         </p:nvSpPr>
         <p:spPr>
           <a:xfrm>
-            <a:off x="6345936" y="4206240"/>
-            <a:ext cx="2468880" cy="822960"/>
+            <a:off x="5479161" y="4206240"/>
+            <a:ext cx="2078052" cy="400110"/>
           </a:xfrm>
           <a:prstGeom prst="rect">
             <a:avLst/>
@@ -12564,8 +11927,8 @@
         </p:nvSpPr>
         <p:spPr>
           <a:xfrm>
-            <a:off x="9107424" y="2926080"/>
-            <a:ext cx="2743200" cy="3474720"/>
+            <a:off x="7764399" y="2926080"/>
+            <a:ext cx="2141601" cy="3474720"/>
           </a:xfrm>
           <a:prstGeom prst="rect">
             <a:avLst/>
@@ -12608,8 +11971,8 @@
         </p:nvSpPr>
         <p:spPr>
           <a:xfrm>
-            <a:off x="9107424" y="2926080"/>
-            <a:ext cx="2743200" cy="109728"/>
+            <a:off x="7764399" y="2926080"/>
+            <a:ext cx="2141601" cy="109728"/>
           </a:xfrm>
           <a:prstGeom prst="rect">
             <a:avLst/>
@@ -12652,8 +12015,8 @@
         </p:nvSpPr>
         <p:spPr>
           <a:xfrm>
-            <a:off x="9290304" y="3108960"/>
-            <a:ext cx="731520" cy="640080"/>
+            <a:off x="7947279" y="3108960"/>
+            <a:ext cx="571094" cy="553998"/>
           </a:xfrm>
           <a:prstGeom prst="rect">
             <a:avLst/>
@@ -12668,7 +12031,7 @@
           <a:p>
             <a:pPr algn="l"/>
             <a:r>
-              <a:rPr sz="3000" b="0" i="0">
+              <a:rPr sz="3000" b="0" i="0" dirty="0">
                 <a:solidFill>
                   <a:srgbClr val="FFFFFF"/>
                 </a:solidFill>
@@ -12687,8 +12050,8 @@
         </p:nvSpPr>
         <p:spPr>
           <a:xfrm>
-            <a:off x="9290304" y="3794760"/>
-            <a:ext cx="2468880" cy="411480"/>
+            <a:off x="7947279" y="3794760"/>
+            <a:ext cx="1927441" cy="323165"/>
           </a:xfrm>
           <a:prstGeom prst="rect">
             <a:avLst/>
@@ -12703,7 +12066,7 @@
           <a:p>
             <a:pPr algn="l"/>
             <a:r>
-              <a:rPr sz="1500" b="1" i="0">
+              <a:rPr sz="1500" b="1" i="0" dirty="0">
                 <a:solidFill>
                   <a:srgbClr val="FFFFFF"/>
                 </a:solidFill>
@@ -12722,8 +12085,8 @@
         </p:nvSpPr>
         <p:spPr>
           <a:xfrm>
-            <a:off x="9290304" y="4206240"/>
-            <a:ext cx="2468880" cy="822960"/>
+            <a:off x="7947279" y="4206240"/>
+            <a:ext cx="1927441" cy="553998"/>
           </a:xfrm>
           <a:prstGeom prst="rect">
             <a:avLst/>
@@ -12752,57 +12115,13 @@
       </p:sp>
       <p:sp>
         <p:nvSpPr>
-          <p:cNvPr id="27" name="Rectangle 26"/>
-          <p:cNvSpPr/>
-          <p:nvPr/>
-        </p:nvSpPr>
-        <p:spPr>
-          <a:xfrm>
-            <a:off x="8619275" y="1353312"/>
-            <a:ext cx="2110153" cy="4572000"/>
-          </a:xfrm>
-          <a:prstGeom prst="rect">
-            <a:avLst/>
-          </a:prstGeom>
-          <a:solidFill>
-            <a:srgbClr val="000000"/>
-          </a:solidFill>
-          <a:ln>
-            <a:noFill/>
-          </a:ln>
-        </p:spPr>
-        <p:style>
-          <a:lnRef idx="1">
-            <a:schemeClr val="accent1"/>
-          </a:lnRef>
-          <a:fillRef idx="3">
-            <a:schemeClr val="accent1"/>
-          </a:fillRef>
-          <a:effectRef idx="2">
-            <a:schemeClr val="accent1"/>
-          </a:effectRef>
-          <a:fontRef idx="minor">
-            <a:schemeClr val="lt1"/>
-          </a:fontRef>
-        </p:style>
-        <p:txBody>
-          <a:bodyPr rtlCol="0" anchor="ctr"/>
-          <a:lstStyle/>
-          <a:p>
-            <a:pPr algn="ctr"/>
-            <a:endParaRPr/>
-          </a:p>
-        </p:txBody>
-      </p:sp>
-      <p:sp>
-        <p:nvSpPr>
           <p:cNvPr id="28" name="Rounded Rectangle 27"/>
           <p:cNvSpPr/>
           <p:nvPr/>
         </p:nvSpPr>
         <p:spPr>
           <a:xfrm>
-            <a:off x="8546123" y="1280160"/>
+            <a:off x="10041548" y="2137410"/>
             <a:ext cx="2110153" cy="4572000"/>
           </a:xfrm>
           <a:prstGeom prst="roundRect">
@@ -12858,7 +12177,7 @@
         </p:blipFill>
         <p:spPr>
           <a:xfrm>
-            <a:off x="8672732" y="1600200"/>
+            <a:off x="10168157" y="2457450"/>
             <a:ext cx="1856935" cy="3931920"/>
           </a:xfrm>
           <a:prstGeom prst="rect">
@@ -14405,57 +13724,13 @@
       </p:sp>
       <p:sp>
         <p:nvSpPr>
-          <p:cNvPr id="37" name="Rectangle 36"/>
-          <p:cNvSpPr/>
-          <p:nvPr/>
-        </p:nvSpPr>
-        <p:spPr>
-          <a:xfrm>
-            <a:off x="8344955" y="1444752"/>
-            <a:ext cx="2110153" cy="4572000"/>
-          </a:xfrm>
-          <a:prstGeom prst="rect">
-            <a:avLst/>
-          </a:prstGeom>
-          <a:solidFill>
-            <a:srgbClr val="000000"/>
-          </a:solidFill>
-          <a:ln>
-            <a:noFill/>
-          </a:ln>
-        </p:spPr>
-        <p:style>
-          <a:lnRef idx="1">
-            <a:schemeClr val="accent1"/>
-          </a:lnRef>
-          <a:fillRef idx="3">
-            <a:schemeClr val="accent1"/>
-          </a:fillRef>
-          <a:effectRef idx="2">
-            <a:schemeClr val="accent1"/>
-          </a:effectRef>
-          <a:fontRef idx="minor">
-            <a:schemeClr val="lt1"/>
-          </a:fontRef>
-        </p:style>
-        <p:txBody>
-          <a:bodyPr rtlCol="0" anchor="ctr"/>
-          <a:lstStyle/>
-          <a:p>
-            <a:pPr algn="ctr"/>
-            <a:endParaRPr/>
-          </a:p>
-        </p:txBody>
-      </p:sp>
-      <p:sp>
-        <p:nvSpPr>
           <p:cNvPr id="38" name="Rounded Rectangle 37"/>
           <p:cNvSpPr/>
           <p:nvPr/>
         </p:nvSpPr>
         <p:spPr>
           <a:xfrm>
-            <a:off x="8271803" y="1371600"/>
+            <a:off x="8062253" y="1457325"/>
             <a:ext cx="2110153" cy="4572000"/>
           </a:xfrm>
           <a:prstGeom prst="roundRect">
@@ -14511,7 +13786,7 @@
         </p:blipFill>
         <p:spPr>
           <a:xfrm>
-            <a:off x="8398412" y="1691640"/>
+            <a:off x="8188862" y="1777365"/>
             <a:ext cx="1856935" cy="3931920"/>
           </a:xfrm>
           <a:prstGeom prst="rect">
@@ -15721,50 +14996,6 @@
       </p:sp>
       <p:sp>
         <p:nvSpPr>
-          <p:cNvPr id="29" name="Rectangle 28"/>
-          <p:cNvSpPr/>
-          <p:nvPr/>
-        </p:nvSpPr>
-        <p:spPr>
-          <a:xfrm>
-            <a:off x="8344955" y="1444752"/>
-            <a:ext cx="2110153" cy="4572000"/>
-          </a:xfrm>
-          <a:prstGeom prst="rect">
-            <a:avLst/>
-          </a:prstGeom>
-          <a:solidFill>
-            <a:srgbClr val="000000"/>
-          </a:solidFill>
-          <a:ln>
-            <a:noFill/>
-          </a:ln>
-        </p:spPr>
-        <p:style>
-          <a:lnRef idx="1">
-            <a:schemeClr val="accent1"/>
-          </a:lnRef>
-          <a:fillRef idx="3">
-            <a:schemeClr val="accent1"/>
-          </a:fillRef>
-          <a:effectRef idx="2">
-            <a:schemeClr val="accent1"/>
-          </a:effectRef>
-          <a:fontRef idx="minor">
-            <a:schemeClr val="lt1"/>
-          </a:fontRef>
-        </p:style>
-        <p:txBody>
-          <a:bodyPr rtlCol="0" anchor="ctr"/>
-          <a:lstStyle/>
-          <a:p>
-            <a:pPr algn="ctr"/>
-            <a:endParaRPr/>
-          </a:p>
-        </p:txBody>
-      </p:sp>
-      <p:sp>
-        <p:nvSpPr>
           <p:cNvPr id="30" name="Rounded Rectangle 29"/>
           <p:cNvSpPr/>
           <p:nvPr/>
@@ -17937,50 +17168,6 @@
       </p:sp>
       <p:sp>
         <p:nvSpPr>
-          <p:cNvPr id="53" name="Rectangle 52"/>
-          <p:cNvSpPr/>
-          <p:nvPr/>
-        </p:nvSpPr>
-        <p:spPr>
-          <a:xfrm>
-            <a:off x="8344955" y="1444752"/>
-            <a:ext cx="2110153" cy="4572000"/>
-          </a:xfrm>
-          <a:prstGeom prst="rect">
-            <a:avLst/>
-          </a:prstGeom>
-          <a:solidFill>
-            <a:srgbClr val="000000"/>
-          </a:solidFill>
-          <a:ln>
-            <a:noFill/>
-          </a:ln>
-        </p:spPr>
-        <p:style>
-          <a:lnRef idx="1">
-            <a:schemeClr val="accent1"/>
-          </a:lnRef>
-          <a:fillRef idx="3">
-            <a:schemeClr val="accent1"/>
-          </a:fillRef>
-          <a:effectRef idx="2">
-            <a:schemeClr val="accent1"/>
-          </a:effectRef>
-          <a:fontRef idx="minor">
-            <a:schemeClr val="lt1"/>
-          </a:fontRef>
-        </p:style>
-        <p:txBody>
-          <a:bodyPr rtlCol="0" anchor="ctr"/>
-          <a:lstStyle/>
-          <a:p>
-            <a:pPr algn="ctr"/>
-            <a:endParaRPr/>
-          </a:p>
-        </p:txBody>
-      </p:sp>
-      <p:sp>
-        <p:nvSpPr>
           <p:cNvPr id="54" name="Rounded Rectangle 53"/>
           <p:cNvSpPr/>
           <p:nvPr/>
@@ -19107,50 +18294,6 @@
               </a:rPr>
               <a:t>REJETÉE</a:t>
             </a:r>
-          </a:p>
-        </p:txBody>
-      </p:sp>
-      <p:sp>
-        <p:nvSpPr>
-          <p:cNvPr id="28" name="Rectangle 27"/>
-          <p:cNvSpPr/>
-          <p:nvPr/>
-        </p:nvSpPr>
-        <p:spPr>
-          <a:xfrm>
-            <a:off x="8344955" y="1444752"/>
-            <a:ext cx="2110153" cy="4572000"/>
-          </a:xfrm>
-          <a:prstGeom prst="rect">
-            <a:avLst/>
-          </a:prstGeom>
-          <a:solidFill>
-            <a:srgbClr val="000000"/>
-          </a:solidFill>
-          <a:ln>
-            <a:noFill/>
-          </a:ln>
-        </p:spPr>
-        <p:style>
-          <a:lnRef idx="1">
-            <a:schemeClr val="accent1"/>
-          </a:lnRef>
-          <a:fillRef idx="3">
-            <a:schemeClr val="accent1"/>
-          </a:fillRef>
-          <a:effectRef idx="2">
-            <a:schemeClr val="accent1"/>
-          </a:effectRef>
-          <a:fontRef idx="minor">
-            <a:schemeClr val="lt1"/>
-          </a:fontRef>
-        </p:style>
-        <p:txBody>
-          <a:bodyPr rtlCol="0" anchor="ctr"/>
-          <a:lstStyle/>
-          <a:p>
-            <a:pPr algn="ctr"/>
-            <a:endParaRPr/>
           </a:p>
         </p:txBody>
       </p:sp>
